--- a/docs_raw/class diagramm.pptx
+++ b/docs_raw/class diagramm.pptx
@@ -7,6 +7,7 @@
   <p:sldIdLst>
     <p:sldId id="256" r:id="rId2"/>
     <p:sldId id="257" r:id="rId3"/>
+    <p:sldId id="258" r:id="rId4"/>
   </p:sldIdLst>
   <p:sldSz cx="12192000" cy="6858000"/>
   <p:notesSz cx="6858000" cy="9144000"/>
@@ -260,7 +261,7 @@
           <a:p>
             <a:fld id="{EBE88FA0-6002-4C4B-9120-294BEA23AAB4}" type="datetimeFigureOut">
               <a:rPr lang="de-DE" smtClean="0"/>
-              <a:t>27.12.2023</a:t>
+              <a:t>07.05.2025</a:t>
             </a:fld>
             <a:endParaRPr lang="de-DE"/>
           </a:p>
@@ -458,7 +459,7 @@
           <a:p>
             <a:fld id="{EBE88FA0-6002-4C4B-9120-294BEA23AAB4}" type="datetimeFigureOut">
               <a:rPr lang="de-DE" smtClean="0"/>
-              <a:t>27.12.2023</a:t>
+              <a:t>07.05.2025</a:t>
             </a:fld>
             <a:endParaRPr lang="de-DE"/>
           </a:p>
@@ -666,7 +667,7 @@
           <a:p>
             <a:fld id="{EBE88FA0-6002-4C4B-9120-294BEA23AAB4}" type="datetimeFigureOut">
               <a:rPr lang="de-DE" smtClean="0"/>
-              <a:t>27.12.2023</a:t>
+              <a:t>07.05.2025</a:t>
             </a:fld>
             <a:endParaRPr lang="de-DE"/>
           </a:p>
@@ -864,7 +865,7 @@
           <a:p>
             <a:fld id="{EBE88FA0-6002-4C4B-9120-294BEA23AAB4}" type="datetimeFigureOut">
               <a:rPr lang="de-DE" smtClean="0"/>
-              <a:t>27.12.2023</a:t>
+              <a:t>07.05.2025</a:t>
             </a:fld>
             <a:endParaRPr lang="de-DE"/>
           </a:p>
@@ -1139,7 +1140,7 @@
           <a:p>
             <a:fld id="{EBE88FA0-6002-4C4B-9120-294BEA23AAB4}" type="datetimeFigureOut">
               <a:rPr lang="de-DE" smtClean="0"/>
-              <a:t>27.12.2023</a:t>
+              <a:t>07.05.2025</a:t>
             </a:fld>
             <a:endParaRPr lang="de-DE"/>
           </a:p>
@@ -1404,7 +1405,7 @@
           <a:p>
             <a:fld id="{EBE88FA0-6002-4C4B-9120-294BEA23AAB4}" type="datetimeFigureOut">
               <a:rPr lang="de-DE" smtClean="0"/>
-              <a:t>27.12.2023</a:t>
+              <a:t>07.05.2025</a:t>
             </a:fld>
             <a:endParaRPr lang="de-DE"/>
           </a:p>
@@ -1816,7 +1817,7 @@
           <a:p>
             <a:fld id="{EBE88FA0-6002-4C4B-9120-294BEA23AAB4}" type="datetimeFigureOut">
               <a:rPr lang="de-DE" smtClean="0"/>
-              <a:t>27.12.2023</a:t>
+              <a:t>07.05.2025</a:t>
             </a:fld>
             <a:endParaRPr lang="de-DE"/>
           </a:p>
@@ -1957,7 +1958,7 @@
           <a:p>
             <a:fld id="{EBE88FA0-6002-4C4B-9120-294BEA23AAB4}" type="datetimeFigureOut">
               <a:rPr lang="de-DE" smtClean="0"/>
-              <a:t>27.12.2023</a:t>
+              <a:t>07.05.2025</a:t>
             </a:fld>
             <a:endParaRPr lang="de-DE"/>
           </a:p>
@@ -2070,7 +2071,7 @@
           <a:p>
             <a:fld id="{EBE88FA0-6002-4C4B-9120-294BEA23AAB4}" type="datetimeFigureOut">
               <a:rPr lang="de-DE" smtClean="0"/>
-              <a:t>27.12.2023</a:t>
+              <a:t>07.05.2025</a:t>
             </a:fld>
             <a:endParaRPr lang="de-DE"/>
           </a:p>
@@ -2381,7 +2382,7 @@
           <a:p>
             <a:fld id="{EBE88FA0-6002-4C4B-9120-294BEA23AAB4}" type="datetimeFigureOut">
               <a:rPr lang="de-DE" smtClean="0"/>
-              <a:t>27.12.2023</a:t>
+              <a:t>07.05.2025</a:t>
             </a:fld>
             <a:endParaRPr lang="de-DE"/>
           </a:p>
@@ -2669,7 +2670,7 @@
           <a:p>
             <a:fld id="{EBE88FA0-6002-4C4B-9120-294BEA23AAB4}" type="datetimeFigureOut">
               <a:rPr lang="de-DE" smtClean="0"/>
-              <a:t>27.12.2023</a:t>
+              <a:t>07.05.2025</a:t>
             </a:fld>
             <a:endParaRPr lang="de-DE"/>
           </a:p>
@@ -2910,7 +2911,7 @@
           <a:p>
             <a:fld id="{EBE88FA0-6002-4C4B-9120-294BEA23AAB4}" type="datetimeFigureOut">
               <a:rPr lang="de-DE" smtClean="0"/>
-              <a:t>27.12.2023</a:t>
+              <a:t>07.05.2025</a:t>
             </a:fld>
             <a:endParaRPr lang="de-DE"/>
           </a:p>
@@ -9190,6 +9191,2848 @@
 </p:sld>
 </file>
 
+<file path=ppt/slides/slide3.xml><?xml version="1.0" encoding="utf-8"?>
+<p:sld xmlns:a="http://schemas.openxmlformats.org/drawingml/2006/main" xmlns:r="http://schemas.openxmlformats.org/officeDocument/2006/relationships" xmlns:p="http://schemas.openxmlformats.org/presentationml/2006/main">
+  <p:cSld>
+    <p:spTree>
+      <p:nvGrpSpPr>
+        <p:cNvPr id="1" name="">
+          <a:extLst>
+            <a:ext uri="{FF2B5EF4-FFF2-40B4-BE49-F238E27FC236}">
+              <a16:creationId xmlns:a16="http://schemas.microsoft.com/office/drawing/2014/main" id="{35730A3F-C303-94F7-1E71-A82E00138293}"/>
+            </a:ext>
+          </a:extLst>
+        </p:cNvPr>
+        <p:cNvGrpSpPr/>
+        <p:nvPr/>
+      </p:nvGrpSpPr>
+      <p:grpSpPr>
+        <a:xfrm>
+          <a:off x="0" y="0"/>
+          <a:ext cx="0" cy="0"/>
+          <a:chOff x="0" y="0"/>
+          <a:chExt cx="0" cy="0"/>
+        </a:xfrm>
+      </p:grpSpPr>
+      <p:sp>
+        <p:nvSpPr>
+          <p:cNvPr id="10" name="Textfeld 9">
+            <a:extLst>
+              <a:ext uri="{FF2B5EF4-FFF2-40B4-BE49-F238E27FC236}">
+                <a16:creationId xmlns:a16="http://schemas.microsoft.com/office/drawing/2014/main" id="{FD409233-7BFC-879C-8292-DBBC6CADA081}"/>
+              </a:ext>
+            </a:extLst>
+          </p:cNvPr>
+          <p:cNvSpPr txBox="1"/>
+          <p:nvPr/>
+        </p:nvSpPr>
+        <p:spPr>
+          <a:xfrm>
+            <a:off x="5570881" y="232460"/>
+            <a:ext cx="763351" cy="246221"/>
+          </a:xfrm>
+          <a:prstGeom prst="rect">
+            <a:avLst/>
+          </a:prstGeom>
+          <a:noFill/>
+          <a:ln>
+            <a:solidFill>
+              <a:schemeClr val="tx1"/>
+            </a:solidFill>
+          </a:ln>
+        </p:spPr>
+        <p:txBody>
+          <a:bodyPr wrap="none" rtlCol="0">
+            <a:spAutoFit/>
+          </a:bodyPr>
+          <a:lstStyle/>
+          <a:p>
+            <a:r>
+              <a:rPr lang="de-DE" sz="1000" dirty="0" err="1">
+                <a:solidFill>
+                  <a:srgbClr val="FF0000"/>
+                </a:solidFill>
+              </a:rPr>
+              <a:t>FtSwarmIO</a:t>
+            </a:r>
+            <a:endParaRPr lang="de-DE" sz="1000" dirty="0">
+              <a:solidFill>
+                <a:srgbClr val="FF0000"/>
+              </a:solidFill>
+            </a:endParaRPr>
+          </a:p>
+        </p:txBody>
+      </p:sp>
+      <p:sp>
+        <p:nvSpPr>
+          <p:cNvPr id="11" name="Textfeld 10">
+            <a:extLst>
+              <a:ext uri="{FF2B5EF4-FFF2-40B4-BE49-F238E27FC236}">
+                <a16:creationId xmlns:a16="http://schemas.microsoft.com/office/drawing/2014/main" id="{FD579163-9C88-67E3-EE99-1D41B0DE94A0}"/>
+              </a:ext>
+            </a:extLst>
+          </p:cNvPr>
+          <p:cNvSpPr txBox="1"/>
+          <p:nvPr/>
+        </p:nvSpPr>
+        <p:spPr>
+          <a:xfrm>
+            <a:off x="2336059" y="739454"/>
+            <a:ext cx="998991" cy="246221"/>
+          </a:xfrm>
+          <a:prstGeom prst="rect">
+            <a:avLst/>
+          </a:prstGeom>
+          <a:noFill/>
+          <a:ln>
+            <a:solidFill>
+              <a:srgbClr val="FF0000"/>
+            </a:solidFill>
+          </a:ln>
+        </p:spPr>
+        <p:txBody>
+          <a:bodyPr wrap="none" rtlCol="0">
+            <a:spAutoFit/>
+          </a:bodyPr>
+          <a:lstStyle/>
+          <a:p>
+            <a:r>
+              <a:rPr lang="de-DE" sz="1000" dirty="0" err="1">
+                <a:solidFill>
+                  <a:srgbClr val="FF0000"/>
+                </a:solidFill>
+              </a:rPr>
+              <a:t>FtSwarmSensor</a:t>
+            </a:r>
+            <a:endParaRPr lang="de-DE" sz="1000" dirty="0">
+              <a:solidFill>
+                <a:srgbClr val="FF0000"/>
+              </a:solidFill>
+            </a:endParaRPr>
+          </a:p>
+        </p:txBody>
+      </p:sp>
+      <p:cxnSp>
+        <p:nvCxnSpPr>
+          <p:cNvPr id="12" name="Verbinder: gewinkelt 11">
+            <a:extLst>
+              <a:ext uri="{FF2B5EF4-FFF2-40B4-BE49-F238E27FC236}">
+                <a16:creationId xmlns:a16="http://schemas.microsoft.com/office/drawing/2014/main" id="{118FB614-5530-2EE1-7BC1-E030161A8907}"/>
+              </a:ext>
+            </a:extLst>
+          </p:cNvPr>
+          <p:cNvCxnSpPr>
+            <a:stCxn id="10" idx="2"/>
+            <a:endCxn id="11" idx="0"/>
+          </p:cNvCxnSpPr>
+          <p:nvPr/>
+        </p:nvCxnSpPr>
+        <p:spPr>
+          <a:xfrm rot="5400000">
+            <a:off x="4263670" y="-949434"/>
+            <a:ext cx="260773" cy="3117002"/>
+          </a:xfrm>
+          <a:prstGeom prst="bentConnector3">
+            <a:avLst/>
+          </a:prstGeom>
+        </p:spPr>
+        <p:style>
+          <a:lnRef idx="1">
+            <a:schemeClr val="accent1"/>
+          </a:lnRef>
+          <a:fillRef idx="0">
+            <a:schemeClr val="accent1"/>
+          </a:fillRef>
+          <a:effectRef idx="0">
+            <a:schemeClr val="accent1"/>
+          </a:effectRef>
+          <a:fontRef idx="minor">
+            <a:schemeClr val="tx1"/>
+          </a:fontRef>
+        </p:style>
+      </p:cxnSp>
+      <p:sp>
+        <p:nvSpPr>
+          <p:cNvPr id="13" name="Textfeld 12">
+            <a:extLst>
+              <a:ext uri="{FF2B5EF4-FFF2-40B4-BE49-F238E27FC236}">
+                <a16:creationId xmlns:a16="http://schemas.microsoft.com/office/drawing/2014/main" id="{2272793B-95AA-E828-7573-970DFC872C4D}"/>
+              </a:ext>
+            </a:extLst>
+          </p:cNvPr>
+          <p:cNvSpPr txBox="1"/>
+          <p:nvPr/>
+        </p:nvSpPr>
+        <p:spPr>
+          <a:xfrm>
+            <a:off x="1263910" y="1217515"/>
+            <a:ext cx="1253869" cy="246221"/>
+          </a:xfrm>
+          <a:prstGeom prst="rect">
+            <a:avLst/>
+          </a:prstGeom>
+          <a:noFill/>
+          <a:ln>
+            <a:solidFill>
+              <a:srgbClr val="FF0000"/>
+            </a:solidFill>
+          </a:ln>
+        </p:spPr>
+        <p:txBody>
+          <a:bodyPr wrap="none" rtlCol="0">
+            <a:spAutoFit/>
+          </a:bodyPr>
+          <a:lstStyle/>
+          <a:p>
+            <a:r>
+              <a:rPr lang="de-DE" sz="1000" dirty="0" err="1"/>
+              <a:t>FtSwarmDigitalInput</a:t>
+            </a:r>
+            <a:endParaRPr lang="de-DE" sz="1000" dirty="0"/>
+          </a:p>
+        </p:txBody>
+      </p:sp>
+      <p:sp>
+        <p:nvSpPr>
+          <p:cNvPr id="15" name="Textfeld 14">
+            <a:extLst>
+              <a:ext uri="{FF2B5EF4-FFF2-40B4-BE49-F238E27FC236}">
+                <a16:creationId xmlns:a16="http://schemas.microsoft.com/office/drawing/2014/main" id="{FA1D8FAD-DE5F-C5B6-1A5F-0C7C68ACD49D}"/>
+              </a:ext>
+            </a:extLst>
+          </p:cNvPr>
+          <p:cNvSpPr txBox="1"/>
+          <p:nvPr/>
+        </p:nvSpPr>
+        <p:spPr>
+          <a:xfrm>
+            <a:off x="447976" y="1598703"/>
+            <a:ext cx="990977" cy="246221"/>
+          </a:xfrm>
+          <a:prstGeom prst="rect">
+            <a:avLst/>
+          </a:prstGeom>
+          <a:noFill/>
+          <a:ln>
+            <a:solidFill>
+              <a:schemeClr val="tx1"/>
+            </a:solidFill>
+          </a:ln>
+        </p:spPr>
+        <p:txBody>
+          <a:bodyPr wrap="none" rtlCol="0">
+            <a:spAutoFit/>
+          </a:bodyPr>
+          <a:lstStyle/>
+          <a:p>
+            <a:r>
+              <a:rPr lang="de-DE" sz="1000" dirty="0" err="1"/>
+              <a:t>FtSwarmSwitch</a:t>
+            </a:r>
+            <a:endParaRPr lang="de-DE" sz="1000" dirty="0"/>
+          </a:p>
+        </p:txBody>
+      </p:sp>
+      <p:sp>
+        <p:nvSpPr>
+          <p:cNvPr id="16" name="Textfeld 15">
+            <a:extLst>
+              <a:ext uri="{FF2B5EF4-FFF2-40B4-BE49-F238E27FC236}">
+                <a16:creationId xmlns:a16="http://schemas.microsoft.com/office/drawing/2014/main" id="{72A636E0-1513-485D-4D15-40A18C3A3EB1}"/>
+              </a:ext>
+            </a:extLst>
+          </p:cNvPr>
+          <p:cNvSpPr txBox="1"/>
+          <p:nvPr/>
+        </p:nvSpPr>
+        <p:spPr>
+          <a:xfrm>
+            <a:off x="184301" y="1882774"/>
+            <a:ext cx="1255472" cy="246221"/>
+          </a:xfrm>
+          <a:prstGeom prst="rect">
+            <a:avLst/>
+          </a:prstGeom>
+          <a:noFill/>
+          <a:ln>
+            <a:solidFill>
+              <a:schemeClr val="tx1"/>
+            </a:solidFill>
+          </a:ln>
+        </p:spPr>
+        <p:txBody>
+          <a:bodyPr wrap="none" rtlCol="0">
+            <a:spAutoFit/>
+          </a:bodyPr>
+          <a:lstStyle/>
+          <a:p>
+            <a:r>
+              <a:rPr lang="de-DE" sz="1000" dirty="0" err="1"/>
+              <a:t>FtSwarmReedSwitch</a:t>
+            </a:r>
+            <a:endParaRPr lang="de-DE" sz="1000" dirty="0"/>
+          </a:p>
+        </p:txBody>
+      </p:sp>
+      <p:sp>
+        <p:nvSpPr>
+          <p:cNvPr id="17" name="Textfeld 16">
+            <a:extLst>
+              <a:ext uri="{FF2B5EF4-FFF2-40B4-BE49-F238E27FC236}">
+                <a16:creationId xmlns:a16="http://schemas.microsoft.com/office/drawing/2014/main" id="{E26A36CD-A2D1-CB22-B220-5532D27538F5}"/>
+              </a:ext>
+            </a:extLst>
+          </p:cNvPr>
+          <p:cNvSpPr txBox="1"/>
+          <p:nvPr/>
+        </p:nvSpPr>
+        <p:spPr>
+          <a:xfrm>
+            <a:off x="176512" y="2190513"/>
+            <a:ext cx="1260281" cy="246221"/>
+          </a:xfrm>
+          <a:prstGeom prst="rect">
+            <a:avLst/>
+          </a:prstGeom>
+          <a:noFill/>
+          <a:ln>
+            <a:solidFill>
+              <a:schemeClr val="tx1"/>
+            </a:solidFill>
+          </a:ln>
+        </p:spPr>
+        <p:txBody>
+          <a:bodyPr wrap="none" rtlCol="0">
+            <a:spAutoFit/>
+          </a:bodyPr>
+          <a:lstStyle/>
+          <a:p>
+            <a:r>
+              <a:rPr lang="de-DE" sz="1000" dirty="0" err="1"/>
+              <a:t>FtSwarmLightBarrier</a:t>
+            </a:r>
+            <a:endParaRPr lang="de-DE" sz="1000" dirty="0"/>
+          </a:p>
+        </p:txBody>
+      </p:sp>
+      <p:sp>
+        <p:nvSpPr>
+          <p:cNvPr id="18" name="Textfeld 17">
+            <a:extLst>
+              <a:ext uri="{FF2B5EF4-FFF2-40B4-BE49-F238E27FC236}">
+                <a16:creationId xmlns:a16="http://schemas.microsoft.com/office/drawing/2014/main" id="{D9CD4FD6-5876-2270-2FCD-4C43463548A0}"/>
+              </a:ext>
+            </a:extLst>
+          </p:cNvPr>
+          <p:cNvSpPr txBox="1"/>
+          <p:nvPr/>
+        </p:nvSpPr>
+        <p:spPr>
+          <a:xfrm>
+            <a:off x="370023" y="2569307"/>
+            <a:ext cx="1072730" cy="246221"/>
+          </a:xfrm>
+          <a:prstGeom prst="rect">
+            <a:avLst/>
+          </a:prstGeom>
+          <a:solidFill>
+            <a:srgbClr val="FFFF00"/>
+          </a:solidFill>
+          <a:ln>
+            <a:solidFill>
+              <a:schemeClr val="tx1"/>
+            </a:solidFill>
+          </a:ln>
+        </p:spPr>
+        <p:txBody>
+          <a:bodyPr wrap="none" rtlCol="0">
+            <a:spAutoFit/>
+          </a:bodyPr>
+          <a:lstStyle/>
+          <a:p>
+            <a:r>
+              <a:rPr lang="de-DE" sz="1000" dirty="0" err="1"/>
+              <a:t>FtSwarmButton</a:t>
+            </a:r>
+            <a:r>
+              <a:rPr lang="de-DE" sz="1000" dirty="0"/>
+              <a:t> </a:t>
+            </a:r>
+          </a:p>
+        </p:txBody>
+      </p:sp>
+      <p:sp>
+        <p:nvSpPr>
+          <p:cNvPr id="21" name="Textfeld 20">
+            <a:extLst>
+              <a:ext uri="{FF2B5EF4-FFF2-40B4-BE49-F238E27FC236}">
+                <a16:creationId xmlns:a16="http://schemas.microsoft.com/office/drawing/2014/main" id="{CA1FBAEF-7A47-E27A-7760-E8C48BF1977D}"/>
+              </a:ext>
+            </a:extLst>
+          </p:cNvPr>
+          <p:cNvSpPr txBox="1"/>
+          <p:nvPr/>
+        </p:nvSpPr>
+        <p:spPr>
+          <a:xfrm>
+            <a:off x="1213323" y="2887713"/>
+            <a:ext cx="1282723" cy="246221"/>
+          </a:xfrm>
+          <a:prstGeom prst="rect">
+            <a:avLst/>
+          </a:prstGeom>
+          <a:noFill/>
+          <a:ln>
+            <a:solidFill>
+              <a:srgbClr val="FF0000"/>
+            </a:solidFill>
+          </a:ln>
+        </p:spPr>
+        <p:txBody>
+          <a:bodyPr wrap="none" rtlCol="0">
+            <a:spAutoFit/>
+          </a:bodyPr>
+          <a:lstStyle/>
+          <a:p>
+            <a:r>
+              <a:rPr lang="de-DE" sz="1000" dirty="0" err="1"/>
+              <a:t>FtSwarmAnalogInput</a:t>
+            </a:r>
+            <a:endParaRPr lang="de-DE" sz="1000" dirty="0"/>
+          </a:p>
+        </p:txBody>
+      </p:sp>
+      <p:sp>
+        <p:nvSpPr>
+          <p:cNvPr id="25" name="Textfeld 24">
+            <a:extLst>
+              <a:ext uri="{FF2B5EF4-FFF2-40B4-BE49-F238E27FC236}">
+                <a16:creationId xmlns:a16="http://schemas.microsoft.com/office/drawing/2014/main" id="{BE75C3CF-05F0-38A2-0303-1C87E1893FAD}"/>
+              </a:ext>
+            </a:extLst>
+          </p:cNvPr>
+          <p:cNvSpPr txBox="1"/>
+          <p:nvPr/>
+        </p:nvSpPr>
+        <p:spPr>
+          <a:xfrm>
+            <a:off x="259868" y="3241532"/>
+            <a:ext cx="1176925" cy="246221"/>
+          </a:xfrm>
+          <a:prstGeom prst="rect">
+            <a:avLst/>
+          </a:prstGeom>
+          <a:noFill/>
+          <a:ln>
+            <a:solidFill>
+              <a:schemeClr val="tx1"/>
+            </a:solidFill>
+          </a:ln>
+        </p:spPr>
+        <p:txBody>
+          <a:bodyPr wrap="none" rtlCol="0">
+            <a:spAutoFit/>
+          </a:bodyPr>
+          <a:lstStyle/>
+          <a:p>
+            <a:r>
+              <a:rPr lang="de-DE" sz="1000" dirty="0" err="1"/>
+              <a:t>FtSwarmVoltmeter</a:t>
+            </a:r>
+            <a:endParaRPr lang="de-DE" sz="1000" dirty="0"/>
+          </a:p>
+        </p:txBody>
+      </p:sp>
+      <p:sp>
+        <p:nvSpPr>
+          <p:cNvPr id="26" name="Textfeld 25">
+            <a:extLst>
+              <a:ext uri="{FF2B5EF4-FFF2-40B4-BE49-F238E27FC236}">
+                <a16:creationId xmlns:a16="http://schemas.microsoft.com/office/drawing/2014/main" id="{ED8D5DD5-954F-2F6B-5FC9-43A91D96946D}"/>
+              </a:ext>
+            </a:extLst>
+          </p:cNvPr>
+          <p:cNvSpPr txBox="1"/>
+          <p:nvPr/>
+        </p:nvSpPr>
+        <p:spPr>
+          <a:xfrm>
+            <a:off x="216587" y="3540628"/>
+            <a:ext cx="1220206" cy="246221"/>
+          </a:xfrm>
+          <a:prstGeom prst="rect">
+            <a:avLst/>
+          </a:prstGeom>
+          <a:noFill/>
+          <a:ln>
+            <a:solidFill>
+              <a:schemeClr val="tx1"/>
+            </a:solidFill>
+          </a:ln>
+        </p:spPr>
+        <p:txBody>
+          <a:bodyPr wrap="none" rtlCol="0">
+            <a:spAutoFit/>
+          </a:bodyPr>
+          <a:lstStyle/>
+          <a:p>
+            <a:r>
+              <a:rPr lang="de-DE" sz="1000" dirty="0" err="1"/>
+              <a:t>FtSwarmOhmmeter</a:t>
+            </a:r>
+            <a:endParaRPr lang="de-DE" sz="1000" dirty="0"/>
+          </a:p>
+        </p:txBody>
+      </p:sp>
+      <p:sp>
+        <p:nvSpPr>
+          <p:cNvPr id="27" name="Textfeld 26">
+            <a:extLst>
+              <a:ext uri="{FF2B5EF4-FFF2-40B4-BE49-F238E27FC236}">
+                <a16:creationId xmlns:a16="http://schemas.microsoft.com/office/drawing/2014/main" id="{5642575F-607A-50C7-ED33-840FEAEAD3B8}"/>
+              </a:ext>
+            </a:extLst>
+          </p:cNvPr>
+          <p:cNvSpPr txBox="1"/>
+          <p:nvPr/>
+        </p:nvSpPr>
+        <p:spPr>
+          <a:xfrm>
+            <a:off x="62699" y="3847146"/>
+            <a:ext cx="1374094" cy="246221"/>
+          </a:xfrm>
+          <a:prstGeom prst="rect">
+            <a:avLst/>
+          </a:prstGeom>
+          <a:noFill/>
+          <a:ln>
+            <a:solidFill>
+              <a:schemeClr val="tx1"/>
+            </a:solidFill>
+          </a:ln>
+        </p:spPr>
+        <p:txBody>
+          <a:bodyPr wrap="none" rtlCol="0">
+            <a:spAutoFit/>
+          </a:bodyPr>
+          <a:lstStyle/>
+          <a:p>
+            <a:r>
+              <a:rPr lang="de-DE" sz="1000" dirty="0" err="1"/>
+              <a:t>FtSwarmThermometer</a:t>
+            </a:r>
+            <a:endParaRPr lang="de-DE" sz="1000" dirty="0"/>
+          </a:p>
+        </p:txBody>
+      </p:sp>
+      <p:sp>
+        <p:nvSpPr>
+          <p:cNvPr id="28" name="Textfeld 27">
+            <a:extLst>
+              <a:ext uri="{FF2B5EF4-FFF2-40B4-BE49-F238E27FC236}">
+                <a16:creationId xmlns:a16="http://schemas.microsoft.com/office/drawing/2014/main" id="{6C00969A-15DE-51E4-AD58-9FF799DA2AC2}"/>
+              </a:ext>
+            </a:extLst>
+          </p:cNvPr>
+          <p:cNvSpPr txBox="1"/>
+          <p:nvPr/>
+        </p:nvSpPr>
+        <p:spPr>
+          <a:xfrm>
+            <a:off x="599793" y="4147710"/>
+            <a:ext cx="848309" cy="246221"/>
+          </a:xfrm>
+          <a:prstGeom prst="rect">
+            <a:avLst/>
+          </a:prstGeom>
+          <a:noFill/>
+          <a:ln>
+            <a:solidFill>
+              <a:schemeClr val="tx1"/>
+            </a:solidFill>
+          </a:ln>
+        </p:spPr>
+        <p:txBody>
+          <a:bodyPr wrap="none" rtlCol="0">
+            <a:spAutoFit/>
+          </a:bodyPr>
+          <a:lstStyle/>
+          <a:p>
+            <a:r>
+              <a:rPr lang="de-DE" sz="1000" dirty="0" err="1"/>
+              <a:t>FtSwarmLDR</a:t>
+            </a:r>
+            <a:endParaRPr lang="de-DE" sz="1000" dirty="0"/>
+          </a:p>
+        </p:txBody>
+      </p:sp>
+      <p:sp>
+        <p:nvSpPr>
+          <p:cNvPr id="45" name="Textfeld 44">
+            <a:extLst>
+              <a:ext uri="{FF2B5EF4-FFF2-40B4-BE49-F238E27FC236}">
+                <a16:creationId xmlns:a16="http://schemas.microsoft.com/office/drawing/2014/main" id="{2BF30781-06F6-3FE9-89F2-50AC9BD03F43}"/>
+              </a:ext>
+            </a:extLst>
+          </p:cNvPr>
+          <p:cNvSpPr txBox="1"/>
+          <p:nvPr/>
+        </p:nvSpPr>
+        <p:spPr>
+          <a:xfrm>
+            <a:off x="7760874" y="750222"/>
+            <a:ext cx="958917" cy="246221"/>
+          </a:xfrm>
+          <a:prstGeom prst="rect">
+            <a:avLst/>
+          </a:prstGeom>
+          <a:noFill/>
+          <a:ln>
+            <a:solidFill>
+              <a:srgbClr val="FF0000"/>
+            </a:solidFill>
+          </a:ln>
+        </p:spPr>
+        <p:txBody>
+          <a:bodyPr wrap="none" rtlCol="0">
+            <a:spAutoFit/>
+          </a:bodyPr>
+          <a:lstStyle/>
+          <a:p>
+            <a:r>
+              <a:rPr lang="de-DE" sz="1000" dirty="0" err="1">
+                <a:solidFill>
+                  <a:srgbClr val="FF0000"/>
+                </a:solidFill>
+              </a:rPr>
+              <a:t>FtSwarmActor</a:t>
+            </a:r>
+            <a:endParaRPr lang="de-DE" sz="1000" dirty="0">
+              <a:solidFill>
+                <a:srgbClr val="FF0000"/>
+              </a:solidFill>
+            </a:endParaRPr>
+          </a:p>
+        </p:txBody>
+      </p:sp>
+      <p:sp>
+        <p:nvSpPr>
+          <p:cNvPr id="50" name="Textfeld 49">
+            <a:extLst>
+              <a:ext uri="{FF2B5EF4-FFF2-40B4-BE49-F238E27FC236}">
+                <a16:creationId xmlns:a16="http://schemas.microsoft.com/office/drawing/2014/main" id="{ADDB807C-991C-B542-D3F0-63A641DE4234}"/>
+              </a:ext>
+            </a:extLst>
+          </p:cNvPr>
+          <p:cNvSpPr txBox="1"/>
+          <p:nvPr/>
+        </p:nvSpPr>
+        <p:spPr>
+          <a:xfrm>
+            <a:off x="8497789" y="1725770"/>
+            <a:ext cx="978153" cy="246221"/>
+          </a:xfrm>
+          <a:prstGeom prst="rect">
+            <a:avLst/>
+          </a:prstGeom>
+          <a:noFill/>
+          <a:ln>
+            <a:solidFill>
+              <a:schemeClr val="tx1"/>
+            </a:solidFill>
+          </a:ln>
+        </p:spPr>
+        <p:txBody>
+          <a:bodyPr wrap="none" rtlCol="0">
+            <a:spAutoFit/>
+          </a:bodyPr>
+          <a:lstStyle/>
+          <a:p>
+            <a:r>
+              <a:rPr lang="de-DE" sz="1000" dirty="0" err="1"/>
+              <a:t>FtSwarmMotor</a:t>
+            </a:r>
+            <a:endParaRPr lang="de-DE" sz="1000" dirty="0"/>
+          </a:p>
+        </p:txBody>
+      </p:sp>
+      <p:sp>
+        <p:nvSpPr>
+          <p:cNvPr id="53" name="Textfeld 52">
+            <a:extLst>
+              <a:ext uri="{FF2B5EF4-FFF2-40B4-BE49-F238E27FC236}">
+                <a16:creationId xmlns:a16="http://schemas.microsoft.com/office/drawing/2014/main" id="{66EDCD17-F38E-3565-B0DC-D2E78FBD45E5}"/>
+              </a:ext>
+            </a:extLst>
+          </p:cNvPr>
+          <p:cNvSpPr txBox="1"/>
+          <p:nvPr/>
+        </p:nvSpPr>
+        <p:spPr>
+          <a:xfrm>
+            <a:off x="9148088" y="2255404"/>
+            <a:ext cx="1356462" cy="246221"/>
+          </a:xfrm>
+          <a:prstGeom prst="rect">
+            <a:avLst/>
+          </a:prstGeom>
+          <a:noFill/>
+          <a:ln>
+            <a:solidFill>
+              <a:schemeClr val="tx1"/>
+            </a:solidFill>
+          </a:ln>
+        </p:spPr>
+        <p:txBody>
+          <a:bodyPr wrap="none" rtlCol="0">
+            <a:spAutoFit/>
+          </a:bodyPr>
+          <a:lstStyle/>
+          <a:p>
+            <a:r>
+              <a:rPr lang="de-DE" sz="1000" dirty="0" err="1"/>
+              <a:t>FtSwarmTractorMotor</a:t>
+            </a:r>
+            <a:endParaRPr lang="de-DE" sz="1000" dirty="0"/>
+          </a:p>
+        </p:txBody>
+      </p:sp>
+      <p:sp>
+        <p:nvSpPr>
+          <p:cNvPr id="54" name="Textfeld 53">
+            <a:extLst>
+              <a:ext uri="{FF2B5EF4-FFF2-40B4-BE49-F238E27FC236}">
+                <a16:creationId xmlns:a16="http://schemas.microsoft.com/office/drawing/2014/main" id="{3ABC5D0A-708B-E591-E7DC-F375692FC4F9}"/>
+              </a:ext>
+            </a:extLst>
+          </p:cNvPr>
+          <p:cNvSpPr txBox="1"/>
+          <p:nvPr/>
+        </p:nvSpPr>
+        <p:spPr>
+          <a:xfrm>
+            <a:off x="10049924" y="2652538"/>
+            <a:ext cx="1154483" cy="246221"/>
+          </a:xfrm>
+          <a:prstGeom prst="rect">
+            <a:avLst/>
+          </a:prstGeom>
+          <a:noFill/>
+          <a:ln>
+            <a:solidFill>
+              <a:schemeClr val="tx1"/>
+            </a:solidFill>
+          </a:ln>
+        </p:spPr>
+        <p:txBody>
+          <a:bodyPr wrap="none" rtlCol="0">
+            <a:spAutoFit/>
+          </a:bodyPr>
+          <a:lstStyle/>
+          <a:p>
+            <a:r>
+              <a:rPr lang="de-DE" sz="1000" dirty="0" err="1"/>
+              <a:t>FtSwarmXMMotor</a:t>
+            </a:r>
+            <a:endParaRPr lang="de-DE" sz="1000" dirty="0"/>
+          </a:p>
+        </p:txBody>
+      </p:sp>
+      <p:sp>
+        <p:nvSpPr>
+          <p:cNvPr id="55" name="Textfeld 54">
+            <a:extLst>
+              <a:ext uri="{FF2B5EF4-FFF2-40B4-BE49-F238E27FC236}">
+                <a16:creationId xmlns:a16="http://schemas.microsoft.com/office/drawing/2014/main" id="{E1A2085F-7FCC-7EF1-0EA1-D662746C557E}"/>
+              </a:ext>
+            </a:extLst>
+          </p:cNvPr>
+          <p:cNvSpPr txBox="1"/>
+          <p:nvPr/>
+        </p:nvSpPr>
+        <p:spPr>
+          <a:xfrm>
+            <a:off x="10061191" y="2960016"/>
+            <a:ext cx="1406154" cy="246221"/>
+          </a:xfrm>
+          <a:prstGeom prst="rect">
+            <a:avLst/>
+          </a:prstGeom>
+          <a:noFill/>
+          <a:ln>
+            <a:solidFill>
+              <a:schemeClr val="tx1"/>
+            </a:solidFill>
+          </a:ln>
+        </p:spPr>
+        <p:txBody>
+          <a:bodyPr wrap="none" rtlCol="0">
+            <a:spAutoFit/>
+          </a:bodyPr>
+          <a:lstStyle/>
+          <a:p>
+            <a:r>
+              <a:rPr lang="de-DE" sz="1000" dirty="0" err="1"/>
+              <a:t>FtSwarmEncoderMotor</a:t>
+            </a:r>
+            <a:endParaRPr lang="de-DE" sz="1000" dirty="0"/>
+          </a:p>
+        </p:txBody>
+      </p:sp>
+      <p:cxnSp>
+        <p:nvCxnSpPr>
+          <p:cNvPr id="67" name="Verbinder: gewinkelt 66">
+            <a:extLst>
+              <a:ext uri="{FF2B5EF4-FFF2-40B4-BE49-F238E27FC236}">
+                <a16:creationId xmlns:a16="http://schemas.microsoft.com/office/drawing/2014/main" id="{D3B23275-EB49-5862-A4CE-6ED15E92DBA0}"/>
+              </a:ext>
+            </a:extLst>
+          </p:cNvPr>
+          <p:cNvCxnSpPr>
+            <a:stCxn id="53" idx="2"/>
+            <a:endCxn id="54" idx="1"/>
+          </p:cNvCxnSpPr>
+          <p:nvPr/>
+        </p:nvCxnSpPr>
+        <p:spPr>
+          <a:xfrm rot="16200000" flipH="1">
+            <a:off x="9801109" y="2526834"/>
+            <a:ext cx="274024" cy="223605"/>
+          </a:xfrm>
+          <a:prstGeom prst="bentConnector2">
+            <a:avLst/>
+          </a:prstGeom>
+        </p:spPr>
+        <p:style>
+          <a:lnRef idx="1">
+            <a:schemeClr val="accent1"/>
+          </a:lnRef>
+          <a:fillRef idx="0">
+            <a:schemeClr val="accent1"/>
+          </a:fillRef>
+          <a:effectRef idx="0">
+            <a:schemeClr val="accent1"/>
+          </a:effectRef>
+          <a:fontRef idx="minor">
+            <a:schemeClr val="tx1"/>
+          </a:fontRef>
+        </p:style>
+      </p:cxnSp>
+      <p:cxnSp>
+        <p:nvCxnSpPr>
+          <p:cNvPr id="69" name="Verbinder: gewinkelt 68">
+            <a:extLst>
+              <a:ext uri="{FF2B5EF4-FFF2-40B4-BE49-F238E27FC236}">
+                <a16:creationId xmlns:a16="http://schemas.microsoft.com/office/drawing/2014/main" id="{6314BB87-0D4C-DEC7-BF0E-6C7A61A6E367}"/>
+              </a:ext>
+            </a:extLst>
+          </p:cNvPr>
+          <p:cNvCxnSpPr>
+            <a:cxnSpLocks/>
+            <a:stCxn id="53" idx="2"/>
+            <a:endCxn id="55" idx="1"/>
+          </p:cNvCxnSpPr>
+          <p:nvPr/>
+        </p:nvCxnSpPr>
+        <p:spPr>
+          <a:xfrm rot="16200000" flipH="1">
+            <a:off x="9653004" y="2674940"/>
+            <a:ext cx="581502" cy="234872"/>
+          </a:xfrm>
+          <a:prstGeom prst="bentConnector2">
+            <a:avLst/>
+          </a:prstGeom>
+        </p:spPr>
+        <p:style>
+          <a:lnRef idx="1">
+            <a:schemeClr val="accent1"/>
+          </a:lnRef>
+          <a:fillRef idx="0">
+            <a:schemeClr val="accent1"/>
+          </a:fillRef>
+          <a:effectRef idx="0">
+            <a:schemeClr val="accent1"/>
+          </a:effectRef>
+          <a:fontRef idx="minor">
+            <a:schemeClr val="tx1"/>
+          </a:fontRef>
+        </p:style>
+      </p:cxnSp>
+      <p:sp>
+        <p:nvSpPr>
+          <p:cNvPr id="72" name="Textfeld 71">
+            <a:extLst>
+              <a:ext uri="{FF2B5EF4-FFF2-40B4-BE49-F238E27FC236}">
+                <a16:creationId xmlns:a16="http://schemas.microsoft.com/office/drawing/2014/main" id="{6D47A9D7-0FF6-852C-DE49-A921F5C4631A}"/>
+              </a:ext>
+            </a:extLst>
+          </p:cNvPr>
+          <p:cNvSpPr txBox="1"/>
+          <p:nvPr/>
+        </p:nvSpPr>
+        <p:spPr>
+          <a:xfrm>
+            <a:off x="8525962" y="3385029"/>
+            <a:ext cx="1244251" cy="246221"/>
+          </a:xfrm>
+          <a:prstGeom prst="rect">
+            <a:avLst/>
+          </a:prstGeom>
+          <a:noFill/>
+          <a:ln>
+            <a:solidFill>
+              <a:schemeClr val="tx1"/>
+            </a:solidFill>
+          </a:ln>
+        </p:spPr>
+        <p:txBody>
+          <a:bodyPr wrap="none" rtlCol="0">
+            <a:spAutoFit/>
+          </a:bodyPr>
+          <a:lstStyle/>
+          <a:p>
+            <a:r>
+              <a:rPr lang="de-DE" sz="1000" dirty="0" err="1"/>
+              <a:t>FtSwarmOnOffActor</a:t>
+            </a:r>
+            <a:endParaRPr lang="de-DE" sz="1000" dirty="0"/>
+          </a:p>
+        </p:txBody>
+      </p:sp>
+      <p:sp>
+        <p:nvSpPr>
+          <p:cNvPr id="81" name="Textfeld 80">
+            <a:extLst>
+              <a:ext uri="{FF2B5EF4-FFF2-40B4-BE49-F238E27FC236}">
+                <a16:creationId xmlns:a16="http://schemas.microsoft.com/office/drawing/2014/main" id="{D5D01537-6DCA-4F8B-3E70-9470F16678E5}"/>
+              </a:ext>
+            </a:extLst>
+          </p:cNvPr>
+          <p:cNvSpPr txBox="1"/>
+          <p:nvPr/>
+        </p:nvSpPr>
+        <p:spPr>
+          <a:xfrm>
+            <a:off x="9294112" y="3837052"/>
+            <a:ext cx="931665" cy="246221"/>
+          </a:xfrm>
+          <a:prstGeom prst="rect">
+            <a:avLst/>
+          </a:prstGeom>
+          <a:noFill/>
+          <a:ln>
+            <a:solidFill>
+              <a:schemeClr val="tx1"/>
+            </a:solidFill>
+          </a:ln>
+        </p:spPr>
+        <p:txBody>
+          <a:bodyPr wrap="none" rtlCol="0">
+            <a:spAutoFit/>
+          </a:bodyPr>
+          <a:lstStyle/>
+          <a:p>
+            <a:r>
+              <a:rPr lang="de-DE" sz="1000" dirty="0" err="1"/>
+              <a:t>FtSwarmLamp</a:t>
+            </a:r>
+            <a:endParaRPr lang="de-DE" sz="1000" dirty="0"/>
+          </a:p>
+        </p:txBody>
+      </p:sp>
+      <p:sp>
+        <p:nvSpPr>
+          <p:cNvPr id="82" name="Textfeld 81">
+            <a:extLst>
+              <a:ext uri="{FF2B5EF4-FFF2-40B4-BE49-F238E27FC236}">
+                <a16:creationId xmlns:a16="http://schemas.microsoft.com/office/drawing/2014/main" id="{DFEAD64F-75DA-1A24-5F0C-02455D513F93}"/>
+              </a:ext>
+            </a:extLst>
+          </p:cNvPr>
+          <p:cNvSpPr txBox="1"/>
+          <p:nvPr/>
+        </p:nvSpPr>
+        <p:spPr>
+          <a:xfrm>
+            <a:off x="9294112" y="4151083"/>
+            <a:ext cx="930063" cy="246221"/>
+          </a:xfrm>
+          <a:prstGeom prst="rect">
+            <a:avLst/>
+          </a:prstGeom>
+          <a:noFill/>
+          <a:ln>
+            <a:solidFill>
+              <a:schemeClr val="tx1"/>
+            </a:solidFill>
+          </a:ln>
+        </p:spPr>
+        <p:txBody>
+          <a:bodyPr wrap="none" rtlCol="0">
+            <a:spAutoFit/>
+          </a:bodyPr>
+          <a:lstStyle/>
+          <a:p>
+            <a:r>
+              <a:rPr lang="de-DE" sz="1000" dirty="0" err="1"/>
+              <a:t>FtSwarmValve</a:t>
+            </a:r>
+            <a:endParaRPr lang="de-DE" sz="1000" dirty="0"/>
+          </a:p>
+        </p:txBody>
+      </p:sp>
+      <p:sp>
+        <p:nvSpPr>
+          <p:cNvPr id="84" name="Textfeld 83">
+            <a:extLst>
+              <a:ext uri="{FF2B5EF4-FFF2-40B4-BE49-F238E27FC236}">
+                <a16:creationId xmlns:a16="http://schemas.microsoft.com/office/drawing/2014/main" id="{D0FF20AF-D4FF-D75F-D440-68180AD47DD7}"/>
+              </a:ext>
+            </a:extLst>
+          </p:cNvPr>
+          <p:cNvSpPr txBox="1"/>
+          <p:nvPr/>
+        </p:nvSpPr>
+        <p:spPr>
+          <a:xfrm>
+            <a:off x="9294112" y="4474785"/>
+            <a:ext cx="1273105" cy="246221"/>
+          </a:xfrm>
+          <a:prstGeom prst="rect">
+            <a:avLst/>
+          </a:prstGeom>
+          <a:noFill/>
+          <a:ln>
+            <a:solidFill>
+              <a:schemeClr val="tx1"/>
+            </a:solidFill>
+          </a:ln>
+        </p:spPr>
+        <p:txBody>
+          <a:bodyPr wrap="none" rtlCol="0">
+            <a:spAutoFit/>
+          </a:bodyPr>
+          <a:lstStyle/>
+          <a:p>
+            <a:r>
+              <a:rPr lang="de-DE" sz="1000" dirty="0" err="1"/>
+              <a:t>FtSwarmCompressor</a:t>
+            </a:r>
+            <a:endParaRPr lang="de-DE" sz="1000" dirty="0"/>
+          </a:p>
+        </p:txBody>
+      </p:sp>
+      <p:sp>
+        <p:nvSpPr>
+          <p:cNvPr id="85" name="Textfeld 84">
+            <a:extLst>
+              <a:ext uri="{FF2B5EF4-FFF2-40B4-BE49-F238E27FC236}">
+                <a16:creationId xmlns:a16="http://schemas.microsoft.com/office/drawing/2014/main" id="{51609955-F1F5-7A00-ADBF-FB9184706D94}"/>
+              </a:ext>
+            </a:extLst>
+          </p:cNvPr>
+          <p:cNvSpPr txBox="1"/>
+          <p:nvPr/>
+        </p:nvSpPr>
+        <p:spPr>
+          <a:xfrm>
+            <a:off x="9294111" y="4810879"/>
+            <a:ext cx="995785" cy="246221"/>
+          </a:xfrm>
+          <a:prstGeom prst="rect">
+            <a:avLst/>
+          </a:prstGeom>
+          <a:noFill/>
+          <a:ln>
+            <a:solidFill>
+              <a:schemeClr val="tx1"/>
+            </a:solidFill>
+          </a:ln>
+        </p:spPr>
+        <p:txBody>
+          <a:bodyPr wrap="none" rtlCol="0">
+            <a:spAutoFit/>
+          </a:bodyPr>
+          <a:lstStyle/>
+          <a:p>
+            <a:r>
+              <a:rPr lang="de-DE" sz="1000" dirty="0" err="1"/>
+              <a:t>FtSwarmBuzzer</a:t>
+            </a:r>
+            <a:endParaRPr lang="de-DE" sz="1000" dirty="0"/>
+          </a:p>
+        </p:txBody>
+      </p:sp>
+      <p:cxnSp>
+        <p:nvCxnSpPr>
+          <p:cNvPr id="87" name="Verbinder: gewinkelt 86">
+            <a:extLst>
+              <a:ext uri="{FF2B5EF4-FFF2-40B4-BE49-F238E27FC236}">
+                <a16:creationId xmlns:a16="http://schemas.microsoft.com/office/drawing/2014/main" id="{D3A016C4-D4DE-C6B9-3FDD-A61E57051347}"/>
+              </a:ext>
+            </a:extLst>
+          </p:cNvPr>
+          <p:cNvCxnSpPr>
+            <a:stCxn id="72" idx="2"/>
+            <a:endCxn id="81" idx="1"/>
+          </p:cNvCxnSpPr>
+          <p:nvPr/>
+        </p:nvCxnSpPr>
+        <p:spPr>
+          <a:xfrm rot="16200000" flipH="1">
+            <a:off x="9056644" y="3722694"/>
+            <a:ext cx="328913" cy="146024"/>
+          </a:xfrm>
+          <a:prstGeom prst="bentConnector2">
+            <a:avLst/>
+          </a:prstGeom>
+        </p:spPr>
+        <p:style>
+          <a:lnRef idx="1">
+            <a:schemeClr val="accent1"/>
+          </a:lnRef>
+          <a:fillRef idx="0">
+            <a:schemeClr val="accent1"/>
+          </a:fillRef>
+          <a:effectRef idx="0">
+            <a:schemeClr val="accent1"/>
+          </a:effectRef>
+          <a:fontRef idx="minor">
+            <a:schemeClr val="tx1"/>
+          </a:fontRef>
+        </p:style>
+      </p:cxnSp>
+      <p:cxnSp>
+        <p:nvCxnSpPr>
+          <p:cNvPr id="88" name="Verbinder: gewinkelt 87">
+            <a:extLst>
+              <a:ext uri="{FF2B5EF4-FFF2-40B4-BE49-F238E27FC236}">
+                <a16:creationId xmlns:a16="http://schemas.microsoft.com/office/drawing/2014/main" id="{54A4B08C-DD07-6474-8469-5BD7DDDEC3AF}"/>
+              </a:ext>
+            </a:extLst>
+          </p:cNvPr>
+          <p:cNvCxnSpPr>
+            <a:cxnSpLocks/>
+            <a:stCxn id="72" idx="2"/>
+            <a:endCxn id="82" idx="1"/>
+          </p:cNvCxnSpPr>
+          <p:nvPr/>
+        </p:nvCxnSpPr>
+        <p:spPr>
+          <a:xfrm rot="16200000" flipH="1">
+            <a:off x="8899628" y="3879710"/>
+            <a:ext cx="642944" cy="146024"/>
+          </a:xfrm>
+          <a:prstGeom prst="bentConnector2">
+            <a:avLst/>
+          </a:prstGeom>
+        </p:spPr>
+        <p:style>
+          <a:lnRef idx="1">
+            <a:schemeClr val="accent1"/>
+          </a:lnRef>
+          <a:fillRef idx="0">
+            <a:schemeClr val="accent1"/>
+          </a:fillRef>
+          <a:effectRef idx="0">
+            <a:schemeClr val="accent1"/>
+          </a:effectRef>
+          <a:fontRef idx="minor">
+            <a:schemeClr val="tx1"/>
+          </a:fontRef>
+        </p:style>
+      </p:cxnSp>
+      <p:cxnSp>
+        <p:nvCxnSpPr>
+          <p:cNvPr id="89" name="Verbinder: gewinkelt 88">
+            <a:extLst>
+              <a:ext uri="{FF2B5EF4-FFF2-40B4-BE49-F238E27FC236}">
+                <a16:creationId xmlns:a16="http://schemas.microsoft.com/office/drawing/2014/main" id="{5B75FDF5-158E-221A-0B49-16BD8FD130E7}"/>
+              </a:ext>
+            </a:extLst>
+          </p:cNvPr>
+          <p:cNvCxnSpPr>
+            <a:cxnSpLocks/>
+            <a:stCxn id="72" idx="2"/>
+            <a:endCxn id="84" idx="1"/>
+          </p:cNvCxnSpPr>
+          <p:nvPr/>
+        </p:nvCxnSpPr>
+        <p:spPr>
+          <a:xfrm rot="16200000" flipH="1">
+            <a:off x="8737777" y="4041561"/>
+            <a:ext cx="966646" cy="146024"/>
+          </a:xfrm>
+          <a:prstGeom prst="bentConnector2">
+            <a:avLst/>
+          </a:prstGeom>
+        </p:spPr>
+        <p:style>
+          <a:lnRef idx="1">
+            <a:schemeClr val="accent1"/>
+          </a:lnRef>
+          <a:fillRef idx="0">
+            <a:schemeClr val="accent1"/>
+          </a:fillRef>
+          <a:effectRef idx="0">
+            <a:schemeClr val="accent1"/>
+          </a:effectRef>
+          <a:fontRef idx="minor">
+            <a:schemeClr val="tx1"/>
+          </a:fontRef>
+        </p:style>
+      </p:cxnSp>
+      <p:cxnSp>
+        <p:nvCxnSpPr>
+          <p:cNvPr id="92" name="Verbinder: gewinkelt 91">
+            <a:extLst>
+              <a:ext uri="{FF2B5EF4-FFF2-40B4-BE49-F238E27FC236}">
+                <a16:creationId xmlns:a16="http://schemas.microsoft.com/office/drawing/2014/main" id="{BD0B3E03-DDC8-9CBD-EDFF-88AAF026CDA6}"/>
+              </a:ext>
+            </a:extLst>
+          </p:cNvPr>
+          <p:cNvCxnSpPr>
+            <a:cxnSpLocks/>
+            <a:stCxn id="72" idx="2"/>
+            <a:endCxn id="85" idx="1"/>
+          </p:cNvCxnSpPr>
+          <p:nvPr/>
+        </p:nvCxnSpPr>
+        <p:spPr>
+          <a:xfrm rot="16200000" flipH="1">
+            <a:off x="8569729" y="4209608"/>
+            <a:ext cx="1302740" cy="146023"/>
+          </a:xfrm>
+          <a:prstGeom prst="bentConnector2">
+            <a:avLst/>
+          </a:prstGeom>
+        </p:spPr>
+        <p:style>
+          <a:lnRef idx="1">
+            <a:schemeClr val="accent1"/>
+          </a:lnRef>
+          <a:fillRef idx="0">
+            <a:schemeClr val="accent1"/>
+          </a:fillRef>
+          <a:effectRef idx="0">
+            <a:schemeClr val="accent1"/>
+          </a:effectRef>
+          <a:fontRef idx="minor">
+            <a:schemeClr val="tx1"/>
+          </a:fontRef>
+        </p:style>
+      </p:cxnSp>
+      <p:sp>
+        <p:nvSpPr>
+          <p:cNvPr id="93" name="Textfeld 92">
+            <a:extLst>
+              <a:ext uri="{FF2B5EF4-FFF2-40B4-BE49-F238E27FC236}">
+                <a16:creationId xmlns:a16="http://schemas.microsoft.com/office/drawing/2014/main" id="{BB65A256-6D30-0EDF-6BCF-609249BE00F6}"/>
+              </a:ext>
+            </a:extLst>
+          </p:cNvPr>
+          <p:cNvSpPr txBox="1"/>
+          <p:nvPr/>
+        </p:nvSpPr>
+        <p:spPr>
+          <a:xfrm>
+            <a:off x="3060601" y="1177871"/>
+            <a:ext cx="918841" cy="246221"/>
+          </a:xfrm>
+          <a:prstGeom prst="rect">
+            <a:avLst/>
+          </a:prstGeom>
+          <a:noFill/>
+          <a:ln>
+            <a:solidFill>
+              <a:srgbClr val="FF0000"/>
+            </a:solidFill>
+          </a:ln>
+        </p:spPr>
+        <p:txBody>
+          <a:bodyPr wrap="none" rtlCol="0">
+            <a:spAutoFit/>
+          </a:bodyPr>
+          <a:lstStyle/>
+          <a:p>
+            <a:r>
+              <a:rPr lang="de-DE" sz="1000" dirty="0" err="1"/>
+              <a:t>FtSwarmPixel</a:t>
+            </a:r>
+            <a:r>
+              <a:rPr lang="de-DE" sz="1000" dirty="0"/>
+              <a:t> </a:t>
+            </a:r>
+          </a:p>
+        </p:txBody>
+      </p:sp>
+      <p:sp>
+        <p:nvSpPr>
+          <p:cNvPr id="96" name="Textfeld 95">
+            <a:extLst>
+              <a:ext uri="{FF2B5EF4-FFF2-40B4-BE49-F238E27FC236}">
+                <a16:creationId xmlns:a16="http://schemas.microsoft.com/office/drawing/2014/main" id="{29A1B8BF-30C5-B738-8C82-669DBB3EEE1B}"/>
+              </a:ext>
+            </a:extLst>
+          </p:cNvPr>
+          <p:cNvSpPr txBox="1"/>
+          <p:nvPr/>
+        </p:nvSpPr>
+        <p:spPr>
+          <a:xfrm>
+            <a:off x="8597636" y="5363400"/>
+            <a:ext cx="939681" cy="246221"/>
+          </a:xfrm>
+          <a:prstGeom prst="rect">
+            <a:avLst/>
+          </a:prstGeom>
+          <a:solidFill>
+            <a:srgbClr val="FFFF00"/>
+          </a:solidFill>
+          <a:ln>
+            <a:solidFill>
+              <a:schemeClr val="tx1"/>
+            </a:solidFill>
+          </a:ln>
+        </p:spPr>
+        <p:txBody>
+          <a:bodyPr wrap="none" rtlCol="0">
+            <a:spAutoFit/>
+          </a:bodyPr>
+          <a:lstStyle/>
+          <a:p>
+            <a:r>
+              <a:rPr lang="de-DE" sz="1000" dirty="0" err="1"/>
+              <a:t>FtSwarmServo</a:t>
+            </a:r>
+            <a:endParaRPr lang="de-DE" sz="1000" dirty="0"/>
+          </a:p>
+        </p:txBody>
+      </p:sp>
+      <p:sp>
+        <p:nvSpPr>
+          <p:cNvPr id="98" name="Textfeld 97">
+            <a:extLst>
+              <a:ext uri="{FF2B5EF4-FFF2-40B4-BE49-F238E27FC236}">
+                <a16:creationId xmlns:a16="http://schemas.microsoft.com/office/drawing/2014/main" id="{E94DBC7B-088E-4DD9-D94C-D2B553726674}"/>
+              </a:ext>
+            </a:extLst>
+          </p:cNvPr>
+          <p:cNvSpPr txBox="1"/>
+          <p:nvPr/>
+        </p:nvSpPr>
+        <p:spPr>
+          <a:xfrm>
+            <a:off x="1448964" y="4543560"/>
+            <a:ext cx="1047082" cy="246221"/>
+          </a:xfrm>
+          <a:prstGeom prst="rect">
+            <a:avLst/>
+          </a:prstGeom>
+          <a:solidFill>
+            <a:srgbClr val="FFFF00"/>
+          </a:solidFill>
+          <a:ln>
+            <a:solidFill>
+              <a:srgbClr val="FF0000"/>
+            </a:solidFill>
+          </a:ln>
+        </p:spPr>
+        <p:txBody>
+          <a:bodyPr wrap="none" rtlCol="0">
+            <a:spAutoFit/>
+          </a:bodyPr>
+          <a:lstStyle>
+            <a:defPPr>
+              <a:defRPr lang="de-DE"/>
+            </a:defPPr>
+            <a:lvl1pPr>
+              <a:defRPr sz="1000"/>
+            </a:lvl1pPr>
+          </a:lstStyle>
+          <a:p>
+            <a:r>
+              <a:rPr lang="de-DE" dirty="0" err="1"/>
+              <a:t>FtSwarmJoystick</a:t>
+            </a:r>
+            <a:endParaRPr lang="de-DE" dirty="0"/>
+          </a:p>
+        </p:txBody>
+      </p:sp>
+      <p:sp>
+        <p:nvSpPr>
+          <p:cNvPr id="99" name="Textfeld 98">
+            <a:extLst>
+              <a:ext uri="{FF2B5EF4-FFF2-40B4-BE49-F238E27FC236}">
+                <a16:creationId xmlns:a16="http://schemas.microsoft.com/office/drawing/2014/main" id="{25BA6EC9-DABE-419D-2977-B92A9707B45E}"/>
+              </a:ext>
+            </a:extLst>
+          </p:cNvPr>
+          <p:cNvSpPr txBox="1"/>
+          <p:nvPr/>
+        </p:nvSpPr>
+        <p:spPr>
+          <a:xfrm>
+            <a:off x="4069061" y="1177871"/>
+            <a:ext cx="841897" cy="246221"/>
+          </a:xfrm>
+          <a:prstGeom prst="rect">
+            <a:avLst/>
+          </a:prstGeom>
+          <a:noFill/>
+          <a:ln>
+            <a:solidFill>
+              <a:srgbClr val="FF0000"/>
+            </a:solidFill>
+          </a:ln>
+        </p:spPr>
+        <p:txBody>
+          <a:bodyPr wrap="none" rtlCol="0">
+            <a:spAutoFit/>
+          </a:bodyPr>
+          <a:lstStyle/>
+          <a:p>
+            <a:r>
+              <a:rPr lang="de-DE" sz="1000" dirty="0"/>
+              <a:t>FtSwarmI2C </a:t>
+            </a:r>
+          </a:p>
+        </p:txBody>
+      </p:sp>
+      <p:sp>
+        <p:nvSpPr>
+          <p:cNvPr id="100" name="Textfeld 99">
+            <a:extLst>
+              <a:ext uri="{FF2B5EF4-FFF2-40B4-BE49-F238E27FC236}">
+                <a16:creationId xmlns:a16="http://schemas.microsoft.com/office/drawing/2014/main" id="{ABC2C001-09EB-69F3-6E3D-B69ECCE91E5F}"/>
+              </a:ext>
+            </a:extLst>
+          </p:cNvPr>
+          <p:cNvSpPr txBox="1"/>
+          <p:nvPr/>
+        </p:nvSpPr>
+        <p:spPr>
+          <a:xfrm>
+            <a:off x="4988832" y="1177871"/>
+            <a:ext cx="955711" cy="246221"/>
+          </a:xfrm>
+          <a:prstGeom prst="rect">
+            <a:avLst/>
+          </a:prstGeom>
+          <a:noFill/>
+          <a:ln>
+            <a:solidFill>
+              <a:srgbClr val="FF0000"/>
+            </a:solidFill>
+          </a:ln>
+        </p:spPr>
+        <p:txBody>
+          <a:bodyPr wrap="none" rtlCol="0">
+            <a:spAutoFit/>
+          </a:bodyPr>
+          <a:lstStyle/>
+          <a:p>
+            <a:r>
+              <a:rPr lang="de-DE" sz="1000" dirty="0" err="1"/>
+              <a:t>FtSwarmOLED</a:t>
+            </a:r>
+            <a:endParaRPr lang="de-DE" sz="1000" dirty="0"/>
+          </a:p>
+        </p:txBody>
+      </p:sp>
+      <p:sp>
+        <p:nvSpPr>
+          <p:cNvPr id="106" name="Textfeld 105">
+            <a:extLst>
+              <a:ext uri="{FF2B5EF4-FFF2-40B4-BE49-F238E27FC236}">
+                <a16:creationId xmlns:a16="http://schemas.microsoft.com/office/drawing/2014/main" id="{7307FC5B-9EE9-48B3-1BF5-C472EF8AA7AC}"/>
+              </a:ext>
+            </a:extLst>
+          </p:cNvPr>
+          <p:cNvSpPr txBox="1"/>
+          <p:nvPr/>
+        </p:nvSpPr>
+        <p:spPr>
+          <a:xfrm>
+            <a:off x="1468267" y="5246373"/>
+            <a:ext cx="1024639" cy="246221"/>
+          </a:xfrm>
+          <a:prstGeom prst="rect">
+            <a:avLst/>
+          </a:prstGeom>
+          <a:noFill/>
+          <a:ln>
+            <a:solidFill>
+              <a:srgbClr val="FF0000"/>
+            </a:solidFill>
+          </a:ln>
+        </p:spPr>
+        <p:txBody>
+          <a:bodyPr wrap="none" rtlCol="0">
+            <a:spAutoFit/>
+          </a:bodyPr>
+          <a:lstStyle/>
+          <a:p>
+            <a:r>
+              <a:rPr lang="de-DE" sz="1000" dirty="0" err="1"/>
+              <a:t>FtSwamCounter</a:t>
+            </a:r>
+            <a:endParaRPr lang="de-DE" sz="1000" dirty="0"/>
+          </a:p>
+        </p:txBody>
+      </p:sp>
+      <p:sp>
+        <p:nvSpPr>
+          <p:cNvPr id="108" name="Textfeld 107">
+            <a:extLst>
+              <a:ext uri="{FF2B5EF4-FFF2-40B4-BE49-F238E27FC236}">
+                <a16:creationId xmlns:a16="http://schemas.microsoft.com/office/drawing/2014/main" id="{CD65F3DB-ED94-6A0B-74B2-4E58BD5DBA97}"/>
+              </a:ext>
+            </a:extLst>
+          </p:cNvPr>
+          <p:cNvSpPr txBox="1"/>
+          <p:nvPr/>
+        </p:nvSpPr>
+        <p:spPr>
+          <a:xfrm>
+            <a:off x="980954" y="4897379"/>
+            <a:ext cx="1511952" cy="246221"/>
+          </a:xfrm>
+          <a:prstGeom prst="rect">
+            <a:avLst/>
+          </a:prstGeom>
+          <a:noFill/>
+          <a:ln>
+            <a:solidFill>
+              <a:srgbClr val="FF0000"/>
+            </a:solidFill>
+          </a:ln>
+        </p:spPr>
+        <p:txBody>
+          <a:bodyPr wrap="none" rtlCol="0">
+            <a:spAutoFit/>
+          </a:bodyPr>
+          <a:lstStyle/>
+          <a:p>
+            <a:r>
+              <a:rPr lang="de-DE" sz="1000" dirty="0" err="1"/>
+              <a:t>FtSwarmFrequencymeter</a:t>
+            </a:r>
+            <a:endParaRPr lang="de-DE" sz="1000" dirty="0"/>
+          </a:p>
+        </p:txBody>
+      </p:sp>
+      <p:cxnSp>
+        <p:nvCxnSpPr>
+          <p:cNvPr id="110" name="Verbinder: gewinkelt 109">
+            <a:extLst>
+              <a:ext uri="{FF2B5EF4-FFF2-40B4-BE49-F238E27FC236}">
+                <a16:creationId xmlns:a16="http://schemas.microsoft.com/office/drawing/2014/main" id="{A9C4BC5A-8E94-E347-63D1-0194C9D08941}"/>
+              </a:ext>
+            </a:extLst>
+          </p:cNvPr>
+          <p:cNvCxnSpPr>
+            <a:cxnSpLocks/>
+            <a:stCxn id="13" idx="2"/>
+            <a:endCxn id="15" idx="3"/>
+          </p:cNvCxnSpPr>
+          <p:nvPr/>
+        </p:nvCxnSpPr>
+        <p:spPr>
+          <a:xfrm rot="5400000">
+            <a:off x="1535860" y="1366829"/>
+            <a:ext cx="258078" cy="451892"/>
+          </a:xfrm>
+          <a:prstGeom prst="bentConnector2">
+            <a:avLst/>
+          </a:prstGeom>
+        </p:spPr>
+        <p:style>
+          <a:lnRef idx="1">
+            <a:schemeClr val="accent1"/>
+          </a:lnRef>
+          <a:fillRef idx="0">
+            <a:schemeClr val="accent1"/>
+          </a:fillRef>
+          <a:effectRef idx="0">
+            <a:schemeClr val="accent1"/>
+          </a:effectRef>
+          <a:fontRef idx="minor">
+            <a:schemeClr val="tx1"/>
+          </a:fontRef>
+        </p:style>
+      </p:cxnSp>
+      <p:cxnSp>
+        <p:nvCxnSpPr>
+          <p:cNvPr id="112" name="Verbinder: gewinkelt 111">
+            <a:extLst>
+              <a:ext uri="{FF2B5EF4-FFF2-40B4-BE49-F238E27FC236}">
+                <a16:creationId xmlns:a16="http://schemas.microsoft.com/office/drawing/2014/main" id="{416D965C-2271-19A7-3C78-BC2FD44A4651}"/>
+              </a:ext>
+            </a:extLst>
+          </p:cNvPr>
+          <p:cNvCxnSpPr>
+            <a:cxnSpLocks/>
+            <a:stCxn id="13" idx="2"/>
+            <a:endCxn id="16" idx="3"/>
+          </p:cNvCxnSpPr>
+          <p:nvPr/>
+        </p:nvCxnSpPr>
+        <p:spPr>
+          <a:xfrm rot="5400000">
+            <a:off x="1394235" y="1509274"/>
+            <a:ext cx="542149" cy="451072"/>
+          </a:xfrm>
+          <a:prstGeom prst="bentConnector2">
+            <a:avLst/>
+          </a:prstGeom>
+        </p:spPr>
+        <p:style>
+          <a:lnRef idx="1">
+            <a:schemeClr val="accent1"/>
+          </a:lnRef>
+          <a:fillRef idx="0">
+            <a:schemeClr val="accent1"/>
+          </a:fillRef>
+          <a:effectRef idx="0">
+            <a:schemeClr val="accent1"/>
+          </a:effectRef>
+          <a:fontRef idx="minor">
+            <a:schemeClr val="tx1"/>
+          </a:fontRef>
+        </p:style>
+      </p:cxnSp>
+      <p:cxnSp>
+        <p:nvCxnSpPr>
+          <p:cNvPr id="114" name="Verbinder: gewinkelt 113">
+            <a:extLst>
+              <a:ext uri="{FF2B5EF4-FFF2-40B4-BE49-F238E27FC236}">
+                <a16:creationId xmlns:a16="http://schemas.microsoft.com/office/drawing/2014/main" id="{D7A71C6C-71AA-34C9-04EA-5165BD1D0645}"/>
+              </a:ext>
+            </a:extLst>
+          </p:cNvPr>
+          <p:cNvCxnSpPr>
+            <a:cxnSpLocks/>
+            <a:stCxn id="13" idx="2"/>
+            <a:endCxn id="17" idx="3"/>
+          </p:cNvCxnSpPr>
+          <p:nvPr/>
+        </p:nvCxnSpPr>
+        <p:spPr>
+          <a:xfrm rot="5400000">
+            <a:off x="1238875" y="1661654"/>
+            <a:ext cx="849888" cy="454052"/>
+          </a:xfrm>
+          <a:prstGeom prst="bentConnector2">
+            <a:avLst/>
+          </a:prstGeom>
+        </p:spPr>
+        <p:style>
+          <a:lnRef idx="1">
+            <a:schemeClr val="accent1"/>
+          </a:lnRef>
+          <a:fillRef idx="0">
+            <a:schemeClr val="accent1"/>
+          </a:fillRef>
+          <a:effectRef idx="0">
+            <a:schemeClr val="accent1"/>
+          </a:effectRef>
+          <a:fontRef idx="minor">
+            <a:schemeClr val="tx1"/>
+          </a:fontRef>
+        </p:style>
+      </p:cxnSp>
+      <p:sp>
+        <p:nvSpPr>
+          <p:cNvPr id="121" name="Textfeld 120">
+            <a:extLst>
+              <a:ext uri="{FF2B5EF4-FFF2-40B4-BE49-F238E27FC236}">
+                <a16:creationId xmlns:a16="http://schemas.microsoft.com/office/drawing/2014/main" id="{D823F80C-7B32-F10D-F0E8-AFEB2B77FB5B}"/>
+              </a:ext>
+            </a:extLst>
+          </p:cNvPr>
+          <p:cNvSpPr txBox="1"/>
+          <p:nvPr/>
+        </p:nvSpPr>
+        <p:spPr>
+          <a:xfrm>
+            <a:off x="8477674" y="1334258"/>
+            <a:ext cx="1388522" cy="246221"/>
+          </a:xfrm>
+          <a:prstGeom prst="rect">
+            <a:avLst/>
+          </a:prstGeom>
+          <a:noFill/>
+          <a:ln>
+            <a:solidFill>
+              <a:schemeClr val="tx1"/>
+            </a:solidFill>
+          </a:ln>
+        </p:spPr>
+        <p:txBody>
+          <a:bodyPr wrap="none" rtlCol="0">
+            <a:spAutoFit/>
+          </a:bodyPr>
+          <a:lstStyle/>
+          <a:p>
+            <a:r>
+              <a:rPr lang="de-DE" sz="1000" dirty="0" err="1"/>
+              <a:t>FtSwarmStepperMotor</a:t>
+            </a:r>
+            <a:endParaRPr lang="de-DE" sz="1000" dirty="0"/>
+          </a:p>
+        </p:txBody>
+      </p:sp>
+      <p:cxnSp>
+        <p:nvCxnSpPr>
+          <p:cNvPr id="165" name="Verbinder: gewinkelt 164">
+            <a:extLst>
+              <a:ext uri="{FF2B5EF4-FFF2-40B4-BE49-F238E27FC236}">
+                <a16:creationId xmlns:a16="http://schemas.microsoft.com/office/drawing/2014/main" id="{290E7B70-313C-3A3C-355C-962B67483A8A}"/>
+              </a:ext>
+            </a:extLst>
+          </p:cNvPr>
+          <p:cNvCxnSpPr>
+            <a:cxnSpLocks/>
+            <a:stCxn id="13" idx="2"/>
+            <a:endCxn id="18" idx="3"/>
+          </p:cNvCxnSpPr>
+          <p:nvPr/>
+        </p:nvCxnSpPr>
+        <p:spPr>
+          <a:xfrm rot="5400000">
+            <a:off x="1052458" y="1854031"/>
+            <a:ext cx="1228682" cy="448092"/>
+          </a:xfrm>
+          <a:prstGeom prst="bentConnector2">
+            <a:avLst/>
+          </a:prstGeom>
+        </p:spPr>
+        <p:style>
+          <a:lnRef idx="1">
+            <a:schemeClr val="accent1"/>
+          </a:lnRef>
+          <a:fillRef idx="0">
+            <a:schemeClr val="accent1"/>
+          </a:fillRef>
+          <a:effectRef idx="0">
+            <a:schemeClr val="accent1"/>
+          </a:effectRef>
+          <a:fontRef idx="minor">
+            <a:schemeClr val="tx1"/>
+          </a:fontRef>
+        </p:style>
+      </p:cxnSp>
+      <p:cxnSp>
+        <p:nvCxnSpPr>
+          <p:cNvPr id="176" name="Verbinder: gewinkelt 175">
+            <a:extLst>
+              <a:ext uri="{FF2B5EF4-FFF2-40B4-BE49-F238E27FC236}">
+                <a16:creationId xmlns:a16="http://schemas.microsoft.com/office/drawing/2014/main" id="{E01A3164-956A-F1E8-83CB-C08AB5090F35}"/>
+              </a:ext>
+            </a:extLst>
+          </p:cNvPr>
+          <p:cNvCxnSpPr>
+            <a:cxnSpLocks/>
+            <a:stCxn id="45" idx="2"/>
+            <a:endCxn id="121" idx="1"/>
+          </p:cNvCxnSpPr>
+          <p:nvPr/>
+        </p:nvCxnSpPr>
+        <p:spPr>
+          <a:xfrm rot="16200000" flipH="1">
+            <a:off x="8128540" y="1108235"/>
+            <a:ext cx="460926" cy="237341"/>
+          </a:xfrm>
+          <a:prstGeom prst="bentConnector2">
+            <a:avLst/>
+          </a:prstGeom>
+        </p:spPr>
+        <p:style>
+          <a:lnRef idx="1">
+            <a:schemeClr val="accent1"/>
+          </a:lnRef>
+          <a:fillRef idx="0">
+            <a:schemeClr val="accent1"/>
+          </a:fillRef>
+          <a:effectRef idx="0">
+            <a:schemeClr val="accent1"/>
+          </a:effectRef>
+          <a:fontRef idx="minor">
+            <a:schemeClr val="tx1"/>
+          </a:fontRef>
+        </p:style>
+      </p:cxnSp>
+      <p:cxnSp>
+        <p:nvCxnSpPr>
+          <p:cNvPr id="181" name="Verbinder: gewinkelt 180">
+            <a:extLst>
+              <a:ext uri="{FF2B5EF4-FFF2-40B4-BE49-F238E27FC236}">
+                <a16:creationId xmlns:a16="http://schemas.microsoft.com/office/drawing/2014/main" id="{9377F159-8103-1A07-4C28-5A45CFF08A85}"/>
+              </a:ext>
+            </a:extLst>
+          </p:cNvPr>
+          <p:cNvCxnSpPr>
+            <a:cxnSpLocks/>
+            <a:stCxn id="45" idx="2"/>
+            <a:endCxn id="50" idx="1"/>
+          </p:cNvCxnSpPr>
+          <p:nvPr/>
+        </p:nvCxnSpPr>
+        <p:spPr>
+          <a:xfrm rot="16200000" flipH="1">
+            <a:off x="7942842" y="1293934"/>
+            <a:ext cx="852438" cy="257456"/>
+          </a:xfrm>
+          <a:prstGeom prst="bentConnector2">
+            <a:avLst/>
+          </a:prstGeom>
+        </p:spPr>
+        <p:style>
+          <a:lnRef idx="1">
+            <a:schemeClr val="accent1"/>
+          </a:lnRef>
+          <a:fillRef idx="0">
+            <a:schemeClr val="accent1"/>
+          </a:fillRef>
+          <a:effectRef idx="0">
+            <a:schemeClr val="accent1"/>
+          </a:effectRef>
+          <a:fontRef idx="minor">
+            <a:schemeClr val="tx1"/>
+          </a:fontRef>
+        </p:style>
+      </p:cxnSp>
+      <p:cxnSp>
+        <p:nvCxnSpPr>
+          <p:cNvPr id="187" name="Verbinder: gewinkelt 186">
+            <a:extLst>
+              <a:ext uri="{FF2B5EF4-FFF2-40B4-BE49-F238E27FC236}">
+                <a16:creationId xmlns:a16="http://schemas.microsoft.com/office/drawing/2014/main" id="{F4F5D488-0F87-E38B-D7AB-AC49F1DC7A35}"/>
+              </a:ext>
+            </a:extLst>
+          </p:cNvPr>
+          <p:cNvCxnSpPr>
+            <a:cxnSpLocks/>
+            <a:stCxn id="50" idx="2"/>
+            <a:endCxn id="53" idx="1"/>
+          </p:cNvCxnSpPr>
+          <p:nvPr/>
+        </p:nvCxnSpPr>
+        <p:spPr>
+          <a:xfrm rot="16200000" flipH="1">
+            <a:off x="8864215" y="2094642"/>
+            <a:ext cx="406524" cy="161222"/>
+          </a:xfrm>
+          <a:prstGeom prst="bentConnector2">
+            <a:avLst/>
+          </a:prstGeom>
+        </p:spPr>
+        <p:style>
+          <a:lnRef idx="1">
+            <a:schemeClr val="accent1"/>
+          </a:lnRef>
+          <a:fillRef idx="0">
+            <a:schemeClr val="accent1"/>
+          </a:fillRef>
+          <a:effectRef idx="0">
+            <a:schemeClr val="accent1"/>
+          </a:effectRef>
+          <a:fontRef idx="minor">
+            <a:schemeClr val="tx1"/>
+          </a:fontRef>
+        </p:style>
+      </p:cxnSp>
+      <p:cxnSp>
+        <p:nvCxnSpPr>
+          <p:cNvPr id="191" name="Verbinder: gewinkelt 190">
+            <a:extLst>
+              <a:ext uri="{FF2B5EF4-FFF2-40B4-BE49-F238E27FC236}">
+                <a16:creationId xmlns:a16="http://schemas.microsoft.com/office/drawing/2014/main" id="{0087142B-5854-5E5F-0A05-9F4D6001DF3D}"/>
+              </a:ext>
+            </a:extLst>
+          </p:cNvPr>
+          <p:cNvCxnSpPr>
+            <a:cxnSpLocks/>
+            <a:stCxn id="45" idx="2"/>
+            <a:endCxn id="72" idx="1"/>
+          </p:cNvCxnSpPr>
+          <p:nvPr/>
+        </p:nvCxnSpPr>
+        <p:spPr>
+          <a:xfrm rot="16200000" flipH="1">
+            <a:off x="7127299" y="2109476"/>
+            <a:ext cx="2511697" cy="285629"/>
+          </a:xfrm>
+          <a:prstGeom prst="bentConnector2">
+            <a:avLst/>
+          </a:prstGeom>
+        </p:spPr>
+        <p:style>
+          <a:lnRef idx="1">
+            <a:schemeClr val="accent1"/>
+          </a:lnRef>
+          <a:fillRef idx="0">
+            <a:schemeClr val="accent1"/>
+          </a:fillRef>
+          <a:effectRef idx="0">
+            <a:schemeClr val="accent1"/>
+          </a:effectRef>
+          <a:fontRef idx="minor">
+            <a:schemeClr val="tx1"/>
+          </a:fontRef>
+        </p:style>
+      </p:cxnSp>
+      <p:cxnSp>
+        <p:nvCxnSpPr>
+          <p:cNvPr id="194" name="Verbinder: gewinkelt 193">
+            <a:extLst>
+              <a:ext uri="{FF2B5EF4-FFF2-40B4-BE49-F238E27FC236}">
+                <a16:creationId xmlns:a16="http://schemas.microsoft.com/office/drawing/2014/main" id="{DA1CE745-31E1-566F-AB38-7E0EB08C2E63}"/>
+              </a:ext>
+            </a:extLst>
+          </p:cNvPr>
+          <p:cNvCxnSpPr>
+            <a:cxnSpLocks/>
+            <a:stCxn id="45" idx="2"/>
+            <a:endCxn id="96" idx="1"/>
+          </p:cNvCxnSpPr>
+          <p:nvPr/>
+        </p:nvCxnSpPr>
+        <p:spPr>
+          <a:xfrm rot="16200000" flipH="1">
+            <a:off x="6173950" y="3062825"/>
+            <a:ext cx="4490068" cy="357303"/>
+          </a:xfrm>
+          <a:prstGeom prst="bentConnector2">
+            <a:avLst/>
+          </a:prstGeom>
+        </p:spPr>
+        <p:style>
+          <a:lnRef idx="1">
+            <a:schemeClr val="accent1"/>
+          </a:lnRef>
+          <a:fillRef idx="0">
+            <a:schemeClr val="accent1"/>
+          </a:fillRef>
+          <a:effectRef idx="0">
+            <a:schemeClr val="accent1"/>
+          </a:effectRef>
+          <a:fontRef idx="minor">
+            <a:schemeClr val="tx1"/>
+          </a:fontRef>
+        </p:style>
+      </p:cxnSp>
+      <p:cxnSp>
+        <p:nvCxnSpPr>
+          <p:cNvPr id="201" name="Verbinder: gewinkelt 200">
+            <a:extLst>
+              <a:ext uri="{FF2B5EF4-FFF2-40B4-BE49-F238E27FC236}">
+                <a16:creationId xmlns:a16="http://schemas.microsoft.com/office/drawing/2014/main" id="{A1EFD954-8522-E337-17F1-2925F57DE8EC}"/>
+              </a:ext>
+            </a:extLst>
+          </p:cNvPr>
+          <p:cNvCxnSpPr>
+            <a:cxnSpLocks/>
+            <a:stCxn id="21" idx="2"/>
+            <a:endCxn id="25" idx="3"/>
+          </p:cNvCxnSpPr>
+          <p:nvPr/>
+        </p:nvCxnSpPr>
+        <p:spPr>
+          <a:xfrm rot="5400000">
+            <a:off x="1530385" y="3040342"/>
+            <a:ext cx="230709" cy="417892"/>
+          </a:xfrm>
+          <a:prstGeom prst="bentConnector2">
+            <a:avLst/>
+          </a:prstGeom>
+        </p:spPr>
+        <p:style>
+          <a:lnRef idx="1">
+            <a:schemeClr val="accent1"/>
+          </a:lnRef>
+          <a:fillRef idx="0">
+            <a:schemeClr val="accent1"/>
+          </a:fillRef>
+          <a:effectRef idx="0">
+            <a:schemeClr val="accent1"/>
+          </a:effectRef>
+          <a:fontRef idx="minor">
+            <a:schemeClr val="tx1"/>
+          </a:fontRef>
+        </p:style>
+      </p:cxnSp>
+      <p:cxnSp>
+        <p:nvCxnSpPr>
+          <p:cNvPr id="204" name="Verbinder: gewinkelt 203">
+            <a:extLst>
+              <a:ext uri="{FF2B5EF4-FFF2-40B4-BE49-F238E27FC236}">
+                <a16:creationId xmlns:a16="http://schemas.microsoft.com/office/drawing/2014/main" id="{2F1797A0-E242-70B6-3DAC-FAB812D2584C}"/>
+              </a:ext>
+            </a:extLst>
+          </p:cNvPr>
+          <p:cNvCxnSpPr>
+            <a:cxnSpLocks/>
+            <a:stCxn id="21" idx="2"/>
+            <a:endCxn id="26" idx="3"/>
+          </p:cNvCxnSpPr>
+          <p:nvPr/>
+        </p:nvCxnSpPr>
+        <p:spPr>
+          <a:xfrm rot="5400000">
+            <a:off x="1380837" y="3189890"/>
+            <a:ext cx="529805" cy="417892"/>
+          </a:xfrm>
+          <a:prstGeom prst="bentConnector2">
+            <a:avLst/>
+          </a:prstGeom>
+        </p:spPr>
+        <p:style>
+          <a:lnRef idx="1">
+            <a:schemeClr val="accent1"/>
+          </a:lnRef>
+          <a:fillRef idx="0">
+            <a:schemeClr val="accent1"/>
+          </a:fillRef>
+          <a:effectRef idx="0">
+            <a:schemeClr val="accent1"/>
+          </a:effectRef>
+          <a:fontRef idx="minor">
+            <a:schemeClr val="tx1"/>
+          </a:fontRef>
+        </p:style>
+      </p:cxnSp>
+      <p:cxnSp>
+        <p:nvCxnSpPr>
+          <p:cNvPr id="207" name="Verbinder: gewinkelt 206">
+            <a:extLst>
+              <a:ext uri="{FF2B5EF4-FFF2-40B4-BE49-F238E27FC236}">
+                <a16:creationId xmlns:a16="http://schemas.microsoft.com/office/drawing/2014/main" id="{A1E49708-34FB-BE8F-39A3-619A836CBD1B}"/>
+              </a:ext>
+            </a:extLst>
+          </p:cNvPr>
+          <p:cNvCxnSpPr>
+            <a:cxnSpLocks/>
+            <a:stCxn id="21" idx="2"/>
+            <a:endCxn id="27" idx="3"/>
+          </p:cNvCxnSpPr>
+          <p:nvPr/>
+        </p:nvCxnSpPr>
+        <p:spPr>
+          <a:xfrm rot="5400000">
+            <a:off x="1227578" y="3343149"/>
+            <a:ext cx="836323" cy="417892"/>
+          </a:xfrm>
+          <a:prstGeom prst="bentConnector2">
+            <a:avLst/>
+          </a:prstGeom>
+        </p:spPr>
+        <p:style>
+          <a:lnRef idx="1">
+            <a:schemeClr val="accent1"/>
+          </a:lnRef>
+          <a:fillRef idx="0">
+            <a:schemeClr val="accent1"/>
+          </a:fillRef>
+          <a:effectRef idx="0">
+            <a:schemeClr val="accent1"/>
+          </a:effectRef>
+          <a:fontRef idx="minor">
+            <a:schemeClr val="tx1"/>
+          </a:fontRef>
+        </p:style>
+      </p:cxnSp>
+      <p:cxnSp>
+        <p:nvCxnSpPr>
+          <p:cNvPr id="210" name="Verbinder: gewinkelt 209">
+            <a:extLst>
+              <a:ext uri="{FF2B5EF4-FFF2-40B4-BE49-F238E27FC236}">
+                <a16:creationId xmlns:a16="http://schemas.microsoft.com/office/drawing/2014/main" id="{6A2885DA-FC08-605D-7A61-10B696606FE7}"/>
+              </a:ext>
+            </a:extLst>
+          </p:cNvPr>
+          <p:cNvCxnSpPr>
+            <a:cxnSpLocks/>
+            <a:stCxn id="21" idx="2"/>
+            <a:endCxn id="28" idx="3"/>
+          </p:cNvCxnSpPr>
+          <p:nvPr/>
+        </p:nvCxnSpPr>
+        <p:spPr>
+          <a:xfrm rot="5400000">
+            <a:off x="1082951" y="3499086"/>
+            <a:ext cx="1136887" cy="406583"/>
+          </a:xfrm>
+          <a:prstGeom prst="bentConnector2">
+            <a:avLst/>
+          </a:prstGeom>
+        </p:spPr>
+        <p:style>
+          <a:lnRef idx="1">
+            <a:schemeClr val="accent1"/>
+          </a:lnRef>
+          <a:fillRef idx="0">
+            <a:schemeClr val="accent1"/>
+          </a:fillRef>
+          <a:effectRef idx="0">
+            <a:schemeClr val="accent1"/>
+          </a:effectRef>
+          <a:fontRef idx="minor">
+            <a:schemeClr val="tx1"/>
+          </a:fontRef>
+        </p:style>
+      </p:cxnSp>
+      <p:cxnSp>
+        <p:nvCxnSpPr>
+          <p:cNvPr id="213" name="Verbinder: gewinkelt 212">
+            <a:extLst>
+              <a:ext uri="{FF2B5EF4-FFF2-40B4-BE49-F238E27FC236}">
+                <a16:creationId xmlns:a16="http://schemas.microsoft.com/office/drawing/2014/main" id="{288D6872-F099-39D4-0C91-D8AD3103254B}"/>
+              </a:ext>
+            </a:extLst>
+          </p:cNvPr>
+          <p:cNvCxnSpPr>
+            <a:cxnSpLocks/>
+            <a:stCxn id="11" idx="2"/>
+            <a:endCxn id="13" idx="3"/>
+          </p:cNvCxnSpPr>
+          <p:nvPr/>
+        </p:nvCxnSpPr>
+        <p:spPr>
+          <a:xfrm rot="5400000">
+            <a:off x="2499192" y="1004262"/>
+            <a:ext cx="354951" cy="317776"/>
+          </a:xfrm>
+          <a:prstGeom prst="bentConnector2">
+            <a:avLst/>
+          </a:prstGeom>
+        </p:spPr>
+        <p:style>
+          <a:lnRef idx="1">
+            <a:schemeClr val="accent1"/>
+          </a:lnRef>
+          <a:fillRef idx="0">
+            <a:schemeClr val="accent1"/>
+          </a:fillRef>
+          <a:effectRef idx="0">
+            <a:schemeClr val="accent1"/>
+          </a:effectRef>
+          <a:fontRef idx="minor">
+            <a:schemeClr val="tx1"/>
+          </a:fontRef>
+        </p:style>
+      </p:cxnSp>
+      <p:cxnSp>
+        <p:nvCxnSpPr>
+          <p:cNvPr id="218" name="Verbinder: gewinkelt 217">
+            <a:extLst>
+              <a:ext uri="{FF2B5EF4-FFF2-40B4-BE49-F238E27FC236}">
+                <a16:creationId xmlns:a16="http://schemas.microsoft.com/office/drawing/2014/main" id="{1732DC37-0E61-54C5-46BE-2ABB34BA7310}"/>
+              </a:ext>
+            </a:extLst>
+          </p:cNvPr>
+          <p:cNvCxnSpPr>
+            <a:cxnSpLocks/>
+            <a:stCxn id="11" idx="2"/>
+            <a:endCxn id="21" idx="3"/>
+          </p:cNvCxnSpPr>
+          <p:nvPr/>
+        </p:nvCxnSpPr>
+        <p:spPr>
+          <a:xfrm rot="5400000">
+            <a:off x="1653227" y="1828495"/>
+            <a:ext cx="2025149" cy="339509"/>
+          </a:xfrm>
+          <a:prstGeom prst="bentConnector2">
+            <a:avLst/>
+          </a:prstGeom>
+        </p:spPr>
+        <p:style>
+          <a:lnRef idx="1">
+            <a:schemeClr val="accent1"/>
+          </a:lnRef>
+          <a:fillRef idx="0">
+            <a:schemeClr val="accent1"/>
+          </a:fillRef>
+          <a:effectRef idx="0">
+            <a:schemeClr val="accent1"/>
+          </a:effectRef>
+          <a:fontRef idx="minor">
+            <a:schemeClr val="tx1"/>
+          </a:fontRef>
+        </p:style>
+      </p:cxnSp>
+      <p:cxnSp>
+        <p:nvCxnSpPr>
+          <p:cNvPr id="221" name="Verbinder: gewinkelt 220">
+            <a:extLst>
+              <a:ext uri="{FF2B5EF4-FFF2-40B4-BE49-F238E27FC236}">
+                <a16:creationId xmlns:a16="http://schemas.microsoft.com/office/drawing/2014/main" id="{F9A98590-6521-F985-7FFE-B60DC2B854BB}"/>
+              </a:ext>
+            </a:extLst>
+          </p:cNvPr>
+          <p:cNvCxnSpPr>
+            <a:cxnSpLocks/>
+            <a:stCxn id="11" idx="2"/>
+            <a:endCxn id="108" idx="3"/>
+          </p:cNvCxnSpPr>
+          <p:nvPr/>
+        </p:nvCxnSpPr>
+        <p:spPr>
+          <a:xfrm rot="5400000">
+            <a:off x="646824" y="2831758"/>
+            <a:ext cx="4034815" cy="342649"/>
+          </a:xfrm>
+          <a:prstGeom prst="bentConnector2">
+            <a:avLst/>
+          </a:prstGeom>
+        </p:spPr>
+        <p:style>
+          <a:lnRef idx="1">
+            <a:schemeClr val="accent1"/>
+          </a:lnRef>
+          <a:fillRef idx="0">
+            <a:schemeClr val="accent1"/>
+          </a:fillRef>
+          <a:effectRef idx="0">
+            <a:schemeClr val="accent1"/>
+          </a:effectRef>
+          <a:fontRef idx="minor">
+            <a:schemeClr val="tx1"/>
+          </a:fontRef>
+        </p:style>
+      </p:cxnSp>
+      <p:cxnSp>
+        <p:nvCxnSpPr>
+          <p:cNvPr id="224" name="Verbinder: gewinkelt 223">
+            <a:extLst>
+              <a:ext uri="{FF2B5EF4-FFF2-40B4-BE49-F238E27FC236}">
+                <a16:creationId xmlns:a16="http://schemas.microsoft.com/office/drawing/2014/main" id="{DA284331-3D31-F9F4-1FEE-D2926824F254}"/>
+              </a:ext>
+            </a:extLst>
+          </p:cNvPr>
+          <p:cNvCxnSpPr>
+            <a:cxnSpLocks/>
+            <a:stCxn id="11" idx="2"/>
+            <a:endCxn id="106" idx="3"/>
+          </p:cNvCxnSpPr>
+          <p:nvPr/>
+        </p:nvCxnSpPr>
+        <p:spPr>
+          <a:xfrm rot="5400000">
+            <a:off x="472327" y="3006255"/>
+            <a:ext cx="4383809" cy="342649"/>
+          </a:xfrm>
+          <a:prstGeom prst="bentConnector2">
+            <a:avLst/>
+          </a:prstGeom>
+        </p:spPr>
+        <p:style>
+          <a:lnRef idx="1">
+            <a:schemeClr val="accent1"/>
+          </a:lnRef>
+          <a:fillRef idx="0">
+            <a:schemeClr val="accent1"/>
+          </a:fillRef>
+          <a:effectRef idx="0">
+            <a:schemeClr val="accent1"/>
+          </a:effectRef>
+          <a:fontRef idx="minor">
+            <a:schemeClr val="tx1"/>
+          </a:fontRef>
+        </p:style>
+      </p:cxnSp>
+      <p:cxnSp>
+        <p:nvCxnSpPr>
+          <p:cNvPr id="232" name="Verbinder: gewinkelt 231">
+            <a:extLst>
+              <a:ext uri="{FF2B5EF4-FFF2-40B4-BE49-F238E27FC236}">
+                <a16:creationId xmlns:a16="http://schemas.microsoft.com/office/drawing/2014/main" id="{32B06DF2-7985-B8A8-777F-86236458FBD0}"/>
+              </a:ext>
+            </a:extLst>
+          </p:cNvPr>
+          <p:cNvCxnSpPr>
+            <a:cxnSpLocks/>
+            <a:stCxn id="11" idx="2"/>
+            <a:endCxn id="98" idx="3"/>
+          </p:cNvCxnSpPr>
+          <p:nvPr/>
+        </p:nvCxnSpPr>
+        <p:spPr>
+          <a:xfrm rot="5400000">
+            <a:off x="825303" y="2656419"/>
+            <a:ext cx="3680996" cy="339509"/>
+          </a:xfrm>
+          <a:prstGeom prst="bentConnector2">
+            <a:avLst/>
+          </a:prstGeom>
+        </p:spPr>
+        <p:style>
+          <a:lnRef idx="1">
+            <a:schemeClr val="accent1"/>
+          </a:lnRef>
+          <a:fillRef idx="0">
+            <a:schemeClr val="accent1"/>
+          </a:fillRef>
+          <a:effectRef idx="0">
+            <a:schemeClr val="accent1"/>
+          </a:effectRef>
+          <a:fontRef idx="minor">
+            <a:schemeClr val="tx1"/>
+          </a:fontRef>
+        </p:style>
+      </p:cxnSp>
+      <p:sp>
+        <p:nvSpPr>
+          <p:cNvPr id="235" name="Textfeld 234">
+            <a:extLst>
+              <a:ext uri="{FF2B5EF4-FFF2-40B4-BE49-F238E27FC236}">
+                <a16:creationId xmlns:a16="http://schemas.microsoft.com/office/drawing/2014/main" id="{E939E38D-200C-287E-F6A1-0BC540494BCF}"/>
+              </a:ext>
+            </a:extLst>
+          </p:cNvPr>
+          <p:cNvSpPr txBox="1"/>
+          <p:nvPr/>
+        </p:nvSpPr>
+        <p:spPr>
+          <a:xfrm>
+            <a:off x="1567653" y="5609368"/>
+            <a:ext cx="925253" cy="246221"/>
+          </a:xfrm>
+          <a:prstGeom prst="rect">
+            <a:avLst/>
+          </a:prstGeom>
+          <a:solidFill>
+            <a:srgbClr val="FFFF00"/>
+          </a:solidFill>
+          <a:ln>
+            <a:solidFill>
+              <a:srgbClr val="FF0000"/>
+            </a:solidFill>
+          </a:ln>
+        </p:spPr>
+        <p:txBody>
+          <a:bodyPr wrap="none" rtlCol="0">
+            <a:spAutoFit/>
+          </a:bodyPr>
+          <a:lstStyle>
+            <a:defPPr>
+              <a:defRPr lang="de-DE"/>
+            </a:defPPr>
+            <a:lvl1pPr>
+              <a:defRPr sz="1000"/>
+            </a:lvl1pPr>
+          </a:lstStyle>
+          <a:p>
+            <a:r>
+              <a:rPr lang="de-DE" dirty="0" err="1"/>
+              <a:t>FtSwarmGyro</a:t>
+            </a:r>
+            <a:r>
+              <a:rPr lang="de-DE" dirty="0"/>
+              <a:t> </a:t>
+            </a:r>
+          </a:p>
+        </p:txBody>
+      </p:sp>
+      <p:cxnSp>
+        <p:nvCxnSpPr>
+          <p:cNvPr id="268" name="Verbinder: gewinkelt 267">
+            <a:extLst>
+              <a:ext uri="{FF2B5EF4-FFF2-40B4-BE49-F238E27FC236}">
+                <a16:creationId xmlns:a16="http://schemas.microsoft.com/office/drawing/2014/main" id="{BCA92E1F-1B07-DBF0-9D7F-296DD95C76A9}"/>
+              </a:ext>
+            </a:extLst>
+          </p:cNvPr>
+          <p:cNvCxnSpPr>
+            <a:cxnSpLocks/>
+            <a:stCxn id="11" idx="2"/>
+            <a:endCxn id="235" idx="3"/>
+          </p:cNvCxnSpPr>
+          <p:nvPr/>
+        </p:nvCxnSpPr>
+        <p:spPr>
+          <a:xfrm rot="5400000">
+            <a:off x="290829" y="3187753"/>
+            <a:ext cx="4746804" cy="342649"/>
+          </a:xfrm>
+          <a:prstGeom prst="bentConnector2">
+            <a:avLst/>
+          </a:prstGeom>
+        </p:spPr>
+        <p:style>
+          <a:lnRef idx="1">
+            <a:schemeClr val="accent1"/>
+          </a:lnRef>
+          <a:fillRef idx="0">
+            <a:schemeClr val="accent1"/>
+          </a:fillRef>
+          <a:effectRef idx="0">
+            <a:schemeClr val="accent1"/>
+          </a:effectRef>
+          <a:fontRef idx="minor">
+            <a:schemeClr val="tx1"/>
+          </a:fontRef>
+        </p:style>
+      </p:cxnSp>
+      <p:cxnSp>
+        <p:nvCxnSpPr>
+          <p:cNvPr id="271" name="Verbinder: gewinkelt 270">
+            <a:extLst>
+              <a:ext uri="{FF2B5EF4-FFF2-40B4-BE49-F238E27FC236}">
+                <a16:creationId xmlns:a16="http://schemas.microsoft.com/office/drawing/2014/main" id="{B35297B3-0FEE-A895-1A28-DDCE22A861BD}"/>
+              </a:ext>
+            </a:extLst>
+          </p:cNvPr>
+          <p:cNvCxnSpPr>
+            <a:cxnSpLocks/>
+            <a:stCxn id="10" idx="2"/>
+            <a:endCxn id="45" idx="0"/>
+          </p:cNvCxnSpPr>
+          <p:nvPr/>
+        </p:nvCxnSpPr>
+        <p:spPr>
+          <a:xfrm rot="16200000" flipH="1">
+            <a:off x="6960675" y="-529437"/>
+            <a:ext cx="271541" cy="2287776"/>
+          </a:xfrm>
+          <a:prstGeom prst="bentConnector3">
+            <a:avLst>
+              <a:gd name="adj1" fmla="val 50000"/>
+            </a:avLst>
+          </a:prstGeom>
+        </p:spPr>
+        <p:style>
+          <a:lnRef idx="1">
+            <a:schemeClr val="accent1"/>
+          </a:lnRef>
+          <a:fillRef idx="0">
+            <a:schemeClr val="accent1"/>
+          </a:fillRef>
+          <a:effectRef idx="0">
+            <a:schemeClr val="accent1"/>
+          </a:effectRef>
+          <a:fontRef idx="minor">
+            <a:schemeClr val="tx1"/>
+          </a:fontRef>
+        </p:style>
+      </p:cxnSp>
+      <p:cxnSp>
+        <p:nvCxnSpPr>
+          <p:cNvPr id="279" name="Verbinder: gewinkelt 278">
+            <a:extLst>
+              <a:ext uri="{FF2B5EF4-FFF2-40B4-BE49-F238E27FC236}">
+                <a16:creationId xmlns:a16="http://schemas.microsoft.com/office/drawing/2014/main" id="{E4579ABA-2A7B-BC2E-392A-5CBD99AD6BD0}"/>
+              </a:ext>
+            </a:extLst>
+          </p:cNvPr>
+          <p:cNvCxnSpPr>
+            <a:cxnSpLocks/>
+            <a:stCxn id="10" idx="2"/>
+            <a:endCxn id="93" idx="0"/>
+          </p:cNvCxnSpPr>
+          <p:nvPr/>
+        </p:nvCxnSpPr>
+        <p:spPr>
+          <a:xfrm rot="5400000">
+            <a:off x="4386695" y="-387991"/>
+            <a:ext cx="699190" cy="2432535"/>
+          </a:xfrm>
+          <a:prstGeom prst="bentConnector3">
+            <a:avLst>
+              <a:gd name="adj1" fmla="val 50000"/>
+            </a:avLst>
+          </a:prstGeom>
+        </p:spPr>
+        <p:style>
+          <a:lnRef idx="1">
+            <a:schemeClr val="accent1"/>
+          </a:lnRef>
+          <a:fillRef idx="0">
+            <a:schemeClr val="accent1"/>
+          </a:fillRef>
+          <a:effectRef idx="0">
+            <a:schemeClr val="accent1"/>
+          </a:effectRef>
+          <a:fontRef idx="minor">
+            <a:schemeClr val="tx1"/>
+          </a:fontRef>
+        </p:style>
+      </p:cxnSp>
+      <p:cxnSp>
+        <p:nvCxnSpPr>
+          <p:cNvPr id="282" name="Verbinder: gewinkelt 281">
+            <a:extLst>
+              <a:ext uri="{FF2B5EF4-FFF2-40B4-BE49-F238E27FC236}">
+                <a16:creationId xmlns:a16="http://schemas.microsoft.com/office/drawing/2014/main" id="{843AA058-BDEB-BD18-46CF-A20B3FD59771}"/>
+              </a:ext>
+            </a:extLst>
+          </p:cNvPr>
+          <p:cNvCxnSpPr>
+            <a:cxnSpLocks/>
+            <a:stCxn id="10" idx="2"/>
+            <a:endCxn id="99" idx="0"/>
+          </p:cNvCxnSpPr>
+          <p:nvPr/>
+        </p:nvCxnSpPr>
+        <p:spPr>
+          <a:xfrm rot="5400000">
+            <a:off x="4871689" y="97003"/>
+            <a:ext cx="699190" cy="1462547"/>
+          </a:xfrm>
+          <a:prstGeom prst="bentConnector3">
+            <a:avLst>
+              <a:gd name="adj1" fmla="val 50000"/>
+            </a:avLst>
+          </a:prstGeom>
+        </p:spPr>
+        <p:style>
+          <a:lnRef idx="1">
+            <a:schemeClr val="accent1"/>
+          </a:lnRef>
+          <a:fillRef idx="0">
+            <a:schemeClr val="accent1"/>
+          </a:fillRef>
+          <a:effectRef idx="0">
+            <a:schemeClr val="accent1"/>
+          </a:effectRef>
+          <a:fontRef idx="minor">
+            <a:schemeClr val="tx1"/>
+          </a:fontRef>
+        </p:style>
+      </p:cxnSp>
+      <p:cxnSp>
+        <p:nvCxnSpPr>
+          <p:cNvPr id="285" name="Verbinder: gewinkelt 284">
+            <a:extLst>
+              <a:ext uri="{FF2B5EF4-FFF2-40B4-BE49-F238E27FC236}">
+                <a16:creationId xmlns:a16="http://schemas.microsoft.com/office/drawing/2014/main" id="{CEBAE936-3E56-E7F2-0B2F-FFCA35BDEC49}"/>
+              </a:ext>
+            </a:extLst>
+          </p:cNvPr>
+          <p:cNvCxnSpPr>
+            <a:cxnSpLocks/>
+            <a:stCxn id="10" idx="2"/>
+            <a:endCxn id="100" idx="0"/>
+          </p:cNvCxnSpPr>
+          <p:nvPr/>
+        </p:nvCxnSpPr>
+        <p:spPr>
+          <a:xfrm rot="5400000">
+            <a:off x="5360028" y="585342"/>
+            <a:ext cx="699190" cy="485869"/>
+          </a:xfrm>
+          <a:prstGeom prst="bentConnector3">
+            <a:avLst>
+              <a:gd name="adj1" fmla="val 50000"/>
+            </a:avLst>
+          </a:prstGeom>
+        </p:spPr>
+        <p:style>
+          <a:lnRef idx="1">
+            <a:schemeClr val="accent1"/>
+          </a:lnRef>
+          <a:fillRef idx="0">
+            <a:schemeClr val="accent1"/>
+          </a:fillRef>
+          <a:effectRef idx="0">
+            <a:schemeClr val="accent1"/>
+          </a:effectRef>
+          <a:fontRef idx="minor">
+            <a:schemeClr val="tx1"/>
+          </a:fontRef>
+        </p:style>
+      </p:cxnSp>
+      <p:sp>
+        <p:nvSpPr>
+          <p:cNvPr id="289" name="Textfeld 288">
+            <a:extLst>
+              <a:ext uri="{FF2B5EF4-FFF2-40B4-BE49-F238E27FC236}">
+                <a16:creationId xmlns:a16="http://schemas.microsoft.com/office/drawing/2014/main" id="{6EEF78D2-EDBA-C213-BDE7-5684420F9EB4}"/>
+              </a:ext>
+            </a:extLst>
+          </p:cNvPr>
+          <p:cNvSpPr txBox="1"/>
+          <p:nvPr/>
+        </p:nvSpPr>
+        <p:spPr>
+          <a:xfrm>
+            <a:off x="1509945" y="5978701"/>
+            <a:ext cx="982961" cy="246221"/>
+          </a:xfrm>
+          <a:prstGeom prst="rect">
+            <a:avLst/>
+          </a:prstGeom>
+          <a:solidFill>
+            <a:srgbClr val="FFFF00"/>
+          </a:solidFill>
+          <a:ln>
+            <a:solidFill>
+              <a:srgbClr val="FF0000"/>
+            </a:solidFill>
+          </a:ln>
+        </p:spPr>
+        <p:txBody>
+          <a:bodyPr wrap="none" rtlCol="0">
+            <a:spAutoFit/>
+          </a:bodyPr>
+          <a:lstStyle>
+            <a:defPPr>
+              <a:defRPr lang="de-DE"/>
+            </a:defPPr>
+            <a:lvl1pPr>
+              <a:defRPr sz="1000"/>
+            </a:lvl1pPr>
+          </a:lstStyle>
+          <a:p>
+            <a:r>
+              <a:rPr lang="de-DE" dirty="0" err="1"/>
+              <a:t>FtSwarmLIDAR</a:t>
+            </a:r>
+            <a:r>
+              <a:rPr lang="de-DE" dirty="0"/>
+              <a:t> </a:t>
+            </a:r>
+          </a:p>
+        </p:txBody>
+      </p:sp>
+      <p:cxnSp>
+        <p:nvCxnSpPr>
+          <p:cNvPr id="290" name="Verbinder: gewinkelt 289">
+            <a:extLst>
+              <a:ext uri="{FF2B5EF4-FFF2-40B4-BE49-F238E27FC236}">
+                <a16:creationId xmlns:a16="http://schemas.microsoft.com/office/drawing/2014/main" id="{368F74BE-C3E7-8BF5-EA37-3196369844DA}"/>
+              </a:ext>
+            </a:extLst>
+          </p:cNvPr>
+          <p:cNvCxnSpPr>
+            <a:cxnSpLocks/>
+            <a:stCxn id="11" idx="2"/>
+            <a:endCxn id="289" idx="3"/>
+          </p:cNvCxnSpPr>
+          <p:nvPr/>
+        </p:nvCxnSpPr>
+        <p:spPr>
+          <a:xfrm rot="5400000">
+            <a:off x="106163" y="3372419"/>
+            <a:ext cx="5116137" cy="342649"/>
+          </a:xfrm>
+          <a:prstGeom prst="bentConnector2">
+            <a:avLst/>
+          </a:prstGeom>
+        </p:spPr>
+        <p:style>
+          <a:lnRef idx="1">
+            <a:schemeClr val="accent1"/>
+          </a:lnRef>
+          <a:fillRef idx="0">
+            <a:schemeClr val="accent1"/>
+          </a:fillRef>
+          <a:effectRef idx="0">
+            <a:schemeClr val="accent1"/>
+          </a:effectRef>
+          <a:fontRef idx="minor">
+            <a:schemeClr val="tx1"/>
+          </a:fontRef>
+        </p:style>
+      </p:cxnSp>
+      <p:sp>
+        <p:nvSpPr>
+          <p:cNvPr id="300" name="Textfeld 299">
+            <a:extLst>
+              <a:ext uri="{FF2B5EF4-FFF2-40B4-BE49-F238E27FC236}">
+                <a16:creationId xmlns:a16="http://schemas.microsoft.com/office/drawing/2014/main" id="{923FF55A-4391-C4FB-DF99-915583CCC421}"/>
+              </a:ext>
+            </a:extLst>
+          </p:cNvPr>
+          <p:cNvSpPr txBox="1"/>
+          <p:nvPr/>
+        </p:nvSpPr>
+        <p:spPr>
+          <a:xfrm>
+            <a:off x="6030432" y="1178124"/>
+            <a:ext cx="898003" cy="246221"/>
+          </a:xfrm>
+          <a:prstGeom prst="rect">
+            <a:avLst/>
+          </a:prstGeom>
+          <a:noFill/>
+          <a:ln>
+            <a:solidFill>
+              <a:srgbClr val="FF0000"/>
+            </a:solidFill>
+          </a:ln>
+        </p:spPr>
+        <p:txBody>
+          <a:bodyPr wrap="none" rtlCol="0">
+            <a:spAutoFit/>
+          </a:bodyPr>
+          <a:lstStyle/>
+          <a:p>
+            <a:r>
+              <a:rPr lang="de-DE" sz="1000" dirty="0" err="1"/>
+              <a:t>FtSwarmCAM</a:t>
+            </a:r>
+            <a:endParaRPr lang="de-DE" sz="1000" dirty="0"/>
+          </a:p>
+        </p:txBody>
+      </p:sp>
+      <p:cxnSp>
+        <p:nvCxnSpPr>
+          <p:cNvPr id="302" name="Verbinder: gewinkelt 301">
+            <a:extLst>
+              <a:ext uri="{FF2B5EF4-FFF2-40B4-BE49-F238E27FC236}">
+                <a16:creationId xmlns:a16="http://schemas.microsoft.com/office/drawing/2014/main" id="{4DF79909-BE91-0F71-DB54-DA784F609B4F}"/>
+              </a:ext>
+            </a:extLst>
+          </p:cNvPr>
+          <p:cNvCxnSpPr>
+            <a:cxnSpLocks/>
+            <a:stCxn id="10" idx="2"/>
+            <a:endCxn id="300" idx="0"/>
+          </p:cNvCxnSpPr>
+          <p:nvPr/>
+        </p:nvCxnSpPr>
+        <p:spPr>
+          <a:xfrm rot="16200000" flipH="1">
+            <a:off x="5866274" y="564963"/>
+            <a:ext cx="699443" cy="526877"/>
+          </a:xfrm>
+          <a:prstGeom prst="bentConnector3">
+            <a:avLst>
+              <a:gd name="adj1" fmla="val 50000"/>
+            </a:avLst>
+          </a:prstGeom>
+        </p:spPr>
+        <p:style>
+          <a:lnRef idx="1">
+            <a:schemeClr val="accent1"/>
+          </a:lnRef>
+          <a:fillRef idx="0">
+            <a:schemeClr val="accent1"/>
+          </a:fillRef>
+          <a:effectRef idx="0">
+            <a:schemeClr val="accent1"/>
+          </a:effectRef>
+          <a:fontRef idx="minor">
+            <a:schemeClr val="tx1"/>
+          </a:fontRef>
+        </p:style>
+      </p:cxnSp>
+      <p:sp>
+        <p:nvSpPr>
+          <p:cNvPr id="306" name="Rechteck 305">
+            <a:extLst>
+              <a:ext uri="{FF2B5EF4-FFF2-40B4-BE49-F238E27FC236}">
+                <a16:creationId xmlns:a16="http://schemas.microsoft.com/office/drawing/2014/main" id="{E625802C-283D-7E6D-1F53-D83B934300CB}"/>
+              </a:ext>
+            </a:extLst>
+          </p:cNvPr>
+          <p:cNvSpPr/>
+          <p:nvPr/>
+        </p:nvSpPr>
+        <p:spPr>
+          <a:xfrm>
+            <a:off x="16365" y="1131231"/>
+            <a:ext cx="2593670" cy="1343589"/>
+          </a:xfrm>
+          <a:prstGeom prst="rect">
+            <a:avLst/>
+          </a:prstGeom>
+          <a:noFill/>
+          <a:ln>
+            <a:prstDash val="dash"/>
+          </a:ln>
+        </p:spPr>
+        <p:style>
+          <a:lnRef idx="2">
+            <a:schemeClr val="accent1">
+              <a:shade val="15000"/>
+            </a:schemeClr>
+          </a:lnRef>
+          <a:fillRef idx="1">
+            <a:schemeClr val="accent1"/>
+          </a:fillRef>
+          <a:effectRef idx="0">
+            <a:schemeClr val="accent1"/>
+          </a:effectRef>
+          <a:fontRef idx="minor">
+            <a:schemeClr val="lt1"/>
+          </a:fontRef>
+        </p:style>
+        <p:txBody>
+          <a:bodyPr rtlCol="0" anchor="ctr"/>
+          <a:lstStyle/>
+          <a:p>
+            <a:pPr algn="ctr"/>
+            <a:endParaRPr lang="de-DE"/>
+          </a:p>
+        </p:txBody>
+      </p:sp>
+      <p:sp>
+        <p:nvSpPr>
+          <p:cNvPr id="308" name="Rechteck 307">
+            <a:extLst>
+              <a:ext uri="{FF2B5EF4-FFF2-40B4-BE49-F238E27FC236}">
+                <a16:creationId xmlns:a16="http://schemas.microsoft.com/office/drawing/2014/main" id="{A7C4D38F-6359-1BDE-E20D-83546F00044A}"/>
+              </a:ext>
+            </a:extLst>
+          </p:cNvPr>
+          <p:cNvSpPr/>
+          <p:nvPr/>
+        </p:nvSpPr>
+        <p:spPr>
+          <a:xfrm>
+            <a:off x="0" y="2864291"/>
+            <a:ext cx="2593670" cy="1610494"/>
+          </a:xfrm>
+          <a:prstGeom prst="rect">
+            <a:avLst/>
+          </a:prstGeom>
+          <a:noFill/>
+          <a:ln>
+            <a:prstDash val="dash"/>
+          </a:ln>
+        </p:spPr>
+        <p:style>
+          <a:lnRef idx="2">
+            <a:schemeClr val="accent1">
+              <a:shade val="15000"/>
+            </a:schemeClr>
+          </a:lnRef>
+          <a:fillRef idx="1">
+            <a:schemeClr val="accent1"/>
+          </a:fillRef>
+          <a:effectRef idx="0">
+            <a:schemeClr val="accent1"/>
+          </a:effectRef>
+          <a:fontRef idx="minor">
+            <a:schemeClr val="lt1"/>
+          </a:fontRef>
+        </p:style>
+        <p:txBody>
+          <a:bodyPr rtlCol="0" anchor="ctr"/>
+          <a:lstStyle/>
+          <a:p>
+            <a:pPr algn="ctr"/>
+            <a:endParaRPr lang="de-DE"/>
+          </a:p>
+        </p:txBody>
+      </p:sp>
+    </p:spTree>
+    <p:extLst>
+      <p:ext uri="{BB962C8B-B14F-4D97-AF65-F5344CB8AC3E}">
+        <p14:creationId xmlns:p14="http://schemas.microsoft.com/office/powerpoint/2010/main" val="441751040"/>
+      </p:ext>
+    </p:extLst>
+  </p:cSld>
+  <p:clrMapOvr>
+    <a:masterClrMapping/>
+  </p:clrMapOvr>
+</p:sld>
+</file>
+
 <file path=ppt/theme/theme1.xml><?xml version="1.0" encoding="utf-8"?>
 <a:theme xmlns:a="http://schemas.openxmlformats.org/drawingml/2006/main" name="Office">
   <a:themeElements>

--- a/docs_raw/class diagramm.pptx
+++ b/docs_raw/class diagramm.pptx
@@ -7,7 +7,8 @@
   <p:sldIdLst>
     <p:sldId id="256" r:id="rId2"/>
     <p:sldId id="257" r:id="rId3"/>
-    <p:sldId id="258" r:id="rId4"/>
+    <p:sldId id="259" r:id="rId4"/>
+    <p:sldId id="258" r:id="rId5"/>
   </p:sldIdLst>
   <p:sldSz cx="12192000" cy="6858000"/>
   <p:notesSz cx="6858000" cy="9144000"/>
@@ -261,7 +262,7 @@
           <a:p>
             <a:fld id="{EBE88FA0-6002-4C4B-9120-294BEA23AAB4}" type="datetimeFigureOut">
               <a:rPr lang="de-DE" smtClean="0"/>
-              <a:t>07.05.2025</a:t>
+              <a:t>31.05.2025</a:t>
             </a:fld>
             <a:endParaRPr lang="de-DE"/>
           </a:p>
@@ -459,7 +460,7 @@
           <a:p>
             <a:fld id="{EBE88FA0-6002-4C4B-9120-294BEA23AAB4}" type="datetimeFigureOut">
               <a:rPr lang="de-DE" smtClean="0"/>
-              <a:t>07.05.2025</a:t>
+              <a:t>31.05.2025</a:t>
             </a:fld>
             <a:endParaRPr lang="de-DE"/>
           </a:p>
@@ -667,7 +668,7 @@
           <a:p>
             <a:fld id="{EBE88FA0-6002-4C4B-9120-294BEA23AAB4}" type="datetimeFigureOut">
               <a:rPr lang="de-DE" smtClean="0"/>
-              <a:t>07.05.2025</a:t>
+              <a:t>31.05.2025</a:t>
             </a:fld>
             <a:endParaRPr lang="de-DE"/>
           </a:p>
@@ -865,7 +866,7 @@
           <a:p>
             <a:fld id="{EBE88FA0-6002-4C4B-9120-294BEA23AAB4}" type="datetimeFigureOut">
               <a:rPr lang="de-DE" smtClean="0"/>
-              <a:t>07.05.2025</a:t>
+              <a:t>31.05.2025</a:t>
             </a:fld>
             <a:endParaRPr lang="de-DE"/>
           </a:p>
@@ -1140,7 +1141,7 @@
           <a:p>
             <a:fld id="{EBE88FA0-6002-4C4B-9120-294BEA23AAB4}" type="datetimeFigureOut">
               <a:rPr lang="de-DE" smtClean="0"/>
-              <a:t>07.05.2025</a:t>
+              <a:t>31.05.2025</a:t>
             </a:fld>
             <a:endParaRPr lang="de-DE"/>
           </a:p>
@@ -1405,7 +1406,7 @@
           <a:p>
             <a:fld id="{EBE88FA0-6002-4C4B-9120-294BEA23AAB4}" type="datetimeFigureOut">
               <a:rPr lang="de-DE" smtClean="0"/>
-              <a:t>07.05.2025</a:t>
+              <a:t>31.05.2025</a:t>
             </a:fld>
             <a:endParaRPr lang="de-DE"/>
           </a:p>
@@ -1817,7 +1818,7 @@
           <a:p>
             <a:fld id="{EBE88FA0-6002-4C4B-9120-294BEA23AAB4}" type="datetimeFigureOut">
               <a:rPr lang="de-DE" smtClean="0"/>
-              <a:t>07.05.2025</a:t>
+              <a:t>31.05.2025</a:t>
             </a:fld>
             <a:endParaRPr lang="de-DE"/>
           </a:p>
@@ -1958,7 +1959,7 @@
           <a:p>
             <a:fld id="{EBE88FA0-6002-4C4B-9120-294BEA23AAB4}" type="datetimeFigureOut">
               <a:rPr lang="de-DE" smtClean="0"/>
-              <a:t>07.05.2025</a:t>
+              <a:t>31.05.2025</a:t>
             </a:fld>
             <a:endParaRPr lang="de-DE"/>
           </a:p>
@@ -2071,7 +2072,7 @@
           <a:p>
             <a:fld id="{EBE88FA0-6002-4C4B-9120-294BEA23AAB4}" type="datetimeFigureOut">
               <a:rPr lang="de-DE" smtClean="0"/>
-              <a:t>07.05.2025</a:t>
+              <a:t>31.05.2025</a:t>
             </a:fld>
             <a:endParaRPr lang="de-DE"/>
           </a:p>
@@ -2382,7 +2383,7 @@
           <a:p>
             <a:fld id="{EBE88FA0-6002-4C4B-9120-294BEA23AAB4}" type="datetimeFigureOut">
               <a:rPr lang="de-DE" smtClean="0"/>
-              <a:t>07.05.2025</a:t>
+              <a:t>31.05.2025</a:t>
             </a:fld>
             <a:endParaRPr lang="de-DE"/>
           </a:p>
@@ -2670,7 +2671,7 @@
           <a:p>
             <a:fld id="{EBE88FA0-6002-4C4B-9120-294BEA23AAB4}" type="datetimeFigureOut">
               <a:rPr lang="de-DE" smtClean="0"/>
-              <a:t>07.05.2025</a:t>
+              <a:t>31.05.2025</a:t>
             </a:fld>
             <a:endParaRPr lang="de-DE"/>
           </a:p>
@@ -2911,7 +2912,7 @@
           <a:p>
             <a:fld id="{EBE88FA0-6002-4C4B-9120-294BEA23AAB4}" type="datetimeFigureOut">
               <a:rPr lang="de-DE" smtClean="0"/>
-              <a:t>07.05.2025</a:t>
+              <a:t>31.05.2025</a:t>
             </a:fld>
             <a:endParaRPr lang="de-DE"/>
           </a:p>
@@ -9199,6 +9200,3154 @@
         <p:cNvPr id="1" name="">
           <a:extLst>
             <a:ext uri="{FF2B5EF4-FFF2-40B4-BE49-F238E27FC236}">
+              <a16:creationId xmlns:a16="http://schemas.microsoft.com/office/drawing/2014/main" id="{3DB7D3CC-F359-E807-F80B-FCD3B5774A9C}"/>
+            </a:ext>
+          </a:extLst>
+        </p:cNvPr>
+        <p:cNvGrpSpPr/>
+        <p:nvPr/>
+      </p:nvGrpSpPr>
+      <p:grpSpPr>
+        <a:xfrm>
+          <a:off x="0" y="0"/>
+          <a:ext cx="0" cy="0"/>
+          <a:chOff x="0" y="0"/>
+          <a:chExt cx="0" cy="0"/>
+        </a:xfrm>
+      </p:grpSpPr>
+      <p:sp>
+        <p:nvSpPr>
+          <p:cNvPr id="4" name="Textfeld 3">
+            <a:extLst>
+              <a:ext uri="{FF2B5EF4-FFF2-40B4-BE49-F238E27FC236}">
+                <a16:creationId xmlns:a16="http://schemas.microsoft.com/office/drawing/2014/main" id="{55BF0F9B-4326-4E17-5220-59B556903D9F}"/>
+              </a:ext>
+            </a:extLst>
+          </p:cNvPr>
+          <p:cNvSpPr txBox="1"/>
+          <p:nvPr/>
+        </p:nvSpPr>
+        <p:spPr>
+          <a:xfrm>
+            <a:off x="5620439" y="800631"/>
+            <a:ext cx="619080" cy="246221"/>
+          </a:xfrm>
+          <a:prstGeom prst="rect">
+            <a:avLst/>
+          </a:prstGeom>
+          <a:noFill/>
+          <a:ln>
+            <a:solidFill>
+              <a:schemeClr val="tx1"/>
+            </a:solidFill>
+          </a:ln>
+        </p:spPr>
+        <p:txBody>
+          <a:bodyPr wrap="none" rtlCol="0">
+            <a:spAutoFit/>
+          </a:bodyPr>
+          <a:lstStyle/>
+          <a:p>
+            <a:r>
+              <a:rPr lang="de-DE" sz="1000" dirty="0">
+                <a:solidFill>
+                  <a:srgbClr val="FF0000"/>
+                </a:solidFill>
+              </a:rPr>
+              <a:t>SWOSIO</a:t>
+            </a:r>
+          </a:p>
+        </p:txBody>
+      </p:sp>
+      <p:sp>
+        <p:nvSpPr>
+          <p:cNvPr id="5" name="Textfeld 4">
+            <a:extLst>
+              <a:ext uri="{FF2B5EF4-FFF2-40B4-BE49-F238E27FC236}">
+                <a16:creationId xmlns:a16="http://schemas.microsoft.com/office/drawing/2014/main" id="{F7C2FBDA-FBF8-2EF4-C4D6-B68DDC99F50B}"/>
+              </a:ext>
+            </a:extLst>
+          </p:cNvPr>
+          <p:cNvSpPr txBox="1"/>
+          <p:nvPr/>
+        </p:nvSpPr>
+        <p:spPr>
+          <a:xfrm>
+            <a:off x="1830589" y="1524804"/>
+            <a:ext cx="819455" cy="246221"/>
+          </a:xfrm>
+          <a:prstGeom prst="rect">
+            <a:avLst/>
+          </a:prstGeom>
+          <a:noFill/>
+          <a:ln>
+            <a:solidFill>
+              <a:schemeClr val="tx1"/>
+            </a:solidFill>
+          </a:ln>
+        </p:spPr>
+        <p:txBody>
+          <a:bodyPr wrap="none" rtlCol="0">
+            <a:spAutoFit/>
+          </a:bodyPr>
+          <a:lstStyle/>
+          <a:p>
+            <a:r>
+              <a:rPr lang="de-DE" sz="1000" b="0" dirty="0" err="1">
+                <a:solidFill>
+                  <a:srgbClr val="267F99"/>
+                </a:solidFill>
+                <a:effectLst/>
+                <a:latin typeface="Consolas" panose="020B0609020204030204" pitchFamily="49" charset="0"/>
+              </a:rPr>
+              <a:t>SwOSInput</a:t>
+            </a:r>
+            <a:endParaRPr lang="de-DE" sz="1000" b="0" dirty="0">
+              <a:solidFill>
+                <a:srgbClr val="000000"/>
+              </a:solidFill>
+              <a:effectLst/>
+              <a:latin typeface="Consolas" panose="020B0609020204030204" pitchFamily="49" charset="0"/>
+            </a:endParaRPr>
+          </a:p>
+        </p:txBody>
+      </p:sp>
+      <p:cxnSp>
+        <p:nvCxnSpPr>
+          <p:cNvPr id="7" name="Verbinder: gewinkelt 6">
+            <a:extLst>
+              <a:ext uri="{FF2B5EF4-FFF2-40B4-BE49-F238E27FC236}">
+                <a16:creationId xmlns:a16="http://schemas.microsoft.com/office/drawing/2014/main" id="{6BC12B9E-3100-BE98-0F0E-5F6AEB240DC0}"/>
+              </a:ext>
+            </a:extLst>
+          </p:cNvPr>
+          <p:cNvCxnSpPr>
+            <a:stCxn id="4" idx="2"/>
+            <a:endCxn id="5" idx="0"/>
+          </p:cNvCxnSpPr>
+          <p:nvPr/>
+        </p:nvCxnSpPr>
+        <p:spPr>
+          <a:xfrm rot="5400000">
+            <a:off x="3846172" y="-559003"/>
+            <a:ext cx="477952" cy="3689662"/>
+          </a:xfrm>
+          <a:prstGeom prst="bentConnector3">
+            <a:avLst/>
+          </a:prstGeom>
+        </p:spPr>
+        <p:style>
+          <a:lnRef idx="1">
+            <a:schemeClr val="accent1"/>
+          </a:lnRef>
+          <a:fillRef idx="0">
+            <a:schemeClr val="accent1"/>
+          </a:fillRef>
+          <a:effectRef idx="0">
+            <a:schemeClr val="accent1"/>
+          </a:effectRef>
+          <a:fontRef idx="minor">
+            <a:schemeClr val="tx1"/>
+          </a:fontRef>
+        </p:style>
+      </p:cxnSp>
+      <p:sp>
+        <p:nvSpPr>
+          <p:cNvPr id="49" name="Textfeld 48">
+            <a:extLst>
+              <a:ext uri="{FF2B5EF4-FFF2-40B4-BE49-F238E27FC236}">
+                <a16:creationId xmlns:a16="http://schemas.microsoft.com/office/drawing/2014/main" id="{F32911C4-6F8C-7821-5C80-D096C28440C1}"/>
+              </a:ext>
+            </a:extLst>
+          </p:cNvPr>
+          <p:cNvSpPr txBox="1"/>
+          <p:nvPr/>
+        </p:nvSpPr>
+        <p:spPr>
+          <a:xfrm>
+            <a:off x="6398235" y="1526662"/>
+            <a:ext cx="819455" cy="246221"/>
+          </a:xfrm>
+          <a:prstGeom prst="rect">
+            <a:avLst/>
+          </a:prstGeom>
+          <a:noFill/>
+          <a:ln>
+            <a:solidFill>
+              <a:schemeClr val="tx1"/>
+            </a:solidFill>
+          </a:ln>
+        </p:spPr>
+        <p:txBody>
+          <a:bodyPr wrap="none" rtlCol="0">
+            <a:spAutoFit/>
+          </a:bodyPr>
+          <a:lstStyle/>
+          <a:p>
+            <a:r>
+              <a:rPr lang="de-DE" sz="1000" b="0" dirty="0" err="1">
+                <a:solidFill>
+                  <a:srgbClr val="267F99"/>
+                </a:solidFill>
+                <a:effectLst/>
+                <a:latin typeface="Consolas" panose="020B0609020204030204" pitchFamily="49" charset="0"/>
+              </a:rPr>
+              <a:t>SwOSMotor</a:t>
+            </a:r>
+            <a:endParaRPr lang="de-DE" sz="1000" b="0" dirty="0">
+              <a:solidFill>
+                <a:srgbClr val="000000"/>
+              </a:solidFill>
+              <a:effectLst/>
+              <a:latin typeface="Consolas" panose="020B0609020204030204" pitchFamily="49" charset="0"/>
+            </a:endParaRPr>
+          </a:p>
+        </p:txBody>
+      </p:sp>
+      <p:cxnSp>
+        <p:nvCxnSpPr>
+          <p:cNvPr id="51" name="Verbinder: gewinkelt 50">
+            <a:extLst>
+              <a:ext uri="{FF2B5EF4-FFF2-40B4-BE49-F238E27FC236}">
+                <a16:creationId xmlns:a16="http://schemas.microsoft.com/office/drawing/2014/main" id="{FAE0879C-2991-9760-1494-D5D6CC1B4C84}"/>
+              </a:ext>
+            </a:extLst>
+          </p:cNvPr>
+          <p:cNvCxnSpPr>
+            <a:stCxn id="4" idx="2"/>
+            <a:endCxn id="49" idx="0"/>
+          </p:cNvCxnSpPr>
+          <p:nvPr/>
+        </p:nvCxnSpPr>
+        <p:spPr>
+          <a:xfrm rot="16200000" flipH="1">
+            <a:off x="6129066" y="847765"/>
+            <a:ext cx="479810" cy="877984"/>
+          </a:xfrm>
+          <a:prstGeom prst="bentConnector3">
+            <a:avLst/>
+          </a:prstGeom>
+        </p:spPr>
+        <p:style>
+          <a:lnRef idx="1">
+            <a:schemeClr val="accent1"/>
+          </a:lnRef>
+          <a:fillRef idx="0">
+            <a:schemeClr val="accent1"/>
+          </a:fillRef>
+          <a:effectRef idx="0">
+            <a:schemeClr val="accent1"/>
+          </a:effectRef>
+          <a:fontRef idx="minor">
+            <a:schemeClr val="tx1"/>
+          </a:fontRef>
+        </p:style>
+      </p:cxnSp>
+      <p:sp>
+        <p:nvSpPr>
+          <p:cNvPr id="56" name="Textfeld 55">
+            <a:extLst>
+              <a:ext uri="{FF2B5EF4-FFF2-40B4-BE49-F238E27FC236}">
+                <a16:creationId xmlns:a16="http://schemas.microsoft.com/office/drawing/2014/main" id="{CB536BE8-2186-41EE-ACCE-CC64CE802635}"/>
+              </a:ext>
+            </a:extLst>
+          </p:cNvPr>
+          <p:cNvSpPr txBox="1"/>
+          <p:nvPr/>
+        </p:nvSpPr>
+        <p:spPr>
+          <a:xfrm>
+            <a:off x="5818678" y="2247652"/>
+            <a:ext cx="960519" cy="246221"/>
+          </a:xfrm>
+          <a:prstGeom prst="rect">
+            <a:avLst/>
+          </a:prstGeom>
+          <a:noFill/>
+          <a:ln>
+            <a:solidFill>
+              <a:schemeClr val="tx1"/>
+            </a:solidFill>
+          </a:ln>
+        </p:spPr>
+        <p:txBody>
+          <a:bodyPr wrap="none" rtlCol="0">
+            <a:spAutoFit/>
+          </a:bodyPr>
+          <a:lstStyle/>
+          <a:p>
+            <a:r>
+              <a:rPr lang="de-DE" sz="1000" b="0" dirty="0" err="1">
+                <a:solidFill>
+                  <a:srgbClr val="267F99"/>
+                </a:solidFill>
+                <a:effectLst/>
+                <a:latin typeface="Consolas" panose="020B0609020204030204" pitchFamily="49" charset="0"/>
+              </a:rPr>
+              <a:t>SwOSDCMotor</a:t>
+            </a:r>
+            <a:endParaRPr lang="de-DE" sz="1000" b="0" dirty="0">
+              <a:solidFill>
+                <a:srgbClr val="000000"/>
+              </a:solidFill>
+              <a:effectLst/>
+              <a:latin typeface="Consolas" panose="020B0609020204030204" pitchFamily="49" charset="0"/>
+            </a:endParaRPr>
+          </a:p>
+        </p:txBody>
+      </p:sp>
+      <p:cxnSp>
+        <p:nvCxnSpPr>
+          <p:cNvPr id="61" name="Verbinder: gewinkelt 60">
+            <a:extLst>
+              <a:ext uri="{FF2B5EF4-FFF2-40B4-BE49-F238E27FC236}">
+                <a16:creationId xmlns:a16="http://schemas.microsoft.com/office/drawing/2014/main" id="{65968268-2CD0-BC15-AEAD-CD1953839E53}"/>
+              </a:ext>
+            </a:extLst>
+          </p:cNvPr>
+          <p:cNvCxnSpPr>
+            <a:stCxn id="49" idx="2"/>
+            <a:endCxn id="56" idx="0"/>
+          </p:cNvCxnSpPr>
+          <p:nvPr/>
+        </p:nvCxnSpPr>
+        <p:spPr>
+          <a:xfrm rot="5400000">
+            <a:off x="6316067" y="1755755"/>
+            <a:ext cx="474769" cy="509025"/>
+          </a:xfrm>
+          <a:prstGeom prst="bentConnector3">
+            <a:avLst/>
+          </a:prstGeom>
+        </p:spPr>
+        <p:style>
+          <a:lnRef idx="1">
+            <a:schemeClr val="accent1"/>
+          </a:lnRef>
+          <a:fillRef idx="0">
+            <a:schemeClr val="accent1"/>
+          </a:fillRef>
+          <a:effectRef idx="0">
+            <a:schemeClr val="accent1"/>
+          </a:effectRef>
+          <a:fontRef idx="minor">
+            <a:schemeClr val="tx1"/>
+          </a:fontRef>
+        </p:style>
+      </p:cxnSp>
+      <p:sp>
+        <p:nvSpPr>
+          <p:cNvPr id="111" name="Textfeld 110">
+            <a:extLst>
+              <a:ext uri="{FF2B5EF4-FFF2-40B4-BE49-F238E27FC236}">
+                <a16:creationId xmlns:a16="http://schemas.microsoft.com/office/drawing/2014/main" id="{DD9E4763-542A-5D36-90BD-2F71AE34F338}"/>
+              </a:ext>
+            </a:extLst>
+          </p:cNvPr>
+          <p:cNvSpPr txBox="1"/>
+          <p:nvPr/>
+        </p:nvSpPr>
+        <p:spPr>
+          <a:xfrm>
+            <a:off x="3857046" y="1524804"/>
+            <a:ext cx="819455" cy="246221"/>
+          </a:xfrm>
+          <a:prstGeom prst="rect">
+            <a:avLst/>
+          </a:prstGeom>
+          <a:noFill/>
+          <a:ln>
+            <a:solidFill>
+              <a:schemeClr val="tx1"/>
+            </a:solidFill>
+          </a:ln>
+        </p:spPr>
+        <p:txBody>
+          <a:bodyPr wrap="none" rtlCol="0">
+            <a:spAutoFit/>
+          </a:bodyPr>
+          <a:lstStyle/>
+          <a:p>
+            <a:r>
+              <a:rPr lang="de-DE" sz="1000" b="0" dirty="0" err="1">
+                <a:solidFill>
+                  <a:srgbClr val="267F99"/>
+                </a:solidFill>
+                <a:effectLst/>
+                <a:latin typeface="Consolas" panose="020B0609020204030204" pitchFamily="49" charset="0"/>
+              </a:rPr>
+              <a:t>SwOSServo</a:t>
+            </a:r>
+            <a:endParaRPr lang="de-DE" sz="1000" b="0" dirty="0">
+              <a:solidFill>
+                <a:srgbClr val="000000"/>
+              </a:solidFill>
+              <a:effectLst/>
+              <a:latin typeface="Consolas" panose="020B0609020204030204" pitchFamily="49" charset="0"/>
+            </a:endParaRPr>
+          </a:p>
+        </p:txBody>
+      </p:sp>
+      <p:cxnSp>
+        <p:nvCxnSpPr>
+          <p:cNvPr id="113" name="Verbinder: gewinkelt 112">
+            <a:extLst>
+              <a:ext uri="{FF2B5EF4-FFF2-40B4-BE49-F238E27FC236}">
+                <a16:creationId xmlns:a16="http://schemas.microsoft.com/office/drawing/2014/main" id="{3A96A45D-9AD9-E515-1D9A-EAC7DC7DACE6}"/>
+              </a:ext>
+            </a:extLst>
+          </p:cNvPr>
+          <p:cNvCxnSpPr>
+            <a:cxnSpLocks/>
+            <a:stCxn id="4" idx="2"/>
+            <a:endCxn id="111" idx="0"/>
+          </p:cNvCxnSpPr>
+          <p:nvPr/>
+        </p:nvCxnSpPr>
+        <p:spPr>
+          <a:xfrm rot="5400000">
+            <a:off x="4859401" y="454226"/>
+            <a:ext cx="477952" cy="1663205"/>
+          </a:xfrm>
+          <a:prstGeom prst="bentConnector3">
+            <a:avLst>
+              <a:gd name="adj1" fmla="val 50000"/>
+            </a:avLst>
+          </a:prstGeom>
+        </p:spPr>
+        <p:style>
+          <a:lnRef idx="1">
+            <a:schemeClr val="accent1"/>
+          </a:lnRef>
+          <a:fillRef idx="0">
+            <a:schemeClr val="accent1"/>
+          </a:fillRef>
+          <a:effectRef idx="0">
+            <a:schemeClr val="accent1"/>
+          </a:effectRef>
+          <a:fontRef idx="minor">
+            <a:schemeClr val="tx1"/>
+          </a:fontRef>
+        </p:style>
+      </p:cxnSp>
+      <p:sp>
+        <p:nvSpPr>
+          <p:cNvPr id="90" name="Textfeld 89">
+            <a:extLst>
+              <a:ext uri="{FF2B5EF4-FFF2-40B4-BE49-F238E27FC236}">
+                <a16:creationId xmlns:a16="http://schemas.microsoft.com/office/drawing/2014/main" id="{5AA97CC9-1096-846B-B791-2023633A19B0}"/>
+              </a:ext>
+            </a:extLst>
+          </p:cNvPr>
+          <p:cNvSpPr txBox="1"/>
+          <p:nvPr/>
+        </p:nvSpPr>
+        <p:spPr>
+          <a:xfrm>
+            <a:off x="6857449" y="2247651"/>
+            <a:ext cx="960519" cy="246221"/>
+          </a:xfrm>
+          <a:prstGeom prst="rect">
+            <a:avLst/>
+          </a:prstGeom>
+          <a:noFill/>
+          <a:ln>
+            <a:solidFill>
+              <a:schemeClr val="tx1"/>
+            </a:solidFill>
+          </a:ln>
+        </p:spPr>
+        <p:txBody>
+          <a:bodyPr wrap="none" rtlCol="0">
+            <a:spAutoFit/>
+          </a:bodyPr>
+          <a:lstStyle/>
+          <a:p>
+            <a:r>
+              <a:rPr lang="de-DE" sz="1000" b="0" dirty="0" err="1">
+                <a:solidFill>
+                  <a:srgbClr val="267F99"/>
+                </a:solidFill>
+                <a:effectLst/>
+                <a:latin typeface="Consolas" panose="020B0609020204030204" pitchFamily="49" charset="0"/>
+              </a:rPr>
+              <a:t>SwOSStepper</a:t>
+            </a:r>
+            <a:endParaRPr lang="de-DE" sz="1000" b="0" dirty="0">
+              <a:solidFill>
+                <a:srgbClr val="000000"/>
+              </a:solidFill>
+              <a:effectLst/>
+              <a:latin typeface="Consolas" panose="020B0609020204030204" pitchFamily="49" charset="0"/>
+            </a:endParaRPr>
+          </a:p>
+        </p:txBody>
+      </p:sp>
+      <p:cxnSp>
+        <p:nvCxnSpPr>
+          <p:cNvPr id="91" name="Verbinder: gewinkelt 90">
+            <a:extLst>
+              <a:ext uri="{FF2B5EF4-FFF2-40B4-BE49-F238E27FC236}">
+                <a16:creationId xmlns:a16="http://schemas.microsoft.com/office/drawing/2014/main" id="{16C90DCC-8A5A-7213-B824-C71DAA5B785E}"/>
+              </a:ext>
+            </a:extLst>
+          </p:cNvPr>
+          <p:cNvCxnSpPr>
+            <a:cxnSpLocks/>
+            <a:stCxn id="49" idx="2"/>
+            <a:endCxn id="90" idx="0"/>
+          </p:cNvCxnSpPr>
+          <p:nvPr/>
+        </p:nvCxnSpPr>
+        <p:spPr>
+          <a:xfrm rot="16200000" flipH="1">
+            <a:off x="6835452" y="1745394"/>
+            <a:ext cx="474768" cy="529746"/>
+          </a:xfrm>
+          <a:prstGeom prst="bentConnector3">
+            <a:avLst>
+              <a:gd name="adj1" fmla="val 50000"/>
+            </a:avLst>
+          </a:prstGeom>
+        </p:spPr>
+        <p:style>
+          <a:lnRef idx="1">
+            <a:schemeClr val="accent1"/>
+          </a:lnRef>
+          <a:fillRef idx="0">
+            <a:schemeClr val="accent1"/>
+          </a:fillRef>
+          <a:effectRef idx="0">
+            <a:schemeClr val="accent1"/>
+          </a:effectRef>
+          <a:fontRef idx="minor">
+            <a:schemeClr val="tx1"/>
+          </a:fontRef>
+        </p:style>
+      </p:cxnSp>
+      <p:sp>
+        <p:nvSpPr>
+          <p:cNvPr id="11" name="Textfeld 10">
+            <a:extLst>
+              <a:ext uri="{FF2B5EF4-FFF2-40B4-BE49-F238E27FC236}">
+                <a16:creationId xmlns:a16="http://schemas.microsoft.com/office/drawing/2014/main" id="{F9256D7D-C1EA-E1B0-E8EB-C03519925775}"/>
+              </a:ext>
+            </a:extLst>
+          </p:cNvPr>
+          <p:cNvSpPr txBox="1"/>
+          <p:nvPr/>
+        </p:nvSpPr>
+        <p:spPr>
+          <a:xfrm>
+            <a:off x="3200838" y="2247654"/>
+            <a:ext cx="1313180" cy="246221"/>
+          </a:xfrm>
+          <a:prstGeom prst="rect">
+            <a:avLst/>
+          </a:prstGeom>
+          <a:noFill/>
+          <a:ln>
+            <a:solidFill>
+              <a:schemeClr val="tx1"/>
+            </a:solidFill>
+          </a:ln>
+        </p:spPr>
+        <p:txBody>
+          <a:bodyPr wrap="none" rtlCol="0">
+            <a:spAutoFit/>
+          </a:bodyPr>
+          <a:lstStyle/>
+          <a:p>
+            <a:r>
+              <a:rPr lang="de-DE" sz="1000" b="0" dirty="0" err="1">
+                <a:solidFill>
+                  <a:srgbClr val="267F99"/>
+                </a:solidFill>
+                <a:effectLst/>
+                <a:latin typeface="Consolas" panose="020B0609020204030204" pitchFamily="49" charset="0"/>
+              </a:rPr>
+              <a:t>SwOSDigitalServo</a:t>
+            </a:r>
+            <a:endParaRPr lang="de-DE" sz="1000" b="0" dirty="0">
+              <a:solidFill>
+                <a:srgbClr val="000000"/>
+              </a:solidFill>
+              <a:effectLst/>
+              <a:latin typeface="Consolas" panose="020B0609020204030204" pitchFamily="49" charset="0"/>
+            </a:endParaRPr>
+          </a:p>
+        </p:txBody>
+      </p:sp>
+      <p:cxnSp>
+        <p:nvCxnSpPr>
+          <p:cNvPr id="12" name="Verbinder: gewinkelt 11">
+            <a:extLst>
+              <a:ext uri="{FF2B5EF4-FFF2-40B4-BE49-F238E27FC236}">
+                <a16:creationId xmlns:a16="http://schemas.microsoft.com/office/drawing/2014/main" id="{039CD54E-729C-D0E6-6C45-14C447F5B98C}"/>
+              </a:ext>
+            </a:extLst>
+          </p:cNvPr>
+          <p:cNvCxnSpPr>
+            <a:cxnSpLocks/>
+            <a:stCxn id="111" idx="2"/>
+            <a:endCxn id="11" idx="0"/>
+          </p:cNvCxnSpPr>
+          <p:nvPr/>
+        </p:nvCxnSpPr>
+        <p:spPr>
+          <a:xfrm rot="5400000">
+            <a:off x="3823787" y="1804666"/>
+            <a:ext cx="476629" cy="409346"/>
+          </a:xfrm>
+          <a:prstGeom prst="bentConnector3">
+            <a:avLst>
+              <a:gd name="adj1" fmla="val 50000"/>
+            </a:avLst>
+          </a:prstGeom>
+        </p:spPr>
+        <p:style>
+          <a:lnRef idx="1">
+            <a:schemeClr val="accent1"/>
+          </a:lnRef>
+          <a:fillRef idx="0">
+            <a:schemeClr val="accent1"/>
+          </a:fillRef>
+          <a:effectRef idx="0">
+            <a:schemeClr val="accent1"/>
+          </a:effectRef>
+          <a:fontRef idx="minor">
+            <a:schemeClr val="tx1"/>
+          </a:fontRef>
+        </p:style>
+      </p:cxnSp>
+      <p:sp>
+        <p:nvSpPr>
+          <p:cNvPr id="16" name="Textfeld 15">
+            <a:extLst>
+              <a:ext uri="{FF2B5EF4-FFF2-40B4-BE49-F238E27FC236}">
+                <a16:creationId xmlns:a16="http://schemas.microsoft.com/office/drawing/2014/main" id="{9F058B69-2EB7-BECE-33C1-7AB378F8352A}"/>
+              </a:ext>
+            </a:extLst>
+          </p:cNvPr>
+          <p:cNvSpPr txBox="1"/>
+          <p:nvPr/>
+        </p:nvSpPr>
+        <p:spPr>
+          <a:xfrm>
+            <a:off x="4592269" y="2247653"/>
+            <a:ext cx="960519" cy="246221"/>
+          </a:xfrm>
+          <a:prstGeom prst="rect">
+            <a:avLst/>
+          </a:prstGeom>
+          <a:noFill/>
+          <a:ln>
+            <a:solidFill>
+              <a:schemeClr val="tx1"/>
+            </a:solidFill>
+          </a:ln>
+        </p:spPr>
+        <p:txBody>
+          <a:bodyPr wrap="none" rtlCol="0">
+            <a:spAutoFit/>
+          </a:bodyPr>
+          <a:lstStyle/>
+          <a:p>
+            <a:r>
+              <a:rPr lang="de-DE" sz="1000" b="0" dirty="0" err="1">
+                <a:solidFill>
+                  <a:srgbClr val="267F99"/>
+                </a:solidFill>
+                <a:effectLst/>
+                <a:latin typeface="Consolas" panose="020B0609020204030204" pitchFamily="49" charset="0"/>
+              </a:rPr>
+              <a:t>SwOSRCServo</a:t>
+            </a:r>
+            <a:endParaRPr lang="de-DE" sz="1000" b="0" dirty="0">
+              <a:solidFill>
+                <a:srgbClr val="000000"/>
+              </a:solidFill>
+              <a:effectLst/>
+              <a:latin typeface="Consolas" panose="020B0609020204030204" pitchFamily="49" charset="0"/>
+            </a:endParaRPr>
+          </a:p>
+        </p:txBody>
+      </p:sp>
+      <p:cxnSp>
+        <p:nvCxnSpPr>
+          <p:cNvPr id="17" name="Verbinder: gewinkelt 16">
+            <a:extLst>
+              <a:ext uri="{FF2B5EF4-FFF2-40B4-BE49-F238E27FC236}">
+                <a16:creationId xmlns:a16="http://schemas.microsoft.com/office/drawing/2014/main" id="{D832C7D0-09F5-A8FF-8C34-9C3CF315B03C}"/>
+              </a:ext>
+            </a:extLst>
+          </p:cNvPr>
+          <p:cNvCxnSpPr>
+            <a:cxnSpLocks/>
+            <a:stCxn id="111" idx="2"/>
+            <a:endCxn id="16" idx="0"/>
+          </p:cNvCxnSpPr>
+          <p:nvPr/>
+        </p:nvCxnSpPr>
+        <p:spPr>
+          <a:xfrm rot="16200000" flipH="1">
+            <a:off x="4431337" y="1606461"/>
+            <a:ext cx="476628" cy="805755"/>
+          </a:xfrm>
+          <a:prstGeom prst="bentConnector3">
+            <a:avLst>
+              <a:gd name="adj1" fmla="val 50000"/>
+            </a:avLst>
+          </a:prstGeom>
+        </p:spPr>
+        <p:style>
+          <a:lnRef idx="1">
+            <a:schemeClr val="accent1"/>
+          </a:lnRef>
+          <a:fillRef idx="0">
+            <a:schemeClr val="accent1"/>
+          </a:fillRef>
+          <a:effectRef idx="0">
+            <a:schemeClr val="accent1"/>
+          </a:effectRef>
+          <a:fontRef idx="minor">
+            <a:schemeClr val="tx1"/>
+          </a:fontRef>
+        </p:style>
+      </p:cxnSp>
+      <p:sp>
+        <p:nvSpPr>
+          <p:cNvPr id="22" name="Textfeld 21">
+            <a:extLst>
+              <a:ext uri="{FF2B5EF4-FFF2-40B4-BE49-F238E27FC236}">
+                <a16:creationId xmlns:a16="http://schemas.microsoft.com/office/drawing/2014/main" id="{1D069CC4-5A51-54A6-0FB5-A73B2ED23771}"/>
+              </a:ext>
+            </a:extLst>
+          </p:cNvPr>
+          <p:cNvSpPr txBox="1"/>
+          <p:nvPr/>
+        </p:nvSpPr>
+        <p:spPr>
+          <a:xfrm>
+            <a:off x="562517" y="4117905"/>
+            <a:ext cx="1440000" cy="246221"/>
+          </a:xfrm>
+          <a:prstGeom prst="rect">
+            <a:avLst/>
+          </a:prstGeom>
+          <a:noFill/>
+          <a:ln>
+            <a:solidFill>
+              <a:schemeClr val="tx1"/>
+            </a:solidFill>
+          </a:ln>
+        </p:spPr>
+        <p:txBody>
+          <a:bodyPr wrap="none" rtlCol="0">
+            <a:spAutoFit/>
+          </a:bodyPr>
+          <a:lstStyle/>
+          <a:p>
+            <a:r>
+              <a:rPr lang="de-DE" sz="1000" b="0" dirty="0" err="1">
+                <a:solidFill>
+                  <a:srgbClr val="267F99"/>
+                </a:solidFill>
+                <a:effectLst/>
+                <a:latin typeface="Consolas" panose="020B0609020204030204" pitchFamily="49" charset="0"/>
+              </a:rPr>
+              <a:t>SwOSAnalogInput</a:t>
+            </a:r>
+            <a:endParaRPr lang="de-DE" sz="1000" b="0" dirty="0">
+              <a:solidFill>
+                <a:srgbClr val="000000"/>
+              </a:solidFill>
+              <a:effectLst/>
+              <a:latin typeface="Consolas" panose="020B0609020204030204" pitchFamily="49" charset="0"/>
+            </a:endParaRPr>
+          </a:p>
+        </p:txBody>
+      </p:sp>
+      <p:cxnSp>
+        <p:nvCxnSpPr>
+          <p:cNvPr id="25" name="Verbinder: gewinkelt 24">
+            <a:extLst>
+              <a:ext uri="{FF2B5EF4-FFF2-40B4-BE49-F238E27FC236}">
+                <a16:creationId xmlns:a16="http://schemas.microsoft.com/office/drawing/2014/main" id="{BAEFC23D-C956-BFDB-25CE-258302DC51B7}"/>
+              </a:ext>
+            </a:extLst>
+          </p:cNvPr>
+          <p:cNvCxnSpPr>
+            <a:cxnSpLocks/>
+            <a:stCxn id="5" idx="2"/>
+            <a:endCxn id="22" idx="3"/>
+          </p:cNvCxnSpPr>
+          <p:nvPr/>
+        </p:nvCxnSpPr>
+        <p:spPr>
+          <a:xfrm rot="5400000">
+            <a:off x="886422" y="2887120"/>
+            <a:ext cx="2469991" cy="237800"/>
+          </a:xfrm>
+          <a:prstGeom prst="bentConnector2">
+            <a:avLst/>
+          </a:prstGeom>
+        </p:spPr>
+        <p:style>
+          <a:lnRef idx="1">
+            <a:schemeClr val="accent1"/>
+          </a:lnRef>
+          <a:fillRef idx="0">
+            <a:schemeClr val="accent1"/>
+          </a:fillRef>
+          <a:effectRef idx="0">
+            <a:schemeClr val="accent1"/>
+          </a:effectRef>
+          <a:fontRef idx="minor">
+            <a:schemeClr val="tx1"/>
+          </a:fontRef>
+        </p:style>
+      </p:cxnSp>
+      <p:sp>
+        <p:nvSpPr>
+          <p:cNvPr id="28" name="Textfeld 27">
+            <a:extLst>
+              <a:ext uri="{FF2B5EF4-FFF2-40B4-BE49-F238E27FC236}">
+                <a16:creationId xmlns:a16="http://schemas.microsoft.com/office/drawing/2014/main" id="{4D296CBA-2F6E-A8FB-E76B-858D1EF7C535}"/>
+              </a:ext>
+            </a:extLst>
+          </p:cNvPr>
+          <p:cNvSpPr txBox="1"/>
+          <p:nvPr/>
+        </p:nvSpPr>
+        <p:spPr>
+          <a:xfrm>
+            <a:off x="2748126" y="1524804"/>
+            <a:ext cx="1031051" cy="246221"/>
+          </a:xfrm>
+          <a:prstGeom prst="rect">
+            <a:avLst/>
+          </a:prstGeom>
+          <a:noFill/>
+          <a:ln>
+            <a:solidFill>
+              <a:schemeClr val="tx1"/>
+            </a:solidFill>
+          </a:ln>
+        </p:spPr>
+        <p:txBody>
+          <a:bodyPr wrap="none" rtlCol="0">
+            <a:spAutoFit/>
+          </a:bodyPr>
+          <a:lstStyle/>
+          <a:p>
+            <a:r>
+              <a:rPr lang="de-DE" sz="1000" b="0" dirty="0" err="1">
+                <a:solidFill>
+                  <a:srgbClr val="267F99"/>
+                </a:solidFill>
+                <a:effectLst/>
+                <a:latin typeface="Consolas" panose="020B0609020204030204" pitchFamily="49" charset="0"/>
+              </a:rPr>
+              <a:t>SwOSJoystick</a:t>
+            </a:r>
+            <a:endParaRPr lang="de-DE" sz="1000" b="0" dirty="0">
+              <a:solidFill>
+                <a:srgbClr val="000000"/>
+              </a:solidFill>
+              <a:effectLst/>
+              <a:latin typeface="Consolas" panose="020B0609020204030204" pitchFamily="49" charset="0"/>
+            </a:endParaRPr>
+          </a:p>
+        </p:txBody>
+      </p:sp>
+      <p:cxnSp>
+        <p:nvCxnSpPr>
+          <p:cNvPr id="32" name="Verbinder: gewinkelt 31">
+            <a:extLst>
+              <a:ext uri="{FF2B5EF4-FFF2-40B4-BE49-F238E27FC236}">
+                <a16:creationId xmlns:a16="http://schemas.microsoft.com/office/drawing/2014/main" id="{FB41BAA2-5500-71E5-F047-A58A24626935}"/>
+              </a:ext>
+            </a:extLst>
+          </p:cNvPr>
+          <p:cNvCxnSpPr>
+            <a:cxnSpLocks/>
+            <a:stCxn id="4" idx="2"/>
+            <a:endCxn id="28" idx="0"/>
+          </p:cNvCxnSpPr>
+          <p:nvPr/>
+        </p:nvCxnSpPr>
+        <p:spPr>
+          <a:xfrm rot="5400000">
+            <a:off x="4357840" y="-47335"/>
+            <a:ext cx="477952" cy="2666327"/>
+          </a:xfrm>
+          <a:prstGeom prst="bentConnector3">
+            <a:avLst>
+              <a:gd name="adj1" fmla="val 50000"/>
+            </a:avLst>
+          </a:prstGeom>
+        </p:spPr>
+        <p:style>
+          <a:lnRef idx="1">
+            <a:schemeClr val="accent1"/>
+          </a:lnRef>
+          <a:fillRef idx="0">
+            <a:schemeClr val="accent1"/>
+          </a:fillRef>
+          <a:effectRef idx="0">
+            <a:schemeClr val="accent1"/>
+          </a:effectRef>
+          <a:fontRef idx="minor">
+            <a:schemeClr val="tx1"/>
+          </a:fontRef>
+        </p:style>
+      </p:cxnSp>
+      <p:sp>
+        <p:nvSpPr>
+          <p:cNvPr id="44" name="Textfeld 43">
+            <a:extLst>
+              <a:ext uri="{FF2B5EF4-FFF2-40B4-BE49-F238E27FC236}">
+                <a16:creationId xmlns:a16="http://schemas.microsoft.com/office/drawing/2014/main" id="{360C4544-87B5-3AAD-7E14-937EEEF74677}"/>
+              </a:ext>
+            </a:extLst>
+          </p:cNvPr>
+          <p:cNvSpPr txBox="1"/>
+          <p:nvPr/>
+        </p:nvSpPr>
+        <p:spPr>
+          <a:xfrm>
+            <a:off x="4759325" y="1529171"/>
+            <a:ext cx="678391" cy="246221"/>
+          </a:xfrm>
+          <a:prstGeom prst="rect">
+            <a:avLst/>
+          </a:prstGeom>
+          <a:noFill/>
+          <a:ln>
+            <a:solidFill>
+              <a:schemeClr val="tx1"/>
+            </a:solidFill>
+          </a:ln>
+        </p:spPr>
+        <p:txBody>
+          <a:bodyPr wrap="none" rtlCol="0">
+            <a:spAutoFit/>
+          </a:bodyPr>
+          <a:lstStyle/>
+          <a:p>
+            <a:r>
+              <a:rPr lang="de-DE" sz="1000" b="0" dirty="0" err="1">
+                <a:solidFill>
+                  <a:srgbClr val="267F99"/>
+                </a:solidFill>
+                <a:effectLst/>
+                <a:latin typeface="Consolas" panose="020B0609020204030204" pitchFamily="49" charset="0"/>
+              </a:rPr>
+              <a:t>SwOSCAM</a:t>
+            </a:r>
+            <a:endParaRPr lang="de-DE" sz="1000" b="0" dirty="0">
+              <a:solidFill>
+                <a:srgbClr val="000000"/>
+              </a:solidFill>
+              <a:effectLst/>
+              <a:latin typeface="Consolas" panose="020B0609020204030204" pitchFamily="49" charset="0"/>
+            </a:endParaRPr>
+          </a:p>
+        </p:txBody>
+      </p:sp>
+      <p:cxnSp>
+        <p:nvCxnSpPr>
+          <p:cNvPr id="45" name="Verbinder: gewinkelt 44">
+            <a:extLst>
+              <a:ext uri="{FF2B5EF4-FFF2-40B4-BE49-F238E27FC236}">
+                <a16:creationId xmlns:a16="http://schemas.microsoft.com/office/drawing/2014/main" id="{1F1B068D-3191-4AEF-6042-09CA29B6D56F}"/>
+              </a:ext>
+            </a:extLst>
+          </p:cNvPr>
+          <p:cNvCxnSpPr>
+            <a:cxnSpLocks/>
+            <a:stCxn id="4" idx="2"/>
+            <a:endCxn id="44" idx="0"/>
+          </p:cNvCxnSpPr>
+          <p:nvPr/>
+        </p:nvCxnSpPr>
+        <p:spPr>
+          <a:xfrm rot="5400000">
+            <a:off x="5273091" y="872282"/>
+            <a:ext cx="482319" cy="831458"/>
+          </a:xfrm>
+          <a:prstGeom prst="bentConnector3">
+            <a:avLst>
+              <a:gd name="adj1" fmla="val 50000"/>
+            </a:avLst>
+          </a:prstGeom>
+        </p:spPr>
+        <p:style>
+          <a:lnRef idx="1">
+            <a:schemeClr val="accent1"/>
+          </a:lnRef>
+          <a:fillRef idx="0">
+            <a:schemeClr val="accent1"/>
+          </a:fillRef>
+          <a:effectRef idx="0">
+            <a:schemeClr val="accent1"/>
+          </a:effectRef>
+          <a:fontRef idx="minor">
+            <a:schemeClr val="tx1"/>
+          </a:fontRef>
+        </p:style>
+      </p:cxnSp>
+      <p:sp>
+        <p:nvSpPr>
+          <p:cNvPr id="64" name="Textfeld 63">
+            <a:extLst>
+              <a:ext uri="{FF2B5EF4-FFF2-40B4-BE49-F238E27FC236}">
+                <a16:creationId xmlns:a16="http://schemas.microsoft.com/office/drawing/2014/main" id="{D02C3F39-A5CE-E400-8C4D-BBFDE2FC0C98}"/>
+              </a:ext>
+            </a:extLst>
+          </p:cNvPr>
+          <p:cNvSpPr txBox="1"/>
+          <p:nvPr/>
+        </p:nvSpPr>
+        <p:spPr>
+          <a:xfrm>
+            <a:off x="558412" y="2620985"/>
+            <a:ext cx="1440000" cy="246221"/>
+          </a:xfrm>
+          <a:prstGeom prst="rect">
+            <a:avLst/>
+          </a:prstGeom>
+          <a:noFill/>
+          <a:ln>
+            <a:solidFill>
+              <a:schemeClr val="tx1"/>
+            </a:solidFill>
+          </a:ln>
+        </p:spPr>
+        <p:txBody>
+          <a:bodyPr wrap="none" rtlCol="0">
+            <a:spAutoFit/>
+          </a:bodyPr>
+          <a:lstStyle/>
+          <a:p>
+            <a:r>
+              <a:rPr lang="de-DE" sz="1000" b="0" dirty="0" err="1">
+                <a:solidFill>
+                  <a:srgbClr val="267F99"/>
+                </a:solidFill>
+                <a:effectLst/>
+                <a:latin typeface="Consolas" panose="020B0609020204030204" pitchFamily="49" charset="0"/>
+              </a:rPr>
+              <a:t>SwOSCounter</a:t>
+            </a:r>
+            <a:endParaRPr lang="de-DE" sz="1000" b="0" dirty="0">
+              <a:solidFill>
+                <a:srgbClr val="000000"/>
+              </a:solidFill>
+              <a:effectLst/>
+              <a:latin typeface="Consolas" panose="020B0609020204030204" pitchFamily="49" charset="0"/>
+            </a:endParaRPr>
+          </a:p>
+        </p:txBody>
+      </p:sp>
+      <p:cxnSp>
+        <p:nvCxnSpPr>
+          <p:cNvPr id="67" name="Verbinder: gewinkelt 66">
+            <a:extLst>
+              <a:ext uri="{FF2B5EF4-FFF2-40B4-BE49-F238E27FC236}">
+                <a16:creationId xmlns:a16="http://schemas.microsoft.com/office/drawing/2014/main" id="{571E4BB7-2EAD-CBEE-967B-2E2EA4B6CAF6}"/>
+              </a:ext>
+            </a:extLst>
+          </p:cNvPr>
+          <p:cNvCxnSpPr>
+            <a:cxnSpLocks/>
+            <a:stCxn id="5" idx="2"/>
+            <a:endCxn id="64" idx="3"/>
+          </p:cNvCxnSpPr>
+          <p:nvPr/>
+        </p:nvCxnSpPr>
+        <p:spPr>
+          <a:xfrm rot="5400000">
+            <a:off x="1632830" y="2136608"/>
+            <a:ext cx="973071" cy="241905"/>
+          </a:xfrm>
+          <a:prstGeom prst="bentConnector2">
+            <a:avLst/>
+          </a:prstGeom>
+        </p:spPr>
+        <p:style>
+          <a:lnRef idx="1">
+            <a:schemeClr val="accent1"/>
+          </a:lnRef>
+          <a:fillRef idx="0">
+            <a:schemeClr val="accent1"/>
+          </a:fillRef>
+          <a:effectRef idx="0">
+            <a:schemeClr val="accent1"/>
+          </a:effectRef>
+          <a:fontRef idx="minor">
+            <a:schemeClr val="tx1"/>
+          </a:fontRef>
+        </p:style>
+      </p:cxnSp>
+      <p:sp>
+        <p:nvSpPr>
+          <p:cNvPr id="78" name="Textfeld 77">
+            <a:extLst>
+              <a:ext uri="{FF2B5EF4-FFF2-40B4-BE49-F238E27FC236}">
+                <a16:creationId xmlns:a16="http://schemas.microsoft.com/office/drawing/2014/main" id="{7A06B461-EA1C-3EF5-8D6B-13327A9401D5}"/>
+              </a:ext>
+            </a:extLst>
+          </p:cNvPr>
+          <p:cNvSpPr txBox="1"/>
+          <p:nvPr/>
+        </p:nvSpPr>
+        <p:spPr>
+          <a:xfrm>
+            <a:off x="558413" y="2228581"/>
+            <a:ext cx="1440000" cy="246221"/>
+          </a:xfrm>
+          <a:prstGeom prst="rect">
+            <a:avLst/>
+          </a:prstGeom>
+          <a:noFill/>
+          <a:ln>
+            <a:solidFill>
+              <a:schemeClr val="tx1"/>
+            </a:solidFill>
+          </a:ln>
+        </p:spPr>
+        <p:txBody>
+          <a:bodyPr wrap="none" rtlCol="0">
+            <a:spAutoFit/>
+          </a:bodyPr>
+          <a:lstStyle/>
+          <a:p>
+            <a:r>
+              <a:rPr lang="de-DE" sz="1000" b="0" dirty="0" err="1">
+                <a:solidFill>
+                  <a:srgbClr val="267F99"/>
+                </a:solidFill>
+                <a:effectLst/>
+                <a:latin typeface="Consolas" panose="020B0609020204030204" pitchFamily="49" charset="0"/>
+              </a:rPr>
+              <a:t>SwOSFrequencymeter</a:t>
+            </a:r>
+            <a:endParaRPr lang="de-DE" sz="1000" b="0" dirty="0">
+              <a:solidFill>
+                <a:srgbClr val="000000"/>
+              </a:solidFill>
+              <a:effectLst/>
+              <a:latin typeface="Consolas" panose="020B0609020204030204" pitchFamily="49" charset="0"/>
+            </a:endParaRPr>
+          </a:p>
+        </p:txBody>
+      </p:sp>
+      <p:cxnSp>
+        <p:nvCxnSpPr>
+          <p:cNvPr id="81" name="Verbinder: gewinkelt 80">
+            <a:extLst>
+              <a:ext uri="{FF2B5EF4-FFF2-40B4-BE49-F238E27FC236}">
+                <a16:creationId xmlns:a16="http://schemas.microsoft.com/office/drawing/2014/main" id="{C01C10DB-BDCB-F030-27E8-47409768E934}"/>
+              </a:ext>
+            </a:extLst>
+          </p:cNvPr>
+          <p:cNvCxnSpPr>
+            <a:cxnSpLocks/>
+            <a:stCxn id="5" idx="2"/>
+            <a:endCxn id="78" idx="3"/>
+          </p:cNvCxnSpPr>
+          <p:nvPr/>
+        </p:nvCxnSpPr>
+        <p:spPr>
+          <a:xfrm rot="5400000">
+            <a:off x="1829032" y="1940406"/>
+            <a:ext cx="580667" cy="241904"/>
+          </a:xfrm>
+          <a:prstGeom prst="bentConnector2">
+            <a:avLst/>
+          </a:prstGeom>
+        </p:spPr>
+        <p:style>
+          <a:lnRef idx="1">
+            <a:schemeClr val="accent1"/>
+          </a:lnRef>
+          <a:fillRef idx="0">
+            <a:schemeClr val="accent1"/>
+          </a:fillRef>
+          <a:effectRef idx="0">
+            <a:schemeClr val="accent1"/>
+          </a:effectRef>
+          <a:fontRef idx="minor">
+            <a:schemeClr val="tx1"/>
+          </a:fontRef>
+        </p:style>
+      </p:cxnSp>
+      <p:sp>
+        <p:nvSpPr>
+          <p:cNvPr id="85" name="Textfeld 84">
+            <a:extLst>
+              <a:ext uri="{FF2B5EF4-FFF2-40B4-BE49-F238E27FC236}">
+                <a16:creationId xmlns:a16="http://schemas.microsoft.com/office/drawing/2014/main" id="{A509CBB5-6756-52B1-5195-367BC04AB2F0}"/>
+              </a:ext>
+            </a:extLst>
+          </p:cNvPr>
+          <p:cNvSpPr txBox="1"/>
+          <p:nvPr/>
+        </p:nvSpPr>
+        <p:spPr>
+          <a:xfrm>
+            <a:off x="2607062" y="4117905"/>
+            <a:ext cx="1313180" cy="246221"/>
+          </a:xfrm>
+          <a:prstGeom prst="rect">
+            <a:avLst/>
+          </a:prstGeom>
+          <a:noFill/>
+          <a:ln>
+            <a:solidFill>
+              <a:schemeClr val="tx1"/>
+            </a:solidFill>
+          </a:ln>
+        </p:spPr>
+        <p:txBody>
+          <a:bodyPr wrap="none" rtlCol="0">
+            <a:spAutoFit/>
+          </a:bodyPr>
+          <a:lstStyle/>
+          <a:p>
+            <a:r>
+              <a:rPr lang="de-DE" sz="1000" b="0" dirty="0" err="1">
+                <a:solidFill>
+                  <a:srgbClr val="267F99"/>
+                </a:solidFill>
+                <a:effectLst/>
+                <a:latin typeface="Consolas" panose="020B0609020204030204" pitchFamily="49" charset="0"/>
+              </a:rPr>
+              <a:t>SwOSDigitalInput</a:t>
+            </a:r>
+            <a:endParaRPr lang="de-DE" sz="1000" b="0" dirty="0">
+              <a:solidFill>
+                <a:srgbClr val="000000"/>
+              </a:solidFill>
+              <a:effectLst/>
+              <a:latin typeface="Consolas" panose="020B0609020204030204" pitchFamily="49" charset="0"/>
+            </a:endParaRPr>
+          </a:p>
+        </p:txBody>
+      </p:sp>
+      <p:cxnSp>
+        <p:nvCxnSpPr>
+          <p:cNvPr id="87" name="Verbinder: gewinkelt 86">
+            <a:extLst>
+              <a:ext uri="{FF2B5EF4-FFF2-40B4-BE49-F238E27FC236}">
+                <a16:creationId xmlns:a16="http://schemas.microsoft.com/office/drawing/2014/main" id="{487E1BBC-68B4-8C49-7F5A-77B9708BF31B}"/>
+              </a:ext>
+            </a:extLst>
+          </p:cNvPr>
+          <p:cNvCxnSpPr>
+            <a:cxnSpLocks/>
+            <a:stCxn id="5" idx="2"/>
+            <a:endCxn id="85" idx="1"/>
+          </p:cNvCxnSpPr>
+          <p:nvPr/>
+        </p:nvCxnSpPr>
+        <p:spPr>
+          <a:xfrm rot="16200000" flipH="1">
+            <a:off x="1188694" y="2822647"/>
+            <a:ext cx="2469991" cy="366745"/>
+          </a:xfrm>
+          <a:prstGeom prst="bentConnector2">
+            <a:avLst/>
+          </a:prstGeom>
+        </p:spPr>
+        <p:style>
+          <a:lnRef idx="1">
+            <a:schemeClr val="accent1"/>
+          </a:lnRef>
+          <a:fillRef idx="0">
+            <a:schemeClr val="accent1"/>
+          </a:fillRef>
+          <a:effectRef idx="0">
+            <a:schemeClr val="accent1"/>
+          </a:effectRef>
+          <a:fontRef idx="minor">
+            <a:schemeClr val="tx1"/>
+          </a:fontRef>
+        </p:style>
+      </p:cxnSp>
+      <p:sp>
+        <p:nvSpPr>
+          <p:cNvPr id="92" name="Textfeld 91">
+            <a:extLst>
+              <a:ext uri="{FF2B5EF4-FFF2-40B4-BE49-F238E27FC236}">
+                <a16:creationId xmlns:a16="http://schemas.microsoft.com/office/drawing/2014/main" id="{741B210A-5836-1B27-FBA1-43C527876FC8}"/>
+              </a:ext>
+            </a:extLst>
+          </p:cNvPr>
+          <p:cNvSpPr txBox="1"/>
+          <p:nvPr/>
+        </p:nvSpPr>
+        <p:spPr>
+          <a:xfrm>
+            <a:off x="5508248" y="1524803"/>
+            <a:ext cx="819455" cy="246221"/>
+          </a:xfrm>
+          <a:prstGeom prst="rect">
+            <a:avLst/>
+          </a:prstGeom>
+          <a:noFill/>
+          <a:ln>
+            <a:solidFill>
+              <a:schemeClr val="tx1"/>
+            </a:solidFill>
+          </a:ln>
+        </p:spPr>
+        <p:txBody>
+          <a:bodyPr wrap="none" rtlCol="0">
+            <a:spAutoFit/>
+          </a:bodyPr>
+          <a:lstStyle>
+            <a:defPPr>
+              <a:defRPr lang="de-DE"/>
+            </a:defPPr>
+            <a:lvl1pPr>
+              <a:defRPr sz="1000" b="0">
+                <a:solidFill>
+                  <a:srgbClr val="267F99"/>
+                </a:solidFill>
+                <a:effectLst/>
+                <a:latin typeface="Consolas" panose="020B0609020204030204" pitchFamily="49" charset="0"/>
+              </a:defRPr>
+            </a:lvl1pPr>
+          </a:lstStyle>
+          <a:p>
+            <a:r>
+              <a:rPr lang="de-DE" dirty="0"/>
+              <a:t>SwOSHC165</a:t>
+            </a:r>
+          </a:p>
+        </p:txBody>
+      </p:sp>
+      <p:cxnSp>
+        <p:nvCxnSpPr>
+          <p:cNvPr id="93" name="Verbinder: gewinkelt 92">
+            <a:extLst>
+              <a:ext uri="{FF2B5EF4-FFF2-40B4-BE49-F238E27FC236}">
+                <a16:creationId xmlns:a16="http://schemas.microsoft.com/office/drawing/2014/main" id="{6E17D6CE-B71B-3A76-0EC6-E8436AD6716B}"/>
+              </a:ext>
+            </a:extLst>
+          </p:cNvPr>
+          <p:cNvCxnSpPr>
+            <a:cxnSpLocks/>
+            <a:stCxn id="4" idx="2"/>
+            <a:endCxn id="92" idx="0"/>
+          </p:cNvCxnSpPr>
+          <p:nvPr/>
+        </p:nvCxnSpPr>
+        <p:spPr>
+          <a:xfrm rot="5400000">
+            <a:off x="5685003" y="1279826"/>
+            <a:ext cx="477951" cy="12003"/>
+          </a:xfrm>
+          <a:prstGeom prst="bentConnector3">
+            <a:avLst>
+              <a:gd name="adj1" fmla="val 50000"/>
+            </a:avLst>
+          </a:prstGeom>
+        </p:spPr>
+        <p:style>
+          <a:lnRef idx="1">
+            <a:schemeClr val="accent1"/>
+          </a:lnRef>
+          <a:fillRef idx="0">
+            <a:schemeClr val="accent1"/>
+          </a:fillRef>
+          <a:effectRef idx="0">
+            <a:schemeClr val="accent1"/>
+          </a:effectRef>
+          <a:fontRef idx="minor">
+            <a:schemeClr val="tx1"/>
+          </a:fontRef>
+        </p:style>
+      </p:cxnSp>
+      <p:sp>
+        <p:nvSpPr>
+          <p:cNvPr id="100" name="Textfeld 99">
+            <a:extLst>
+              <a:ext uri="{FF2B5EF4-FFF2-40B4-BE49-F238E27FC236}">
+                <a16:creationId xmlns:a16="http://schemas.microsoft.com/office/drawing/2014/main" id="{3B76F3FC-E55B-F16D-C486-2CA8FD6B704D}"/>
+              </a:ext>
+            </a:extLst>
+          </p:cNvPr>
+          <p:cNvSpPr txBox="1"/>
+          <p:nvPr/>
+        </p:nvSpPr>
+        <p:spPr>
+          <a:xfrm>
+            <a:off x="7355120" y="1524361"/>
+            <a:ext cx="819455" cy="246221"/>
+          </a:xfrm>
+          <a:prstGeom prst="rect">
+            <a:avLst/>
+          </a:prstGeom>
+          <a:noFill/>
+          <a:ln>
+            <a:solidFill>
+              <a:schemeClr val="tx1"/>
+            </a:solidFill>
+          </a:ln>
+        </p:spPr>
+        <p:txBody>
+          <a:bodyPr wrap="none" rtlCol="0">
+            <a:spAutoFit/>
+          </a:bodyPr>
+          <a:lstStyle/>
+          <a:p>
+            <a:r>
+              <a:rPr lang="de-DE" sz="1000" b="0" dirty="0" err="1">
+                <a:solidFill>
+                  <a:srgbClr val="267F99"/>
+                </a:solidFill>
+                <a:effectLst/>
+                <a:latin typeface="Consolas" panose="020B0609020204030204" pitchFamily="49" charset="0"/>
+              </a:rPr>
+              <a:t>SwOSPixel</a:t>
+            </a:r>
+            <a:endParaRPr lang="de-DE" sz="1000" b="0" dirty="0">
+              <a:solidFill>
+                <a:srgbClr val="000000"/>
+              </a:solidFill>
+              <a:effectLst/>
+              <a:latin typeface="Consolas" panose="020B0609020204030204" pitchFamily="49" charset="0"/>
+            </a:endParaRPr>
+          </a:p>
+        </p:txBody>
+      </p:sp>
+      <p:cxnSp>
+        <p:nvCxnSpPr>
+          <p:cNvPr id="101" name="Verbinder: gewinkelt 100">
+            <a:extLst>
+              <a:ext uri="{FF2B5EF4-FFF2-40B4-BE49-F238E27FC236}">
+                <a16:creationId xmlns:a16="http://schemas.microsoft.com/office/drawing/2014/main" id="{1B5537AE-4DD4-15A4-F734-D645AB01775A}"/>
+              </a:ext>
+            </a:extLst>
+          </p:cNvPr>
+          <p:cNvCxnSpPr>
+            <a:cxnSpLocks/>
+            <a:stCxn id="4" idx="2"/>
+            <a:endCxn id="100" idx="0"/>
+          </p:cNvCxnSpPr>
+          <p:nvPr/>
+        </p:nvCxnSpPr>
+        <p:spPr>
+          <a:xfrm rot="16200000" flipH="1">
+            <a:off x="6608659" y="368171"/>
+            <a:ext cx="477509" cy="1834869"/>
+          </a:xfrm>
+          <a:prstGeom prst="bentConnector3">
+            <a:avLst>
+              <a:gd name="adj1" fmla="val 50000"/>
+            </a:avLst>
+          </a:prstGeom>
+        </p:spPr>
+        <p:style>
+          <a:lnRef idx="1">
+            <a:schemeClr val="accent1"/>
+          </a:lnRef>
+          <a:fillRef idx="0">
+            <a:schemeClr val="accent1"/>
+          </a:fillRef>
+          <a:effectRef idx="0">
+            <a:schemeClr val="accent1"/>
+          </a:effectRef>
+          <a:fontRef idx="minor">
+            <a:schemeClr val="tx1"/>
+          </a:fontRef>
+        </p:style>
+      </p:cxnSp>
+      <p:sp>
+        <p:nvSpPr>
+          <p:cNvPr id="105" name="Textfeld 104">
+            <a:extLst>
+              <a:ext uri="{FF2B5EF4-FFF2-40B4-BE49-F238E27FC236}">
+                <a16:creationId xmlns:a16="http://schemas.microsoft.com/office/drawing/2014/main" id="{6380D24B-F887-881D-CC81-DA36460D52C8}"/>
+              </a:ext>
+            </a:extLst>
+          </p:cNvPr>
+          <p:cNvSpPr txBox="1"/>
+          <p:nvPr/>
+        </p:nvSpPr>
+        <p:spPr>
+          <a:xfrm>
+            <a:off x="8295920" y="1524360"/>
+            <a:ext cx="748923" cy="246221"/>
+          </a:xfrm>
+          <a:prstGeom prst="rect">
+            <a:avLst/>
+          </a:prstGeom>
+          <a:noFill/>
+          <a:ln>
+            <a:solidFill>
+              <a:schemeClr val="tx1"/>
+            </a:solidFill>
+          </a:ln>
+        </p:spPr>
+        <p:txBody>
+          <a:bodyPr wrap="none" rtlCol="0">
+            <a:spAutoFit/>
+          </a:bodyPr>
+          <a:lstStyle/>
+          <a:p>
+            <a:r>
+              <a:rPr lang="de-DE" sz="1000" b="0" dirty="0" err="1">
+                <a:solidFill>
+                  <a:srgbClr val="267F99"/>
+                </a:solidFill>
+                <a:effectLst/>
+                <a:latin typeface="Consolas" panose="020B0609020204030204" pitchFamily="49" charset="0"/>
+              </a:rPr>
+              <a:t>SwOSOLED</a:t>
+            </a:r>
+            <a:endParaRPr lang="de-DE" sz="1000" b="0" dirty="0">
+              <a:solidFill>
+                <a:srgbClr val="000000"/>
+              </a:solidFill>
+              <a:effectLst/>
+              <a:latin typeface="Consolas" panose="020B0609020204030204" pitchFamily="49" charset="0"/>
+            </a:endParaRPr>
+          </a:p>
+        </p:txBody>
+      </p:sp>
+      <p:cxnSp>
+        <p:nvCxnSpPr>
+          <p:cNvPr id="106" name="Verbinder: gewinkelt 105">
+            <a:extLst>
+              <a:ext uri="{FF2B5EF4-FFF2-40B4-BE49-F238E27FC236}">
+                <a16:creationId xmlns:a16="http://schemas.microsoft.com/office/drawing/2014/main" id="{ED22EB2B-D0D7-F069-951F-DF6390EBF78E}"/>
+              </a:ext>
+            </a:extLst>
+          </p:cNvPr>
+          <p:cNvCxnSpPr>
+            <a:cxnSpLocks/>
+            <a:stCxn id="4" idx="2"/>
+            <a:endCxn id="105" idx="0"/>
+          </p:cNvCxnSpPr>
+          <p:nvPr/>
+        </p:nvCxnSpPr>
+        <p:spPr>
+          <a:xfrm rot="16200000" flipH="1">
+            <a:off x="7061426" y="-84596"/>
+            <a:ext cx="477508" cy="2740403"/>
+          </a:xfrm>
+          <a:prstGeom prst="bentConnector3">
+            <a:avLst>
+              <a:gd name="adj1" fmla="val 50000"/>
+            </a:avLst>
+          </a:prstGeom>
+        </p:spPr>
+        <p:style>
+          <a:lnRef idx="1">
+            <a:schemeClr val="accent1"/>
+          </a:lnRef>
+          <a:fillRef idx="0">
+            <a:schemeClr val="accent1"/>
+          </a:fillRef>
+          <a:effectRef idx="0">
+            <a:schemeClr val="accent1"/>
+          </a:effectRef>
+          <a:fontRef idx="minor">
+            <a:schemeClr val="tx1"/>
+          </a:fontRef>
+        </p:style>
+      </p:cxnSp>
+      <p:sp>
+        <p:nvSpPr>
+          <p:cNvPr id="143" name="Textfeld 142">
+            <a:extLst>
+              <a:ext uri="{FF2B5EF4-FFF2-40B4-BE49-F238E27FC236}">
+                <a16:creationId xmlns:a16="http://schemas.microsoft.com/office/drawing/2014/main" id="{51511B42-2A94-6B8E-28A1-803CEE859064}"/>
+              </a:ext>
+            </a:extLst>
+          </p:cNvPr>
+          <p:cNvSpPr txBox="1"/>
+          <p:nvPr/>
+        </p:nvSpPr>
+        <p:spPr>
+          <a:xfrm>
+            <a:off x="9147869" y="1524273"/>
+            <a:ext cx="748923" cy="246221"/>
+          </a:xfrm>
+          <a:prstGeom prst="rect">
+            <a:avLst/>
+          </a:prstGeom>
+          <a:noFill/>
+          <a:ln>
+            <a:solidFill>
+              <a:schemeClr val="tx1"/>
+            </a:solidFill>
+          </a:ln>
+        </p:spPr>
+        <p:txBody>
+          <a:bodyPr wrap="none" rtlCol="0">
+            <a:spAutoFit/>
+          </a:bodyPr>
+          <a:lstStyle/>
+          <a:p>
+            <a:r>
+              <a:rPr lang="de-DE" sz="1000" b="0" dirty="0" err="1">
+                <a:solidFill>
+                  <a:srgbClr val="267F99"/>
+                </a:solidFill>
+                <a:effectLst/>
+                <a:latin typeface="Consolas" panose="020B0609020204030204" pitchFamily="49" charset="0"/>
+              </a:rPr>
+              <a:t>SwOSGyro</a:t>
+            </a:r>
+            <a:endParaRPr lang="de-DE" sz="1000" b="0" dirty="0">
+              <a:solidFill>
+                <a:srgbClr val="000000"/>
+              </a:solidFill>
+              <a:effectLst/>
+              <a:latin typeface="Consolas" panose="020B0609020204030204" pitchFamily="49" charset="0"/>
+            </a:endParaRPr>
+          </a:p>
+        </p:txBody>
+      </p:sp>
+      <p:cxnSp>
+        <p:nvCxnSpPr>
+          <p:cNvPr id="144" name="Verbinder: gewinkelt 143">
+            <a:extLst>
+              <a:ext uri="{FF2B5EF4-FFF2-40B4-BE49-F238E27FC236}">
+                <a16:creationId xmlns:a16="http://schemas.microsoft.com/office/drawing/2014/main" id="{DD99F74C-57CC-D871-6ACA-0335A8A8C883}"/>
+              </a:ext>
+            </a:extLst>
+          </p:cNvPr>
+          <p:cNvCxnSpPr>
+            <a:cxnSpLocks/>
+            <a:stCxn id="4" idx="2"/>
+            <a:endCxn id="143" idx="0"/>
+          </p:cNvCxnSpPr>
+          <p:nvPr/>
+        </p:nvCxnSpPr>
+        <p:spPr>
+          <a:xfrm rot="16200000" flipH="1">
+            <a:off x="7487445" y="-510614"/>
+            <a:ext cx="477421" cy="3592352"/>
+          </a:xfrm>
+          <a:prstGeom prst="bentConnector3">
+            <a:avLst>
+              <a:gd name="adj1" fmla="val 50000"/>
+            </a:avLst>
+          </a:prstGeom>
+        </p:spPr>
+        <p:style>
+          <a:lnRef idx="1">
+            <a:schemeClr val="accent1"/>
+          </a:lnRef>
+          <a:fillRef idx="0">
+            <a:schemeClr val="accent1"/>
+          </a:fillRef>
+          <a:effectRef idx="0">
+            <a:schemeClr val="accent1"/>
+          </a:effectRef>
+          <a:fontRef idx="minor">
+            <a:schemeClr val="tx1"/>
+          </a:fontRef>
+        </p:style>
+      </p:cxnSp>
+      <p:sp>
+        <p:nvSpPr>
+          <p:cNvPr id="147" name="Textfeld 146">
+            <a:extLst>
+              <a:ext uri="{FF2B5EF4-FFF2-40B4-BE49-F238E27FC236}">
+                <a16:creationId xmlns:a16="http://schemas.microsoft.com/office/drawing/2014/main" id="{9693E8AF-21E9-439E-8ADF-B388A9C4E6F7}"/>
+              </a:ext>
+            </a:extLst>
+          </p:cNvPr>
+          <p:cNvSpPr txBox="1"/>
+          <p:nvPr/>
+        </p:nvSpPr>
+        <p:spPr>
+          <a:xfrm>
+            <a:off x="8564117" y="2224500"/>
+            <a:ext cx="960519" cy="246221"/>
+          </a:xfrm>
+          <a:prstGeom prst="rect">
+            <a:avLst/>
+          </a:prstGeom>
+          <a:noFill/>
+          <a:ln>
+            <a:solidFill>
+              <a:schemeClr val="tx1"/>
+            </a:solidFill>
+          </a:ln>
+        </p:spPr>
+        <p:txBody>
+          <a:bodyPr wrap="none" rtlCol="0">
+            <a:spAutoFit/>
+          </a:bodyPr>
+          <a:lstStyle/>
+          <a:p>
+            <a:r>
+              <a:rPr lang="de-DE" sz="1000" b="0" dirty="0" err="1">
+                <a:solidFill>
+                  <a:srgbClr val="267F99"/>
+                </a:solidFill>
+                <a:effectLst/>
+                <a:latin typeface="Consolas" panose="020B0609020204030204" pitchFamily="49" charset="0"/>
+              </a:rPr>
+              <a:t>SwOSGyroLSM</a:t>
+            </a:r>
+            <a:endParaRPr lang="de-DE" sz="1000" b="0" dirty="0">
+              <a:solidFill>
+                <a:srgbClr val="000000"/>
+              </a:solidFill>
+              <a:effectLst/>
+              <a:latin typeface="Consolas" panose="020B0609020204030204" pitchFamily="49" charset="0"/>
+            </a:endParaRPr>
+          </a:p>
+        </p:txBody>
+      </p:sp>
+      <p:sp>
+        <p:nvSpPr>
+          <p:cNvPr id="148" name="Textfeld 147">
+            <a:extLst>
+              <a:ext uri="{FF2B5EF4-FFF2-40B4-BE49-F238E27FC236}">
+                <a16:creationId xmlns:a16="http://schemas.microsoft.com/office/drawing/2014/main" id="{213A0FA9-0B36-68D2-F70F-484D9ED99459}"/>
+              </a:ext>
+            </a:extLst>
+          </p:cNvPr>
+          <p:cNvSpPr txBox="1"/>
+          <p:nvPr/>
+        </p:nvSpPr>
+        <p:spPr>
+          <a:xfrm>
+            <a:off x="9648633" y="2224500"/>
+            <a:ext cx="960519" cy="246221"/>
+          </a:xfrm>
+          <a:prstGeom prst="rect">
+            <a:avLst/>
+          </a:prstGeom>
+          <a:noFill/>
+          <a:ln>
+            <a:solidFill>
+              <a:schemeClr val="tx1"/>
+            </a:solidFill>
+          </a:ln>
+        </p:spPr>
+        <p:txBody>
+          <a:bodyPr wrap="none" rtlCol="0">
+            <a:spAutoFit/>
+          </a:bodyPr>
+          <a:lstStyle/>
+          <a:p>
+            <a:r>
+              <a:rPr lang="de-DE" sz="1000" b="0" dirty="0" err="1">
+                <a:solidFill>
+                  <a:srgbClr val="267F99"/>
+                </a:solidFill>
+                <a:effectLst/>
+                <a:latin typeface="Consolas" panose="020B0609020204030204" pitchFamily="49" charset="0"/>
+              </a:rPr>
+              <a:t>SwOSGyroMPU</a:t>
+            </a:r>
+            <a:endParaRPr lang="de-DE" sz="1000" b="0" dirty="0">
+              <a:solidFill>
+                <a:srgbClr val="000000"/>
+              </a:solidFill>
+              <a:effectLst/>
+              <a:latin typeface="Consolas" panose="020B0609020204030204" pitchFamily="49" charset="0"/>
+            </a:endParaRPr>
+          </a:p>
+        </p:txBody>
+      </p:sp>
+      <p:cxnSp>
+        <p:nvCxnSpPr>
+          <p:cNvPr id="149" name="Verbinder: gewinkelt 148">
+            <a:extLst>
+              <a:ext uri="{FF2B5EF4-FFF2-40B4-BE49-F238E27FC236}">
+                <a16:creationId xmlns:a16="http://schemas.microsoft.com/office/drawing/2014/main" id="{D0C01716-747C-A2A9-EDFE-4B9369BBFE29}"/>
+              </a:ext>
+            </a:extLst>
+          </p:cNvPr>
+          <p:cNvCxnSpPr>
+            <a:cxnSpLocks/>
+            <a:stCxn id="143" idx="2"/>
+            <a:endCxn id="147" idx="0"/>
+          </p:cNvCxnSpPr>
+          <p:nvPr/>
+        </p:nvCxnSpPr>
+        <p:spPr>
+          <a:xfrm rot="5400000">
+            <a:off x="9056351" y="1758520"/>
+            <a:ext cx="454006" cy="477954"/>
+          </a:xfrm>
+          <a:prstGeom prst="bentConnector3">
+            <a:avLst>
+              <a:gd name="adj1" fmla="val 50000"/>
+            </a:avLst>
+          </a:prstGeom>
+        </p:spPr>
+        <p:style>
+          <a:lnRef idx="1">
+            <a:schemeClr val="accent1"/>
+          </a:lnRef>
+          <a:fillRef idx="0">
+            <a:schemeClr val="accent1"/>
+          </a:fillRef>
+          <a:effectRef idx="0">
+            <a:schemeClr val="accent1"/>
+          </a:effectRef>
+          <a:fontRef idx="minor">
+            <a:schemeClr val="tx1"/>
+          </a:fontRef>
+        </p:style>
+      </p:cxnSp>
+      <p:cxnSp>
+        <p:nvCxnSpPr>
+          <p:cNvPr id="152" name="Verbinder: gewinkelt 151">
+            <a:extLst>
+              <a:ext uri="{FF2B5EF4-FFF2-40B4-BE49-F238E27FC236}">
+                <a16:creationId xmlns:a16="http://schemas.microsoft.com/office/drawing/2014/main" id="{BF434D70-9429-F134-6635-ECBE43D30ECD}"/>
+              </a:ext>
+            </a:extLst>
+          </p:cNvPr>
+          <p:cNvCxnSpPr>
+            <a:cxnSpLocks/>
+            <a:stCxn id="143" idx="2"/>
+            <a:endCxn id="148" idx="0"/>
+          </p:cNvCxnSpPr>
+          <p:nvPr/>
+        </p:nvCxnSpPr>
+        <p:spPr>
+          <a:xfrm rot="16200000" flipH="1">
+            <a:off x="9598609" y="1694216"/>
+            <a:ext cx="454006" cy="606562"/>
+          </a:xfrm>
+          <a:prstGeom prst="bentConnector3">
+            <a:avLst>
+              <a:gd name="adj1" fmla="val 50000"/>
+            </a:avLst>
+          </a:prstGeom>
+        </p:spPr>
+        <p:style>
+          <a:lnRef idx="1">
+            <a:schemeClr val="accent1"/>
+          </a:lnRef>
+          <a:fillRef idx="0">
+            <a:schemeClr val="accent1"/>
+          </a:fillRef>
+          <a:effectRef idx="0">
+            <a:schemeClr val="accent1"/>
+          </a:effectRef>
+          <a:fontRef idx="minor">
+            <a:schemeClr val="tx1"/>
+          </a:fontRef>
+        </p:style>
+      </p:cxnSp>
+      <p:sp>
+        <p:nvSpPr>
+          <p:cNvPr id="155" name="Textfeld 154">
+            <a:extLst>
+              <a:ext uri="{FF2B5EF4-FFF2-40B4-BE49-F238E27FC236}">
+                <a16:creationId xmlns:a16="http://schemas.microsoft.com/office/drawing/2014/main" id="{300738C6-0569-5AA2-A7F2-02F3B7C5CDEE}"/>
+              </a:ext>
+            </a:extLst>
+          </p:cNvPr>
+          <p:cNvSpPr txBox="1"/>
+          <p:nvPr/>
+        </p:nvSpPr>
+        <p:spPr>
+          <a:xfrm>
+            <a:off x="554961" y="3013389"/>
+            <a:ext cx="1440000" cy="246221"/>
+          </a:xfrm>
+          <a:prstGeom prst="rect">
+            <a:avLst/>
+          </a:prstGeom>
+          <a:noFill/>
+          <a:ln>
+            <a:solidFill>
+              <a:schemeClr val="tx1"/>
+            </a:solidFill>
+          </a:ln>
+        </p:spPr>
+        <p:txBody>
+          <a:bodyPr wrap="none" rtlCol="0">
+            <a:spAutoFit/>
+          </a:bodyPr>
+          <a:lstStyle/>
+          <a:p>
+            <a:r>
+              <a:rPr lang="de-DE" sz="1000" b="0" dirty="0" err="1">
+                <a:solidFill>
+                  <a:srgbClr val="267F99"/>
+                </a:solidFill>
+                <a:effectLst/>
+                <a:latin typeface="Consolas" panose="020B0609020204030204" pitchFamily="49" charset="0"/>
+              </a:rPr>
+              <a:t>SwOSLidarInput</a:t>
+            </a:r>
+            <a:endParaRPr lang="de-DE" sz="1000" b="0" dirty="0">
+              <a:solidFill>
+                <a:srgbClr val="000000"/>
+              </a:solidFill>
+              <a:effectLst/>
+              <a:latin typeface="Consolas" panose="020B0609020204030204" pitchFamily="49" charset="0"/>
+            </a:endParaRPr>
+          </a:p>
+        </p:txBody>
+      </p:sp>
+      <p:cxnSp>
+        <p:nvCxnSpPr>
+          <p:cNvPr id="156" name="Verbinder: gewinkelt 155">
+            <a:extLst>
+              <a:ext uri="{FF2B5EF4-FFF2-40B4-BE49-F238E27FC236}">
+                <a16:creationId xmlns:a16="http://schemas.microsoft.com/office/drawing/2014/main" id="{AD0C716E-36F7-AEDF-096A-F062E46EB510}"/>
+              </a:ext>
+            </a:extLst>
+          </p:cNvPr>
+          <p:cNvCxnSpPr>
+            <a:cxnSpLocks/>
+            <a:stCxn id="5" idx="2"/>
+            <a:endCxn id="155" idx="3"/>
+          </p:cNvCxnSpPr>
+          <p:nvPr/>
+        </p:nvCxnSpPr>
+        <p:spPr>
+          <a:xfrm rot="5400000">
+            <a:off x="1434902" y="2331084"/>
+            <a:ext cx="1365475" cy="245356"/>
+          </a:xfrm>
+          <a:prstGeom prst="bentConnector2">
+            <a:avLst/>
+          </a:prstGeom>
+        </p:spPr>
+        <p:style>
+          <a:lnRef idx="1">
+            <a:schemeClr val="accent1"/>
+          </a:lnRef>
+          <a:fillRef idx="0">
+            <a:schemeClr val="accent1"/>
+          </a:fillRef>
+          <a:effectRef idx="0">
+            <a:schemeClr val="accent1"/>
+          </a:effectRef>
+          <a:fontRef idx="minor">
+            <a:schemeClr val="tx1"/>
+          </a:fontRef>
+        </p:style>
+      </p:cxnSp>
+      <p:sp>
+        <p:nvSpPr>
+          <p:cNvPr id="159" name="Textfeld 158">
+            <a:extLst>
+              <a:ext uri="{FF2B5EF4-FFF2-40B4-BE49-F238E27FC236}">
+                <a16:creationId xmlns:a16="http://schemas.microsoft.com/office/drawing/2014/main" id="{126CB3DB-5205-5758-CFC0-AB8578F62505}"/>
+              </a:ext>
+            </a:extLst>
+          </p:cNvPr>
+          <p:cNvSpPr txBox="1"/>
+          <p:nvPr/>
+        </p:nvSpPr>
+        <p:spPr>
+          <a:xfrm>
+            <a:off x="10083547" y="1524272"/>
+            <a:ext cx="678391" cy="246221"/>
+          </a:xfrm>
+          <a:prstGeom prst="rect">
+            <a:avLst/>
+          </a:prstGeom>
+          <a:noFill/>
+          <a:ln>
+            <a:solidFill>
+              <a:schemeClr val="tx1"/>
+            </a:solidFill>
+          </a:ln>
+        </p:spPr>
+        <p:txBody>
+          <a:bodyPr wrap="none" rtlCol="0">
+            <a:spAutoFit/>
+          </a:bodyPr>
+          <a:lstStyle/>
+          <a:p>
+            <a:r>
+              <a:rPr lang="de-DE" sz="1000" b="0" dirty="0">
+                <a:solidFill>
+                  <a:srgbClr val="267F99"/>
+                </a:solidFill>
+                <a:effectLst/>
+                <a:latin typeface="Consolas" panose="020B0609020204030204" pitchFamily="49" charset="0"/>
+              </a:rPr>
+              <a:t>SwOSI2C</a:t>
+            </a:r>
+            <a:endParaRPr lang="de-DE" sz="1000" b="0" dirty="0">
+              <a:solidFill>
+                <a:srgbClr val="000000"/>
+              </a:solidFill>
+              <a:effectLst/>
+              <a:latin typeface="Consolas" panose="020B0609020204030204" pitchFamily="49" charset="0"/>
+            </a:endParaRPr>
+          </a:p>
+        </p:txBody>
+      </p:sp>
+      <p:cxnSp>
+        <p:nvCxnSpPr>
+          <p:cNvPr id="160" name="Verbinder: gewinkelt 159">
+            <a:extLst>
+              <a:ext uri="{FF2B5EF4-FFF2-40B4-BE49-F238E27FC236}">
+                <a16:creationId xmlns:a16="http://schemas.microsoft.com/office/drawing/2014/main" id="{DC950A8C-2BB0-1CD3-67CF-49D7CF2299A5}"/>
+              </a:ext>
+            </a:extLst>
+          </p:cNvPr>
+          <p:cNvCxnSpPr>
+            <a:cxnSpLocks/>
+            <a:stCxn id="4" idx="2"/>
+            <a:endCxn id="159" idx="0"/>
+          </p:cNvCxnSpPr>
+          <p:nvPr/>
+        </p:nvCxnSpPr>
+        <p:spPr>
+          <a:xfrm rot="16200000" flipH="1">
+            <a:off x="7937651" y="-960820"/>
+            <a:ext cx="477420" cy="4492764"/>
+          </a:xfrm>
+          <a:prstGeom prst="bentConnector3">
+            <a:avLst>
+              <a:gd name="adj1" fmla="val 50000"/>
+            </a:avLst>
+          </a:prstGeom>
+        </p:spPr>
+        <p:style>
+          <a:lnRef idx="1">
+            <a:schemeClr val="accent1"/>
+          </a:lnRef>
+          <a:fillRef idx="0">
+            <a:schemeClr val="accent1"/>
+          </a:fillRef>
+          <a:effectRef idx="0">
+            <a:schemeClr val="accent1"/>
+          </a:effectRef>
+          <a:fontRef idx="minor">
+            <a:schemeClr val="tx1"/>
+          </a:fontRef>
+        </p:style>
+      </p:cxnSp>
+      <p:cxnSp>
+        <p:nvCxnSpPr>
+          <p:cNvPr id="170" name="Verbinder: gewinkelt 169">
+            <a:extLst>
+              <a:ext uri="{FF2B5EF4-FFF2-40B4-BE49-F238E27FC236}">
+                <a16:creationId xmlns:a16="http://schemas.microsoft.com/office/drawing/2014/main" id="{A574DCAC-5CEA-6D9A-3EB1-53B767F50880}"/>
+              </a:ext>
+            </a:extLst>
+          </p:cNvPr>
+          <p:cNvCxnSpPr>
+            <a:cxnSpLocks/>
+            <a:stCxn id="85" idx="2"/>
+            <a:endCxn id="172" idx="1"/>
+          </p:cNvCxnSpPr>
+          <p:nvPr/>
+        </p:nvCxnSpPr>
+        <p:spPr>
+          <a:xfrm rot="16200000" flipH="1">
+            <a:off x="3322313" y="4305465"/>
+            <a:ext cx="165775" cy="283096"/>
+          </a:xfrm>
+          <a:prstGeom prst="bentConnector2">
+            <a:avLst/>
+          </a:prstGeom>
+          <a:ln>
+            <a:solidFill>
+              <a:srgbClr val="FF0000"/>
+            </a:solidFill>
+          </a:ln>
+        </p:spPr>
+        <p:style>
+          <a:lnRef idx="1">
+            <a:schemeClr val="accent1"/>
+          </a:lnRef>
+          <a:fillRef idx="0">
+            <a:schemeClr val="accent1"/>
+          </a:fillRef>
+          <a:effectRef idx="0">
+            <a:schemeClr val="accent1"/>
+          </a:effectRef>
+          <a:fontRef idx="minor">
+            <a:schemeClr val="tx1"/>
+          </a:fontRef>
+        </p:style>
+      </p:cxnSp>
+      <p:sp>
+        <p:nvSpPr>
+          <p:cNvPr id="172" name="Textfeld 171">
+            <a:extLst>
+              <a:ext uri="{FF2B5EF4-FFF2-40B4-BE49-F238E27FC236}">
+                <a16:creationId xmlns:a16="http://schemas.microsoft.com/office/drawing/2014/main" id="{2D3CE0BD-E8B2-12B2-995B-B6283F047917}"/>
+              </a:ext>
+            </a:extLst>
+          </p:cNvPr>
+          <p:cNvSpPr txBox="1"/>
+          <p:nvPr/>
+        </p:nvSpPr>
+        <p:spPr>
+          <a:xfrm>
+            <a:off x="3546748" y="4399929"/>
+            <a:ext cx="1241475" cy="259943"/>
+          </a:xfrm>
+          <a:prstGeom prst="rect">
+            <a:avLst/>
+          </a:prstGeom>
+          <a:noFill/>
+        </p:spPr>
+        <p:txBody>
+          <a:bodyPr wrap="square">
+            <a:spAutoFit/>
+          </a:bodyPr>
+          <a:lstStyle/>
+          <a:p>
+            <a:pPr>
+              <a:lnSpc>
+                <a:spcPts val="1425"/>
+              </a:lnSpc>
+            </a:pPr>
+            <a:r>
+              <a:rPr lang="de-DE" sz="1000" b="0" dirty="0">
+                <a:solidFill>
+                  <a:srgbClr val="FF0000"/>
+                </a:solidFill>
+                <a:effectLst/>
+                <a:latin typeface="Consolas" panose="020B0609020204030204" pitchFamily="49" charset="0"/>
+              </a:rPr>
+              <a:t>SWOSIO_DIGITAL</a:t>
+            </a:r>
+          </a:p>
+        </p:txBody>
+      </p:sp>
+      <p:cxnSp>
+        <p:nvCxnSpPr>
+          <p:cNvPr id="174" name="Verbinder: gewinkelt 173">
+            <a:extLst>
+              <a:ext uri="{FF2B5EF4-FFF2-40B4-BE49-F238E27FC236}">
+                <a16:creationId xmlns:a16="http://schemas.microsoft.com/office/drawing/2014/main" id="{8A1A3919-0871-1D11-D85B-9FEBF6F3C696}"/>
+              </a:ext>
+            </a:extLst>
+          </p:cNvPr>
+          <p:cNvCxnSpPr>
+            <a:cxnSpLocks/>
+            <a:stCxn id="85" idx="2"/>
+            <a:endCxn id="177" idx="1"/>
+          </p:cNvCxnSpPr>
+          <p:nvPr/>
+        </p:nvCxnSpPr>
+        <p:spPr>
+          <a:xfrm rot="16200000" flipH="1">
+            <a:off x="3214020" y="4413758"/>
+            <a:ext cx="382361" cy="283096"/>
+          </a:xfrm>
+          <a:prstGeom prst="bentConnector2">
+            <a:avLst/>
+          </a:prstGeom>
+          <a:ln>
+            <a:solidFill>
+              <a:srgbClr val="FF0000"/>
+            </a:solidFill>
+          </a:ln>
+        </p:spPr>
+        <p:style>
+          <a:lnRef idx="1">
+            <a:schemeClr val="accent1"/>
+          </a:lnRef>
+          <a:fillRef idx="0">
+            <a:schemeClr val="accent1"/>
+          </a:fillRef>
+          <a:effectRef idx="0">
+            <a:schemeClr val="accent1"/>
+          </a:effectRef>
+          <a:fontRef idx="minor">
+            <a:schemeClr val="tx1"/>
+          </a:fontRef>
+        </p:style>
+      </p:cxnSp>
+      <p:sp>
+        <p:nvSpPr>
+          <p:cNvPr id="177" name="Textfeld 176">
+            <a:extLst>
+              <a:ext uri="{FF2B5EF4-FFF2-40B4-BE49-F238E27FC236}">
+                <a16:creationId xmlns:a16="http://schemas.microsoft.com/office/drawing/2014/main" id="{7B6F9EA8-DA81-37A7-F4EE-C9DEEB50B1C4}"/>
+              </a:ext>
+            </a:extLst>
+          </p:cNvPr>
+          <p:cNvSpPr txBox="1"/>
+          <p:nvPr/>
+        </p:nvSpPr>
+        <p:spPr>
+          <a:xfrm>
+            <a:off x="3546748" y="4616515"/>
+            <a:ext cx="1241475" cy="259943"/>
+          </a:xfrm>
+          <a:prstGeom prst="rect">
+            <a:avLst/>
+          </a:prstGeom>
+          <a:noFill/>
+        </p:spPr>
+        <p:txBody>
+          <a:bodyPr wrap="square">
+            <a:spAutoFit/>
+          </a:bodyPr>
+          <a:lstStyle/>
+          <a:p>
+            <a:pPr>
+              <a:lnSpc>
+                <a:spcPts val="1425"/>
+              </a:lnSpc>
+            </a:pPr>
+            <a:r>
+              <a:rPr lang="de-DE" sz="1000" b="0" dirty="0">
+                <a:solidFill>
+                  <a:srgbClr val="FF0000"/>
+                </a:solidFill>
+                <a:effectLst/>
+                <a:latin typeface="Consolas" panose="020B0609020204030204" pitchFamily="49" charset="0"/>
+              </a:rPr>
+              <a:t>SWOSIO_SWITCH</a:t>
+            </a:r>
+          </a:p>
+        </p:txBody>
+      </p:sp>
+      <p:sp>
+        <p:nvSpPr>
+          <p:cNvPr id="181" name="Textfeld 180">
+            <a:extLst>
+              <a:ext uri="{FF2B5EF4-FFF2-40B4-BE49-F238E27FC236}">
+                <a16:creationId xmlns:a16="http://schemas.microsoft.com/office/drawing/2014/main" id="{13DC6E2F-41CE-ABC1-4483-80263FF7156B}"/>
+              </a:ext>
+            </a:extLst>
+          </p:cNvPr>
+          <p:cNvSpPr txBox="1"/>
+          <p:nvPr/>
+        </p:nvSpPr>
+        <p:spPr>
+          <a:xfrm>
+            <a:off x="3546748" y="4833200"/>
+            <a:ext cx="1461146" cy="259943"/>
+          </a:xfrm>
+          <a:prstGeom prst="rect">
+            <a:avLst/>
+          </a:prstGeom>
+          <a:noFill/>
+        </p:spPr>
+        <p:txBody>
+          <a:bodyPr wrap="square">
+            <a:spAutoFit/>
+          </a:bodyPr>
+          <a:lstStyle/>
+          <a:p>
+            <a:pPr>
+              <a:lnSpc>
+                <a:spcPts val="1425"/>
+              </a:lnSpc>
+            </a:pPr>
+            <a:r>
+              <a:rPr lang="de-DE" sz="1000" b="0" dirty="0">
+                <a:solidFill>
+                  <a:srgbClr val="FF0000"/>
+                </a:solidFill>
+                <a:effectLst/>
+                <a:latin typeface="Consolas" panose="020B0609020204030204" pitchFamily="49" charset="0"/>
+              </a:rPr>
+              <a:t>SWOSIO_REEDSWITCH</a:t>
+            </a:r>
+          </a:p>
+        </p:txBody>
+      </p:sp>
+      <p:cxnSp>
+        <p:nvCxnSpPr>
+          <p:cNvPr id="182" name="Verbinder: gewinkelt 181">
+            <a:extLst>
+              <a:ext uri="{FF2B5EF4-FFF2-40B4-BE49-F238E27FC236}">
+                <a16:creationId xmlns:a16="http://schemas.microsoft.com/office/drawing/2014/main" id="{9F544878-E632-3153-DA15-3D473925AE80}"/>
+              </a:ext>
+            </a:extLst>
+          </p:cNvPr>
+          <p:cNvCxnSpPr>
+            <a:cxnSpLocks/>
+            <a:stCxn id="85" idx="2"/>
+            <a:endCxn id="181" idx="1"/>
+          </p:cNvCxnSpPr>
+          <p:nvPr/>
+        </p:nvCxnSpPr>
+        <p:spPr>
+          <a:xfrm rot="16200000" flipH="1">
+            <a:off x="3105677" y="4522101"/>
+            <a:ext cx="599046" cy="283096"/>
+          </a:xfrm>
+          <a:prstGeom prst="bentConnector2">
+            <a:avLst/>
+          </a:prstGeom>
+          <a:ln>
+            <a:solidFill>
+              <a:srgbClr val="FF0000"/>
+            </a:solidFill>
+          </a:ln>
+        </p:spPr>
+        <p:style>
+          <a:lnRef idx="1">
+            <a:schemeClr val="accent1"/>
+          </a:lnRef>
+          <a:fillRef idx="0">
+            <a:schemeClr val="accent1"/>
+          </a:fillRef>
+          <a:effectRef idx="0">
+            <a:schemeClr val="accent1"/>
+          </a:effectRef>
+          <a:fontRef idx="minor">
+            <a:schemeClr val="tx1"/>
+          </a:fontRef>
+        </p:style>
+      </p:cxnSp>
+      <p:sp>
+        <p:nvSpPr>
+          <p:cNvPr id="189" name="Textfeld 188">
+            <a:extLst>
+              <a:ext uri="{FF2B5EF4-FFF2-40B4-BE49-F238E27FC236}">
+                <a16:creationId xmlns:a16="http://schemas.microsoft.com/office/drawing/2014/main" id="{7CB5C6B4-C1C9-B100-4B33-F545868B0DF4}"/>
+              </a:ext>
+            </a:extLst>
+          </p:cNvPr>
+          <p:cNvSpPr txBox="1"/>
+          <p:nvPr/>
+        </p:nvSpPr>
+        <p:spPr>
+          <a:xfrm>
+            <a:off x="3546747" y="5049786"/>
+            <a:ext cx="1614969" cy="259943"/>
+          </a:xfrm>
+          <a:prstGeom prst="rect">
+            <a:avLst/>
+          </a:prstGeom>
+          <a:noFill/>
+        </p:spPr>
+        <p:txBody>
+          <a:bodyPr wrap="square">
+            <a:spAutoFit/>
+          </a:bodyPr>
+          <a:lstStyle/>
+          <a:p>
+            <a:pPr>
+              <a:lnSpc>
+                <a:spcPts val="1425"/>
+              </a:lnSpc>
+            </a:pPr>
+            <a:r>
+              <a:rPr lang="de-DE" sz="1000" b="0" dirty="0">
+                <a:solidFill>
+                  <a:srgbClr val="FF0000"/>
+                </a:solidFill>
+                <a:effectLst/>
+                <a:latin typeface="Consolas" panose="020B0609020204030204" pitchFamily="49" charset="0"/>
+              </a:rPr>
+              <a:t>SWOSIO_LIGHTBARRIER</a:t>
+            </a:r>
+          </a:p>
+        </p:txBody>
+      </p:sp>
+      <p:cxnSp>
+        <p:nvCxnSpPr>
+          <p:cNvPr id="190" name="Verbinder: gewinkelt 189">
+            <a:extLst>
+              <a:ext uri="{FF2B5EF4-FFF2-40B4-BE49-F238E27FC236}">
+                <a16:creationId xmlns:a16="http://schemas.microsoft.com/office/drawing/2014/main" id="{C66149E0-7BA6-956A-F4F7-BDA7AD1D7450}"/>
+              </a:ext>
+            </a:extLst>
+          </p:cNvPr>
+          <p:cNvCxnSpPr>
+            <a:cxnSpLocks/>
+            <a:stCxn id="85" idx="2"/>
+            <a:endCxn id="189" idx="1"/>
+          </p:cNvCxnSpPr>
+          <p:nvPr/>
+        </p:nvCxnSpPr>
+        <p:spPr>
+          <a:xfrm rot="16200000" flipH="1">
+            <a:off x="2997383" y="4630394"/>
+            <a:ext cx="815632" cy="283095"/>
+          </a:xfrm>
+          <a:prstGeom prst="bentConnector2">
+            <a:avLst/>
+          </a:prstGeom>
+          <a:ln>
+            <a:solidFill>
+              <a:srgbClr val="FF0000"/>
+            </a:solidFill>
+          </a:ln>
+        </p:spPr>
+        <p:style>
+          <a:lnRef idx="1">
+            <a:schemeClr val="accent1"/>
+          </a:lnRef>
+          <a:fillRef idx="0">
+            <a:schemeClr val="accent1"/>
+          </a:fillRef>
+          <a:effectRef idx="0">
+            <a:schemeClr val="accent1"/>
+          </a:effectRef>
+          <a:fontRef idx="minor">
+            <a:schemeClr val="tx1"/>
+          </a:fontRef>
+        </p:style>
+      </p:cxnSp>
+      <p:sp>
+        <p:nvSpPr>
+          <p:cNvPr id="193" name="Textfeld 192">
+            <a:extLst>
+              <a:ext uri="{FF2B5EF4-FFF2-40B4-BE49-F238E27FC236}">
+                <a16:creationId xmlns:a16="http://schemas.microsoft.com/office/drawing/2014/main" id="{3098F9FF-24C3-E289-381E-DDACDAF6DE22}"/>
+              </a:ext>
+            </a:extLst>
+          </p:cNvPr>
+          <p:cNvSpPr txBox="1"/>
+          <p:nvPr/>
+        </p:nvSpPr>
+        <p:spPr>
+          <a:xfrm>
+            <a:off x="3546746" y="5266372"/>
+            <a:ext cx="1614969" cy="259943"/>
+          </a:xfrm>
+          <a:prstGeom prst="rect">
+            <a:avLst/>
+          </a:prstGeom>
+          <a:noFill/>
+        </p:spPr>
+        <p:txBody>
+          <a:bodyPr wrap="square">
+            <a:spAutoFit/>
+          </a:bodyPr>
+          <a:lstStyle/>
+          <a:p>
+            <a:pPr>
+              <a:lnSpc>
+                <a:spcPts val="1425"/>
+              </a:lnSpc>
+            </a:pPr>
+            <a:r>
+              <a:rPr lang="de-DE" sz="1000" b="0" dirty="0">
+                <a:solidFill>
+                  <a:srgbClr val="FF0000"/>
+                </a:solidFill>
+                <a:effectLst/>
+                <a:latin typeface="Consolas" panose="020B0609020204030204" pitchFamily="49" charset="0"/>
+              </a:rPr>
+              <a:t>SWOSIO_BUTTON</a:t>
+            </a:r>
+          </a:p>
+        </p:txBody>
+      </p:sp>
+      <p:cxnSp>
+        <p:nvCxnSpPr>
+          <p:cNvPr id="194" name="Verbinder: gewinkelt 193">
+            <a:extLst>
+              <a:ext uri="{FF2B5EF4-FFF2-40B4-BE49-F238E27FC236}">
+                <a16:creationId xmlns:a16="http://schemas.microsoft.com/office/drawing/2014/main" id="{4468CE8C-CF36-3EFD-3867-7D1DA160D6FE}"/>
+              </a:ext>
+            </a:extLst>
+          </p:cNvPr>
+          <p:cNvCxnSpPr>
+            <a:cxnSpLocks/>
+            <a:stCxn id="85" idx="2"/>
+            <a:endCxn id="193" idx="1"/>
+          </p:cNvCxnSpPr>
+          <p:nvPr/>
+        </p:nvCxnSpPr>
+        <p:spPr>
+          <a:xfrm rot="16200000" flipH="1">
+            <a:off x="2889090" y="4738688"/>
+            <a:ext cx="1032218" cy="283094"/>
+          </a:xfrm>
+          <a:prstGeom prst="bentConnector2">
+            <a:avLst/>
+          </a:prstGeom>
+          <a:ln>
+            <a:solidFill>
+              <a:srgbClr val="FF0000"/>
+            </a:solidFill>
+          </a:ln>
+        </p:spPr>
+        <p:style>
+          <a:lnRef idx="1">
+            <a:schemeClr val="accent1"/>
+          </a:lnRef>
+          <a:fillRef idx="0">
+            <a:schemeClr val="accent1"/>
+          </a:fillRef>
+          <a:effectRef idx="0">
+            <a:schemeClr val="accent1"/>
+          </a:effectRef>
+          <a:fontRef idx="minor">
+            <a:schemeClr val="tx1"/>
+          </a:fontRef>
+        </p:style>
+      </p:cxnSp>
+      <p:sp>
+        <p:nvSpPr>
+          <p:cNvPr id="207" name="Textfeld 206">
+            <a:extLst>
+              <a:ext uri="{FF2B5EF4-FFF2-40B4-BE49-F238E27FC236}">
+                <a16:creationId xmlns:a16="http://schemas.microsoft.com/office/drawing/2014/main" id="{7104A2FB-7518-E1FD-FDD7-332D5232AD2E}"/>
+              </a:ext>
+            </a:extLst>
+          </p:cNvPr>
+          <p:cNvSpPr txBox="1"/>
+          <p:nvPr/>
+        </p:nvSpPr>
+        <p:spPr>
+          <a:xfrm>
+            <a:off x="-477267" y="4506755"/>
+            <a:ext cx="1512000" cy="259943"/>
+          </a:xfrm>
+          <a:prstGeom prst="rect">
+            <a:avLst/>
+          </a:prstGeom>
+          <a:noFill/>
+        </p:spPr>
+        <p:txBody>
+          <a:bodyPr wrap="square">
+            <a:spAutoFit/>
+          </a:bodyPr>
+          <a:lstStyle/>
+          <a:p>
+            <a:pPr algn="r">
+              <a:lnSpc>
+                <a:spcPts val="1425"/>
+              </a:lnSpc>
+            </a:pPr>
+            <a:r>
+              <a:rPr lang="de-DE" sz="1000" b="0" dirty="0">
+                <a:solidFill>
+                  <a:srgbClr val="FF0000"/>
+                </a:solidFill>
+                <a:effectLst/>
+                <a:latin typeface="Consolas" panose="020B0609020204030204" pitchFamily="49" charset="0"/>
+              </a:rPr>
+              <a:t>SWOSIO_ANALOG</a:t>
+            </a:r>
+          </a:p>
+        </p:txBody>
+      </p:sp>
+      <p:sp>
+        <p:nvSpPr>
+          <p:cNvPr id="209" name="Textfeld 208">
+            <a:extLst>
+              <a:ext uri="{FF2B5EF4-FFF2-40B4-BE49-F238E27FC236}">
+                <a16:creationId xmlns:a16="http://schemas.microsoft.com/office/drawing/2014/main" id="{CBA265A5-115B-F8B3-882A-81DA88FE6C7A}"/>
+              </a:ext>
+            </a:extLst>
+          </p:cNvPr>
+          <p:cNvSpPr txBox="1"/>
+          <p:nvPr/>
+        </p:nvSpPr>
+        <p:spPr>
+          <a:xfrm>
+            <a:off x="-477267" y="4723341"/>
+            <a:ext cx="1512000" cy="259943"/>
+          </a:xfrm>
+          <a:prstGeom prst="rect">
+            <a:avLst/>
+          </a:prstGeom>
+          <a:noFill/>
+        </p:spPr>
+        <p:txBody>
+          <a:bodyPr wrap="square">
+            <a:spAutoFit/>
+          </a:bodyPr>
+          <a:lstStyle/>
+          <a:p>
+            <a:pPr algn="r">
+              <a:lnSpc>
+                <a:spcPts val="1425"/>
+              </a:lnSpc>
+            </a:pPr>
+            <a:r>
+              <a:rPr lang="de-DE" sz="1000" b="0" dirty="0">
+                <a:solidFill>
+                  <a:srgbClr val="FF0000"/>
+                </a:solidFill>
+                <a:effectLst/>
+                <a:latin typeface="Consolas" panose="020B0609020204030204" pitchFamily="49" charset="0"/>
+              </a:rPr>
+              <a:t>SWOSIO_VOLTMETER</a:t>
+            </a:r>
+          </a:p>
+        </p:txBody>
+      </p:sp>
+      <p:sp>
+        <p:nvSpPr>
+          <p:cNvPr id="210" name="Textfeld 209">
+            <a:extLst>
+              <a:ext uri="{FF2B5EF4-FFF2-40B4-BE49-F238E27FC236}">
+                <a16:creationId xmlns:a16="http://schemas.microsoft.com/office/drawing/2014/main" id="{80644641-98C6-6361-11C7-F77D008DC837}"/>
+              </a:ext>
+            </a:extLst>
+          </p:cNvPr>
+          <p:cNvSpPr txBox="1"/>
+          <p:nvPr/>
+        </p:nvSpPr>
+        <p:spPr>
+          <a:xfrm>
+            <a:off x="-477267" y="4940026"/>
+            <a:ext cx="1512000" cy="259943"/>
+          </a:xfrm>
+          <a:prstGeom prst="rect">
+            <a:avLst/>
+          </a:prstGeom>
+          <a:noFill/>
+        </p:spPr>
+        <p:txBody>
+          <a:bodyPr wrap="square">
+            <a:spAutoFit/>
+          </a:bodyPr>
+          <a:lstStyle/>
+          <a:p>
+            <a:pPr algn="r">
+              <a:lnSpc>
+                <a:spcPts val="1425"/>
+              </a:lnSpc>
+            </a:pPr>
+            <a:r>
+              <a:rPr lang="de-DE" sz="1000" b="0" dirty="0">
+                <a:solidFill>
+                  <a:srgbClr val="FF0000"/>
+                </a:solidFill>
+                <a:effectLst/>
+                <a:latin typeface="Consolas" panose="020B0609020204030204" pitchFamily="49" charset="0"/>
+              </a:rPr>
+              <a:t>SWOSIO_OHMMETER</a:t>
+            </a:r>
+          </a:p>
+        </p:txBody>
+      </p:sp>
+      <p:sp>
+        <p:nvSpPr>
+          <p:cNvPr id="212" name="Textfeld 211">
+            <a:extLst>
+              <a:ext uri="{FF2B5EF4-FFF2-40B4-BE49-F238E27FC236}">
+                <a16:creationId xmlns:a16="http://schemas.microsoft.com/office/drawing/2014/main" id="{9ACE2C3A-B3DD-FD36-81B9-C8778DB29262}"/>
+              </a:ext>
+            </a:extLst>
+          </p:cNvPr>
+          <p:cNvSpPr txBox="1"/>
+          <p:nvPr/>
+        </p:nvSpPr>
+        <p:spPr>
+          <a:xfrm>
+            <a:off x="-477268" y="5156612"/>
+            <a:ext cx="1512000" cy="259943"/>
+          </a:xfrm>
+          <a:prstGeom prst="rect">
+            <a:avLst/>
+          </a:prstGeom>
+          <a:noFill/>
+        </p:spPr>
+        <p:txBody>
+          <a:bodyPr wrap="square">
+            <a:spAutoFit/>
+          </a:bodyPr>
+          <a:lstStyle/>
+          <a:p>
+            <a:pPr algn="r">
+              <a:lnSpc>
+                <a:spcPts val="1425"/>
+              </a:lnSpc>
+            </a:pPr>
+            <a:r>
+              <a:rPr lang="de-DE" sz="1000" b="0" dirty="0">
+                <a:solidFill>
+                  <a:srgbClr val="FF0000"/>
+                </a:solidFill>
+                <a:effectLst/>
+                <a:latin typeface="Consolas" panose="020B0609020204030204" pitchFamily="49" charset="0"/>
+              </a:rPr>
+              <a:t>SWOSIO_THERMOMETER</a:t>
+            </a:r>
+          </a:p>
+        </p:txBody>
+      </p:sp>
+      <p:sp>
+        <p:nvSpPr>
+          <p:cNvPr id="214" name="Textfeld 213">
+            <a:extLst>
+              <a:ext uri="{FF2B5EF4-FFF2-40B4-BE49-F238E27FC236}">
+                <a16:creationId xmlns:a16="http://schemas.microsoft.com/office/drawing/2014/main" id="{CE656988-4396-2646-4A6F-92CC4881FDCC}"/>
+              </a:ext>
+            </a:extLst>
+          </p:cNvPr>
+          <p:cNvSpPr txBox="1"/>
+          <p:nvPr/>
+        </p:nvSpPr>
+        <p:spPr>
+          <a:xfrm>
+            <a:off x="-477269" y="5373198"/>
+            <a:ext cx="1512000" cy="259943"/>
+          </a:xfrm>
+          <a:prstGeom prst="rect">
+            <a:avLst/>
+          </a:prstGeom>
+          <a:noFill/>
+        </p:spPr>
+        <p:txBody>
+          <a:bodyPr wrap="square">
+            <a:spAutoFit/>
+          </a:bodyPr>
+          <a:lstStyle/>
+          <a:p>
+            <a:pPr algn="r">
+              <a:lnSpc>
+                <a:spcPts val="1425"/>
+              </a:lnSpc>
+            </a:pPr>
+            <a:r>
+              <a:rPr lang="de-DE" sz="1000" b="0" dirty="0">
+                <a:solidFill>
+                  <a:srgbClr val="FF0000"/>
+                </a:solidFill>
+                <a:effectLst/>
+                <a:latin typeface="Consolas" panose="020B0609020204030204" pitchFamily="49" charset="0"/>
+              </a:rPr>
+              <a:t>SWOSIO_LDR</a:t>
+            </a:r>
+          </a:p>
+        </p:txBody>
+      </p:sp>
+      <p:cxnSp>
+        <p:nvCxnSpPr>
+          <p:cNvPr id="223" name="Verbinder: gewinkelt 222">
+            <a:extLst>
+              <a:ext uri="{FF2B5EF4-FFF2-40B4-BE49-F238E27FC236}">
+                <a16:creationId xmlns:a16="http://schemas.microsoft.com/office/drawing/2014/main" id="{F0828E18-B41E-A0F6-A878-CF3A3EC41283}"/>
+              </a:ext>
+            </a:extLst>
+          </p:cNvPr>
+          <p:cNvCxnSpPr>
+            <a:cxnSpLocks/>
+            <a:stCxn id="22" idx="2"/>
+            <a:endCxn id="207" idx="3"/>
+          </p:cNvCxnSpPr>
+          <p:nvPr/>
+        </p:nvCxnSpPr>
+        <p:spPr>
+          <a:xfrm rot="5400000">
+            <a:off x="1022325" y="4376534"/>
+            <a:ext cx="272601" cy="247784"/>
+          </a:xfrm>
+          <a:prstGeom prst="bentConnector2">
+            <a:avLst/>
+          </a:prstGeom>
+          <a:ln>
+            <a:solidFill>
+              <a:srgbClr val="FF0000"/>
+            </a:solidFill>
+          </a:ln>
+        </p:spPr>
+        <p:style>
+          <a:lnRef idx="1">
+            <a:schemeClr val="accent1"/>
+          </a:lnRef>
+          <a:fillRef idx="0">
+            <a:schemeClr val="accent1"/>
+          </a:fillRef>
+          <a:effectRef idx="0">
+            <a:schemeClr val="accent1"/>
+          </a:effectRef>
+          <a:fontRef idx="minor">
+            <a:schemeClr val="tx1"/>
+          </a:fontRef>
+        </p:style>
+      </p:cxnSp>
+      <p:sp>
+        <p:nvSpPr>
+          <p:cNvPr id="225" name="Textfeld 224">
+            <a:extLst>
+              <a:ext uri="{FF2B5EF4-FFF2-40B4-BE49-F238E27FC236}">
+                <a16:creationId xmlns:a16="http://schemas.microsoft.com/office/drawing/2014/main" id="{F2DB9D43-2050-227C-A66A-BD8A336C9B86}"/>
+              </a:ext>
+            </a:extLst>
+          </p:cNvPr>
+          <p:cNvSpPr txBox="1"/>
+          <p:nvPr/>
+        </p:nvSpPr>
+        <p:spPr>
+          <a:xfrm>
+            <a:off x="-477269" y="5579939"/>
+            <a:ext cx="1512000" cy="259943"/>
+          </a:xfrm>
+          <a:prstGeom prst="rect">
+            <a:avLst/>
+          </a:prstGeom>
+          <a:noFill/>
+        </p:spPr>
+        <p:txBody>
+          <a:bodyPr wrap="square">
+            <a:spAutoFit/>
+          </a:bodyPr>
+          <a:lstStyle/>
+          <a:p>
+            <a:pPr algn="r">
+              <a:lnSpc>
+                <a:spcPts val="1425"/>
+              </a:lnSpc>
+            </a:pPr>
+            <a:r>
+              <a:rPr lang="de-DE" sz="1000" b="0" dirty="0">
+                <a:solidFill>
+                  <a:srgbClr val="FF0000"/>
+                </a:solidFill>
+                <a:effectLst/>
+                <a:latin typeface="Consolas" panose="020B0609020204030204" pitchFamily="49" charset="0"/>
+              </a:rPr>
+              <a:t>SWOSIO_JOYSTICK</a:t>
+            </a:r>
+          </a:p>
+        </p:txBody>
+      </p:sp>
+      <p:cxnSp>
+        <p:nvCxnSpPr>
+          <p:cNvPr id="237" name="Verbinder: gewinkelt 236">
+            <a:extLst>
+              <a:ext uri="{FF2B5EF4-FFF2-40B4-BE49-F238E27FC236}">
+                <a16:creationId xmlns:a16="http://schemas.microsoft.com/office/drawing/2014/main" id="{A9FD8154-A241-59CC-DE96-62A2976B5EF3}"/>
+              </a:ext>
+            </a:extLst>
+          </p:cNvPr>
+          <p:cNvCxnSpPr>
+            <a:cxnSpLocks/>
+            <a:stCxn id="155" idx="2"/>
+            <a:endCxn id="238" idx="3"/>
+          </p:cNvCxnSpPr>
+          <p:nvPr/>
+        </p:nvCxnSpPr>
+        <p:spPr>
+          <a:xfrm rot="5400000">
+            <a:off x="1010874" y="3240499"/>
+            <a:ext cx="244977" cy="283199"/>
+          </a:xfrm>
+          <a:prstGeom prst="bentConnector2">
+            <a:avLst/>
+          </a:prstGeom>
+          <a:ln>
+            <a:solidFill>
+              <a:srgbClr val="FF0000"/>
+            </a:solidFill>
+          </a:ln>
+        </p:spPr>
+        <p:style>
+          <a:lnRef idx="1">
+            <a:schemeClr val="accent1"/>
+          </a:lnRef>
+          <a:fillRef idx="0">
+            <a:schemeClr val="accent1"/>
+          </a:fillRef>
+          <a:effectRef idx="0">
+            <a:schemeClr val="accent1"/>
+          </a:effectRef>
+          <a:fontRef idx="minor">
+            <a:schemeClr val="tx1"/>
+          </a:fontRef>
+        </p:style>
+      </p:cxnSp>
+      <p:sp>
+        <p:nvSpPr>
+          <p:cNvPr id="238" name="Textfeld 237">
+            <a:extLst>
+              <a:ext uri="{FF2B5EF4-FFF2-40B4-BE49-F238E27FC236}">
+                <a16:creationId xmlns:a16="http://schemas.microsoft.com/office/drawing/2014/main" id="{7F718FBB-8B53-C500-8A66-39F81718E89B}"/>
+              </a:ext>
+            </a:extLst>
+          </p:cNvPr>
+          <p:cNvSpPr txBox="1"/>
+          <p:nvPr/>
+        </p:nvSpPr>
+        <p:spPr>
+          <a:xfrm>
+            <a:off x="-249713" y="3374615"/>
+            <a:ext cx="1241475" cy="259943"/>
+          </a:xfrm>
+          <a:prstGeom prst="rect">
+            <a:avLst/>
+          </a:prstGeom>
+          <a:noFill/>
+        </p:spPr>
+        <p:txBody>
+          <a:bodyPr wrap="square">
+            <a:spAutoFit/>
+          </a:bodyPr>
+          <a:lstStyle/>
+          <a:p>
+            <a:pPr algn="r">
+              <a:lnSpc>
+                <a:spcPts val="1425"/>
+              </a:lnSpc>
+            </a:pPr>
+            <a:r>
+              <a:rPr lang="de-DE" sz="1000" b="0" dirty="0">
+                <a:solidFill>
+                  <a:srgbClr val="FF0000"/>
+                </a:solidFill>
+                <a:effectLst/>
+                <a:latin typeface="Consolas" panose="020B0609020204030204" pitchFamily="49" charset="0"/>
+              </a:rPr>
+              <a:t>SWOSIO_LIDAR</a:t>
+            </a:r>
+          </a:p>
+        </p:txBody>
+      </p:sp>
+      <p:cxnSp>
+        <p:nvCxnSpPr>
+          <p:cNvPr id="258" name="Verbinder: gewinkelt 257">
+            <a:extLst>
+              <a:ext uri="{FF2B5EF4-FFF2-40B4-BE49-F238E27FC236}">
+                <a16:creationId xmlns:a16="http://schemas.microsoft.com/office/drawing/2014/main" id="{B11569C6-6DCC-C33B-2CD5-B07B42E13399}"/>
+              </a:ext>
+            </a:extLst>
+          </p:cNvPr>
+          <p:cNvCxnSpPr>
+            <a:cxnSpLocks/>
+            <a:stCxn id="22" idx="2"/>
+            <a:endCxn id="209" idx="3"/>
+          </p:cNvCxnSpPr>
+          <p:nvPr/>
+        </p:nvCxnSpPr>
+        <p:spPr>
+          <a:xfrm rot="5400000">
+            <a:off x="914032" y="4484827"/>
+            <a:ext cx="489187" cy="247784"/>
+          </a:xfrm>
+          <a:prstGeom prst="bentConnector2">
+            <a:avLst/>
+          </a:prstGeom>
+          <a:ln>
+            <a:solidFill>
+              <a:srgbClr val="FF0000"/>
+            </a:solidFill>
+          </a:ln>
+        </p:spPr>
+        <p:style>
+          <a:lnRef idx="1">
+            <a:schemeClr val="accent1"/>
+          </a:lnRef>
+          <a:fillRef idx="0">
+            <a:schemeClr val="accent1"/>
+          </a:fillRef>
+          <a:effectRef idx="0">
+            <a:schemeClr val="accent1"/>
+          </a:effectRef>
+          <a:fontRef idx="minor">
+            <a:schemeClr val="tx1"/>
+          </a:fontRef>
+        </p:style>
+      </p:cxnSp>
+      <p:cxnSp>
+        <p:nvCxnSpPr>
+          <p:cNvPr id="261" name="Verbinder: gewinkelt 260">
+            <a:extLst>
+              <a:ext uri="{FF2B5EF4-FFF2-40B4-BE49-F238E27FC236}">
+                <a16:creationId xmlns:a16="http://schemas.microsoft.com/office/drawing/2014/main" id="{9450DE2E-314D-6FD9-7DDB-9371FBE6F4FA}"/>
+              </a:ext>
+            </a:extLst>
+          </p:cNvPr>
+          <p:cNvCxnSpPr>
+            <a:cxnSpLocks/>
+            <a:stCxn id="22" idx="2"/>
+            <a:endCxn id="210" idx="3"/>
+          </p:cNvCxnSpPr>
+          <p:nvPr/>
+        </p:nvCxnSpPr>
+        <p:spPr>
+          <a:xfrm rot="5400000">
+            <a:off x="805689" y="4593170"/>
+            <a:ext cx="705872" cy="247784"/>
+          </a:xfrm>
+          <a:prstGeom prst="bentConnector2">
+            <a:avLst/>
+          </a:prstGeom>
+          <a:ln>
+            <a:solidFill>
+              <a:srgbClr val="FF0000"/>
+            </a:solidFill>
+          </a:ln>
+        </p:spPr>
+        <p:style>
+          <a:lnRef idx="1">
+            <a:schemeClr val="accent1"/>
+          </a:lnRef>
+          <a:fillRef idx="0">
+            <a:schemeClr val="accent1"/>
+          </a:fillRef>
+          <a:effectRef idx="0">
+            <a:schemeClr val="accent1"/>
+          </a:effectRef>
+          <a:fontRef idx="minor">
+            <a:schemeClr val="tx1"/>
+          </a:fontRef>
+        </p:style>
+      </p:cxnSp>
+      <p:cxnSp>
+        <p:nvCxnSpPr>
+          <p:cNvPr id="264" name="Verbinder: gewinkelt 263">
+            <a:extLst>
+              <a:ext uri="{FF2B5EF4-FFF2-40B4-BE49-F238E27FC236}">
+                <a16:creationId xmlns:a16="http://schemas.microsoft.com/office/drawing/2014/main" id="{AB987571-9695-3CDE-64A1-F386386162D6}"/>
+              </a:ext>
+            </a:extLst>
+          </p:cNvPr>
+          <p:cNvCxnSpPr>
+            <a:cxnSpLocks/>
+            <a:stCxn id="22" idx="2"/>
+            <a:endCxn id="212" idx="3"/>
+          </p:cNvCxnSpPr>
+          <p:nvPr/>
+        </p:nvCxnSpPr>
+        <p:spPr>
+          <a:xfrm rot="5400000">
+            <a:off x="697396" y="4701463"/>
+            <a:ext cx="922458" cy="247785"/>
+          </a:xfrm>
+          <a:prstGeom prst="bentConnector2">
+            <a:avLst/>
+          </a:prstGeom>
+          <a:ln>
+            <a:solidFill>
+              <a:srgbClr val="FF0000"/>
+            </a:solidFill>
+          </a:ln>
+        </p:spPr>
+        <p:style>
+          <a:lnRef idx="1">
+            <a:schemeClr val="accent1"/>
+          </a:lnRef>
+          <a:fillRef idx="0">
+            <a:schemeClr val="accent1"/>
+          </a:fillRef>
+          <a:effectRef idx="0">
+            <a:schemeClr val="accent1"/>
+          </a:effectRef>
+          <a:fontRef idx="minor">
+            <a:schemeClr val="tx1"/>
+          </a:fontRef>
+        </p:style>
+      </p:cxnSp>
+      <p:cxnSp>
+        <p:nvCxnSpPr>
+          <p:cNvPr id="267" name="Verbinder: gewinkelt 266">
+            <a:extLst>
+              <a:ext uri="{FF2B5EF4-FFF2-40B4-BE49-F238E27FC236}">
+                <a16:creationId xmlns:a16="http://schemas.microsoft.com/office/drawing/2014/main" id="{AB73C8B6-F9E3-B9C6-C9F6-D1ABF88127DF}"/>
+              </a:ext>
+            </a:extLst>
+          </p:cNvPr>
+          <p:cNvCxnSpPr>
+            <a:cxnSpLocks/>
+            <a:stCxn id="22" idx="2"/>
+            <a:endCxn id="214" idx="3"/>
+          </p:cNvCxnSpPr>
+          <p:nvPr/>
+        </p:nvCxnSpPr>
+        <p:spPr>
+          <a:xfrm rot="5400000">
+            <a:off x="589102" y="4809755"/>
+            <a:ext cx="1139044" cy="247786"/>
+          </a:xfrm>
+          <a:prstGeom prst="bentConnector2">
+            <a:avLst/>
+          </a:prstGeom>
+          <a:ln>
+            <a:solidFill>
+              <a:srgbClr val="FF0000"/>
+            </a:solidFill>
+          </a:ln>
+        </p:spPr>
+        <p:style>
+          <a:lnRef idx="1">
+            <a:schemeClr val="accent1"/>
+          </a:lnRef>
+          <a:fillRef idx="0">
+            <a:schemeClr val="accent1"/>
+          </a:fillRef>
+          <a:effectRef idx="0">
+            <a:schemeClr val="accent1"/>
+          </a:effectRef>
+          <a:fontRef idx="minor">
+            <a:schemeClr val="tx1"/>
+          </a:fontRef>
+        </p:style>
+      </p:cxnSp>
+      <p:cxnSp>
+        <p:nvCxnSpPr>
+          <p:cNvPr id="270" name="Verbinder: gewinkelt 269">
+            <a:extLst>
+              <a:ext uri="{FF2B5EF4-FFF2-40B4-BE49-F238E27FC236}">
+                <a16:creationId xmlns:a16="http://schemas.microsoft.com/office/drawing/2014/main" id="{109FA0ED-93F5-519E-3DA4-76F330853C7D}"/>
+              </a:ext>
+            </a:extLst>
+          </p:cNvPr>
+          <p:cNvCxnSpPr>
+            <a:cxnSpLocks/>
+            <a:stCxn id="22" idx="2"/>
+            <a:endCxn id="225" idx="3"/>
+          </p:cNvCxnSpPr>
+          <p:nvPr/>
+        </p:nvCxnSpPr>
+        <p:spPr>
+          <a:xfrm rot="5400000">
+            <a:off x="485732" y="4913125"/>
+            <a:ext cx="1345785" cy="247786"/>
+          </a:xfrm>
+          <a:prstGeom prst="bentConnector2">
+            <a:avLst/>
+          </a:prstGeom>
+          <a:ln>
+            <a:solidFill>
+              <a:srgbClr val="FF0000"/>
+            </a:solidFill>
+          </a:ln>
+        </p:spPr>
+        <p:style>
+          <a:lnRef idx="1">
+            <a:schemeClr val="accent1"/>
+          </a:lnRef>
+          <a:fillRef idx="0">
+            <a:schemeClr val="accent1"/>
+          </a:fillRef>
+          <a:effectRef idx="0">
+            <a:schemeClr val="accent1"/>
+          </a:effectRef>
+          <a:fontRef idx="minor">
+            <a:schemeClr val="tx1"/>
+          </a:fontRef>
+        </p:style>
+      </p:cxnSp>
+    </p:spTree>
+    <p:extLst>
+      <p:ext uri="{BB962C8B-B14F-4D97-AF65-F5344CB8AC3E}">
+        <p14:creationId xmlns:p14="http://schemas.microsoft.com/office/powerpoint/2010/main" val="1371274544"/>
+      </p:ext>
+    </p:extLst>
+  </p:cSld>
+  <p:clrMapOvr>
+    <a:masterClrMapping/>
+  </p:clrMapOvr>
+</p:sld>
+</file>
+
+<file path=ppt/slides/slide4.xml><?xml version="1.0" encoding="utf-8"?>
+<p:sld xmlns:a="http://schemas.openxmlformats.org/drawingml/2006/main" xmlns:r="http://schemas.openxmlformats.org/officeDocument/2006/relationships" xmlns:p="http://schemas.openxmlformats.org/presentationml/2006/main">
+  <p:cSld>
+    <p:spTree>
+      <p:nvGrpSpPr>
+        <p:cNvPr id="1" name="">
+          <a:extLst>
+            <a:ext uri="{FF2B5EF4-FFF2-40B4-BE49-F238E27FC236}">
               <a16:creationId xmlns:a16="http://schemas.microsoft.com/office/drawing/2014/main" id="{35730A3F-C303-94F7-1E71-A82E00138293}"/>
             </a:ext>
           </a:extLst>

--- a/docs_raw/class diagramm.pptx
+++ b/docs_raw/class diagramm.pptx
@@ -262,7 +262,7 @@
           <a:p>
             <a:fld id="{EBE88FA0-6002-4C4B-9120-294BEA23AAB4}" type="datetimeFigureOut">
               <a:rPr lang="de-DE" smtClean="0"/>
-              <a:t>31.05.2025</a:t>
+              <a:t>23.07.2025</a:t>
             </a:fld>
             <a:endParaRPr lang="de-DE"/>
           </a:p>
@@ -460,7 +460,7 @@
           <a:p>
             <a:fld id="{EBE88FA0-6002-4C4B-9120-294BEA23AAB4}" type="datetimeFigureOut">
               <a:rPr lang="de-DE" smtClean="0"/>
-              <a:t>31.05.2025</a:t>
+              <a:t>23.07.2025</a:t>
             </a:fld>
             <a:endParaRPr lang="de-DE"/>
           </a:p>
@@ -668,7 +668,7 @@
           <a:p>
             <a:fld id="{EBE88FA0-6002-4C4B-9120-294BEA23AAB4}" type="datetimeFigureOut">
               <a:rPr lang="de-DE" smtClean="0"/>
-              <a:t>31.05.2025</a:t>
+              <a:t>23.07.2025</a:t>
             </a:fld>
             <a:endParaRPr lang="de-DE"/>
           </a:p>
@@ -866,7 +866,7 @@
           <a:p>
             <a:fld id="{EBE88FA0-6002-4C4B-9120-294BEA23AAB4}" type="datetimeFigureOut">
               <a:rPr lang="de-DE" smtClean="0"/>
-              <a:t>31.05.2025</a:t>
+              <a:t>23.07.2025</a:t>
             </a:fld>
             <a:endParaRPr lang="de-DE"/>
           </a:p>
@@ -1141,7 +1141,7 @@
           <a:p>
             <a:fld id="{EBE88FA0-6002-4C4B-9120-294BEA23AAB4}" type="datetimeFigureOut">
               <a:rPr lang="de-DE" smtClean="0"/>
-              <a:t>31.05.2025</a:t>
+              <a:t>23.07.2025</a:t>
             </a:fld>
             <a:endParaRPr lang="de-DE"/>
           </a:p>
@@ -1406,7 +1406,7 @@
           <a:p>
             <a:fld id="{EBE88FA0-6002-4C4B-9120-294BEA23AAB4}" type="datetimeFigureOut">
               <a:rPr lang="de-DE" smtClean="0"/>
-              <a:t>31.05.2025</a:t>
+              <a:t>23.07.2025</a:t>
             </a:fld>
             <a:endParaRPr lang="de-DE"/>
           </a:p>
@@ -1818,7 +1818,7 @@
           <a:p>
             <a:fld id="{EBE88FA0-6002-4C4B-9120-294BEA23AAB4}" type="datetimeFigureOut">
               <a:rPr lang="de-DE" smtClean="0"/>
-              <a:t>31.05.2025</a:t>
+              <a:t>23.07.2025</a:t>
             </a:fld>
             <a:endParaRPr lang="de-DE"/>
           </a:p>
@@ -1959,7 +1959,7 @@
           <a:p>
             <a:fld id="{EBE88FA0-6002-4C4B-9120-294BEA23AAB4}" type="datetimeFigureOut">
               <a:rPr lang="de-DE" smtClean="0"/>
-              <a:t>31.05.2025</a:t>
+              <a:t>23.07.2025</a:t>
             </a:fld>
             <a:endParaRPr lang="de-DE"/>
           </a:p>
@@ -2072,7 +2072,7 @@
           <a:p>
             <a:fld id="{EBE88FA0-6002-4C4B-9120-294BEA23AAB4}" type="datetimeFigureOut">
               <a:rPr lang="de-DE" smtClean="0"/>
-              <a:t>31.05.2025</a:t>
+              <a:t>23.07.2025</a:t>
             </a:fld>
             <a:endParaRPr lang="de-DE"/>
           </a:p>
@@ -2383,7 +2383,7 @@
           <a:p>
             <a:fld id="{EBE88FA0-6002-4C4B-9120-294BEA23AAB4}" type="datetimeFigureOut">
               <a:rPr lang="de-DE" smtClean="0"/>
-              <a:t>31.05.2025</a:t>
+              <a:t>23.07.2025</a:t>
             </a:fld>
             <a:endParaRPr lang="de-DE"/>
           </a:p>
@@ -2671,7 +2671,7 @@
           <a:p>
             <a:fld id="{EBE88FA0-6002-4C4B-9120-294BEA23AAB4}" type="datetimeFigureOut">
               <a:rPr lang="de-DE" smtClean="0"/>
-              <a:t>31.05.2025</a:t>
+              <a:t>23.07.2025</a:t>
             </a:fld>
             <a:endParaRPr lang="de-DE"/>
           </a:p>
@@ -2912,7 +2912,7 @@
           <a:p>
             <a:fld id="{EBE88FA0-6002-4C4B-9120-294BEA23AAB4}" type="datetimeFigureOut">
               <a:rPr lang="de-DE" smtClean="0"/>
-              <a:t>31.05.2025</a:t>
+              <a:t>23.07.2025</a:t>
             </a:fld>
             <a:endParaRPr lang="de-DE"/>
           </a:p>
